--- a/docs/public/course-assets/course-pptx/ov-005.pptx
+++ b/docs/public/course-assets/course-pptx/ov-005.pptx
@@ -2,22 +2,22 @@
 <file path=ppt/presentation.xml><?xml version="1.0" encoding="utf-8"?>
 <p:presentation xmlns:p="http://schemas.openxmlformats.org/presentationml/2006/main">
   <p:sldMasterIdLst>
-    <p:sldMasterId xmlns:r="http://schemas.openxmlformats.org/officeDocument/2006/relationships" id="2147483648" r:id="R259aa1fffd044d79"/>
+    <p:sldMasterId xmlns:r="http://schemas.openxmlformats.org/officeDocument/2006/relationships" id="2147483648" r:id="Rdb0ebb7c50c04d01"/>
   </p:sldMasterIdLst>
   <p:notesMasterIdLst>
-    <p:notesMasterId xmlns:r="http://schemas.openxmlformats.org/officeDocument/2006/relationships" r:id="Rfb7fdeb2998d4821"/>
+    <p:notesMasterId xmlns:r="http://schemas.openxmlformats.org/officeDocument/2006/relationships" r:id="R679ab679fd8b4bc9"/>
   </p:notesMasterIdLst>
   <p:sldIdLst>
-    <p:sldId xmlns:r="http://schemas.openxmlformats.org/officeDocument/2006/relationships" id="256" r:id="Rb8e6737218a145ca"/>
-    <p:sldId xmlns:r="http://schemas.openxmlformats.org/officeDocument/2006/relationships" id="257" r:id="R08b273b9eacb4f1e"/>
-    <p:sldId xmlns:r="http://schemas.openxmlformats.org/officeDocument/2006/relationships" id="258" r:id="R4602d12a2e98429a"/>
-    <p:sldId xmlns:r="http://schemas.openxmlformats.org/officeDocument/2006/relationships" id="259" r:id="Rc0071fc468294ef0"/>
-    <p:sldId xmlns:r="http://schemas.openxmlformats.org/officeDocument/2006/relationships" id="260" r:id="R8fb61697a007448d"/>
-    <p:sldId xmlns:r="http://schemas.openxmlformats.org/officeDocument/2006/relationships" id="261" r:id="R3b6535a15ba44f69"/>
-    <p:sldId xmlns:r="http://schemas.openxmlformats.org/officeDocument/2006/relationships" id="262" r:id="Rae8cdba519c9428f"/>
-    <p:sldId xmlns:r="http://schemas.openxmlformats.org/officeDocument/2006/relationships" id="263" r:id="R101c1cc2eaba40ff"/>
-    <p:sldId xmlns:r="http://schemas.openxmlformats.org/officeDocument/2006/relationships" id="264" r:id="Rfb473a7bb55f4320"/>
-    <p:sldId xmlns:r="http://schemas.openxmlformats.org/officeDocument/2006/relationships" id="265" r:id="Rec29b4df85694e80"/>
+    <p:sldId xmlns:r="http://schemas.openxmlformats.org/officeDocument/2006/relationships" id="256" r:id="R3b83a80c7cec4678"/>
+    <p:sldId xmlns:r="http://schemas.openxmlformats.org/officeDocument/2006/relationships" id="257" r:id="Rfbe14e3897a7438e"/>
+    <p:sldId xmlns:r="http://schemas.openxmlformats.org/officeDocument/2006/relationships" id="258" r:id="R1ebc7b175add4356"/>
+    <p:sldId xmlns:r="http://schemas.openxmlformats.org/officeDocument/2006/relationships" id="259" r:id="R3befd4962dda49a4"/>
+    <p:sldId xmlns:r="http://schemas.openxmlformats.org/officeDocument/2006/relationships" id="260" r:id="R6f92e3c159044d96"/>
+    <p:sldId xmlns:r="http://schemas.openxmlformats.org/officeDocument/2006/relationships" id="261" r:id="R72bc0b76cfa14910"/>
+    <p:sldId xmlns:r="http://schemas.openxmlformats.org/officeDocument/2006/relationships" id="262" r:id="R9875ae40dea14063"/>
+    <p:sldId xmlns:r="http://schemas.openxmlformats.org/officeDocument/2006/relationships" id="263" r:id="R3edf2a5c1aa04915"/>
+    <p:sldId xmlns:r="http://schemas.openxmlformats.org/officeDocument/2006/relationships" id="264" r:id="R3aa95de2e9d44f99"/>
+    <p:sldId xmlns:r="http://schemas.openxmlformats.org/officeDocument/2006/relationships" id="265" r:id="Raecbc5944c7f4e6a"/>
   </p:sldIdLst>
   <p:sldSz cx="12192000" cy="6858000"/>
   <p:notesSz cx="6858000" cy="9144000"/>
@@ -1204,7 +1204,7 @@
   </p:cSld>
   <p:clrMap bg1="lt1" tx1="dk1" bg2="lt2" tx2="dk2" accent1="accent1" accent2="accent2" accent3="accent3" accent4="accent4" accent5="accent5" accent6="accent6" hlink="hlink" folHlink="folHlink"/>
   <p:sldLayoutIdLst>
-    <p:sldLayoutId xmlns:r="http://schemas.openxmlformats.org/officeDocument/2006/relationships" id="2147483649" r:id="R7245cce0ff684670"/>
+    <p:sldLayoutId xmlns:r="http://schemas.openxmlformats.org/officeDocument/2006/relationships" id="2147483649" r:id="Rdc4fb9a9f6d2407e"/>
   </p:sldLayoutIdLst>
   <p:txStyles>
     <p:titleStyle>
@@ -1755,7 +1755,7 @@
           <p:cNvPr id="1" name="cover-rule">
             <a:extLst xmlns:a="http://schemas.openxmlformats.org/drawingml/2006/main">
               <a:ext uri="{FF2B5EF4-FFF2-40B4-BE49-F238E27FC236}">
-                <a16:creationId xmlns:a16="http://schemas.microsoft.com/office/drawing/2014/main" id="{43C9AA4B-C7AE-407B-9AE8-9827B80D04E4}"/>
+                <a16:creationId xmlns:a16="http://schemas.microsoft.com/office/drawing/2014/main" id="{3EFF60D9-313F-4313-AAAB-965A4AA3CF48}"/>
               </a:ext>
             </a:extLst>
           </p:cNvPr>
@@ -1788,7 +1788,7 @@
           <p:cNvPr id="2" name="cover-ring-1">
             <a:extLst xmlns:a="http://schemas.openxmlformats.org/drawingml/2006/main">
               <a:ext uri="{FF2B5EF4-FFF2-40B4-BE49-F238E27FC236}">
-                <a16:creationId xmlns:a16="http://schemas.microsoft.com/office/drawing/2014/main" id="{EEDC1223-1554-4281-A39F-6578254638D1}"/>
+                <a16:creationId xmlns:a16="http://schemas.microsoft.com/office/drawing/2014/main" id="{C269DC27-2AA6-418A-B5AF-B89FF4E0F31C}"/>
               </a:ext>
             </a:extLst>
           </p:cNvPr>
@@ -1819,7 +1819,7 @@
           <p:cNvPr id="3" name="cover-ring-2">
             <a:extLst xmlns:a="http://schemas.openxmlformats.org/drawingml/2006/main">
               <a:ext uri="{FF2B5EF4-FFF2-40B4-BE49-F238E27FC236}">
-                <a16:creationId xmlns:a16="http://schemas.microsoft.com/office/drawing/2014/main" id="{045AA4D0-D13E-4A08-B0B2-2F4720CF1DDE}"/>
+                <a16:creationId xmlns:a16="http://schemas.microsoft.com/office/drawing/2014/main" id="{317ACDDA-21B3-4ABA-8803-B3CED8C34288}"/>
               </a:ext>
             </a:extLst>
           </p:cNvPr>
@@ -1850,7 +1850,7 @@
           <p:cNvPr id="4" name="cover-core">
             <a:extLst xmlns:a="http://schemas.openxmlformats.org/drawingml/2006/main">
               <a:ext uri="{FF2B5EF4-FFF2-40B4-BE49-F238E27FC236}">
-                <a16:creationId xmlns:a16="http://schemas.microsoft.com/office/drawing/2014/main" id="{397488EA-1E63-4C9E-931E-2630FFFA2A2B}"/>
+                <a16:creationId xmlns:a16="http://schemas.microsoft.com/office/drawing/2014/main" id="{F23C004D-954F-4086-B594-C9A4EE15066F}"/>
               </a:ext>
             </a:extLst>
           </p:cNvPr>
@@ -1883,7 +1883,7 @@
           <p:cNvPr id="5" name="cover-line-1">
             <a:extLst xmlns:a="http://schemas.openxmlformats.org/drawingml/2006/main">
               <a:ext uri="{FF2B5EF4-FFF2-40B4-BE49-F238E27FC236}">
-                <a16:creationId xmlns:a16="http://schemas.microsoft.com/office/drawing/2014/main" id="{37936021-77D1-4B89-87EA-F8C077319666}"/>
+                <a16:creationId xmlns:a16="http://schemas.microsoft.com/office/drawing/2014/main" id="{B7B6DF42-BC48-4DA8-84D4-29E28035D77F}"/>
               </a:ext>
             </a:extLst>
           </p:cNvPr>
@@ -1914,7 +1914,7 @@
           <p:cNvPr id="6" name="cover-line-2">
             <a:extLst xmlns:a="http://schemas.openxmlformats.org/drawingml/2006/main">
               <a:ext uri="{FF2B5EF4-FFF2-40B4-BE49-F238E27FC236}">
-                <a16:creationId xmlns:a16="http://schemas.microsoft.com/office/drawing/2014/main" id="{BE28E091-F901-4711-8F68-C044BE852EFF}"/>
+                <a16:creationId xmlns:a16="http://schemas.microsoft.com/office/drawing/2014/main" id="{1900D918-22B7-4193-A4D9-94425EC03544}"/>
               </a:ext>
             </a:extLst>
           </p:cNvPr>
@@ -1945,7 +1945,7 @@
           <p:cNvPr id="7" name="cover-eyebrow">
             <a:extLst xmlns:a="http://schemas.openxmlformats.org/drawingml/2006/main">
               <a:ext uri="{FF2B5EF4-FFF2-40B4-BE49-F238E27FC236}">
-                <a16:creationId xmlns:a16="http://schemas.microsoft.com/office/drawing/2014/main" id="{1ED473F8-AAA1-4657-92ED-A6B4843569D2}"/>
+                <a16:creationId xmlns:a16="http://schemas.microsoft.com/office/drawing/2014/main" id="{9656CBCC-7366-47D6-81D8-BA261F68A0C8}"/>
               </a:ext>
             </a:extLst>
           </p:cNvPr>
@@ -2003,7 +2003,7 @@
           <p:cNvPr id="8" name="cover-title">
             <a:extLst xmlns:a="http://schemas.openxmlformats.org/drawingml/2006/main">
               <a:ext uri="{FF2B5EF4-FFF2-40B4-BE49-F238E27FC236}">
-                <a16:creationId xmlns:a16="http://schemas.microsoft.com/office/drawing/2014/main" id="{9068165C-E9A3-46EB-A7C1-54C0591E7348}"/>
+                <a16:creationId xmlns:a16="http://schemas.microsoft.com/office/drawing/2014/main" id="{B474BE09-0524-4532-A02A-CED78B0FB029}"/>
               </a:ext>
             </a:extLst>
           </p:cNvPr>
@@ -2061,7 +2061,7 @@
           <p:cNvPr id="9" name="cover-subtitle">
             <a:extLst xmlns:a="http://schemas.openxmlformats.org/drawingml/2006/main">
               <a:ext uri="{FF2B5EF4-FFF2-40B4-BE49-F238E27FC236}">
-                <a16:creationId xmlns:a16="http://schemas.microsoft.com/office/drawing/2014/main" id="{BB99F782-43EB-4E52-AF83-317FD4A6123F}"/>
+                <a16:creationId xmlns:a16="http://schemas.microsoft.com/office/drawing/2014/main" id="{14B25B0A-760C-4708-815E-7DC1F20496D0}"/>
               </a:ext>
             </a:extLst>
           </p:cNvPr>
@@ -2123,7 +2123,7 @@
           <p:cNvPr id="10" name="cover-lead">
             <a:extLst xmlns:a="http://schemas.openxmlformats.org/drawingml/2006/main">
               <a:ext uri="{FF2B5EF4-FFF2-40B4-BE49-F238E27FC236}">
-                <a16:creationId xmlns:a16="http://schemas.microsoft.com/office/drawing/2014/main" id="{A176DFCF-9F2B-4544-B7B2-C9569951343A}"/>
+                <a16:creationId xmlns:a16="http://schemas.microsoft.com/office/drawing/2014/main" id="{7298D9B1-5EBF-4062-B017-E53E719EB9ED}"/>
               </a:ext>
             </a:extLst>
           </p:cNvPr>
@@ -2171,7 +2171,7 @@
                 <a:ea typeface="PingFang SC"/>
                 <a:cs typeface="PingFang SC"/>
               </a:rPr>
-              <a:t>DeepSeek 受到关注，不应只归结为“又出现了一个聊天模型”。它让更多团队同时看到三件事：推理模型可以通过训练与测试时计算改善复杂任务表现…</a:t>
+              <a:t>DeepSeek 受到关注；不应只归结为“又出现了一个聊天模型”；它让更多团队同时看到三件事；推理模型可以通过训练与测试时计算改善复杂任务表现</a:t>
             </a:r>
           </a:p>
         </p:txBody>
@@ -2181,7 +2181,7 @@
           <p:cNvPr id="11" name="cover-course">
             <a:extLst xmlns:a="http://schemas.openxmlformats.org/drawingml/2006/main">
               <a:ext uri="{FF2B5EF4-FFF2-40B4-BE49-F238E27FC236}">
-                <a16:creationId xmlns:a16="http://schemas.microsoft.com/office/drawing/2014/main" id="{88E0F36D-412B-4F87-AB68-4A9FD591A5D1}"/>
+                <a16:creationId xmlns:a16="http://schemas.microsoft.com/office/drawing/2014/main" id="{12B10425-FAD5-4DC5-91F1-EE899D56B9E2}"/>
               </a:ext>
             </a:extLst>
           </p:cNvPr>
@@ -2239,7 +2239,7 @@
           <p:cNvPr id="12" name="cover-id">
             <a:extLst xmlns:a="http://schemas.openxmlformats.org/drawingml/2006/main">
               <a:ext uri="{FF2B5EF4-FFF2-40B4-BE49-F238E27FC236}">
-                <a16:creationId xmlns:a16="http://schemas.microsoft.com/office/drawing/2014/main" id="{DD665A39-A24A-46A8-A28A-0EA73906B0F4}"/>
+                <a16:creationId xmlns:a16="http://schemas.microsoft.com/office/drawing/2014/main" id="{19D477C3-0897-4900-BE5F-0E2E88627AC3}"/>
               </a:ext>
             </a:extLst>
           </p:cNvPr>
@@ -2295,7 +2295,7 @@
     </p:spTree>
     <p:extLst>
       <p:ext uri="{BB962C8B-B14F-4D97-AF65-F5344CB8AC3E}">
-        <p14:creationId xmlns:p14="http://schemas.microsoft.com/office/powerpoint/2010/main" val="419830996"/>
+        <p14:creationId xmlns:p14="http://schemas.microsoft.com/office/powerpoint/2010/main" val="1307546392"/>
       </p:ext>
     </p:extLst>
   </p:cSld>
@@ -2326,7 +2326,7 @@
           <p:cNvPr id="1" name="s10-rule">
             <a:extLst xmlns:a="http://schemas.openxmlformats.org/drawingml/2006/main">
               <a:ext uri="{FF2B5EF4-FFF2-40B4-BE49-F238E27FC236}">
-                <a16:creationId xmlns:a16="http://schemas.microsoft.com/office/drawing/2014/main" id="{DBB5D940-D548-4A09-A870-FF7146BFC27E}"/>
+                <a16:creationId xmlns:a16="http://schemas.microsoft.com/office/drawing/2014/main" id="{0D59885C-5E74-4267-8E83-70AECC58C2A1}"/>
               </a:ext>
             </a:extLst>
           </p:cNvPr>
@@ -2359,7 +2359,7 @@
           <p:cNvPr id="2" name="s10-eyebrow">
             <a:extLst xmlns:a="http://schemas.openxmlformats.org/drawingml/2006/main">
               <a:ext uri="{FF2B5EF4-FFF2-40B4-BE49-F238E27FC236}">
-                <a16:creationId xmlns:a16="http://schemas.microsoft.com/office/drawing/2014/main" id="{DC9BBF31-3FCD-4BFA-9483-52152E942884}"/>
+                <a16:creationId xmlns:a16="http://schemas.microsoft.com/office/drawing/2014/main" id="{F3D730D6-DD29-4EC8-BF70-D7BA7074745F}"/>
               </a:ext>
             </a:extLst>
           </p:cNvPr>
@@ -2417,7 +2417,7 @@
           <p:cNvPr id="3" name="s10-title">
             <a:extLst xmlns:a="http://schemas.openxmlformats.org/drawingml/2006/main">
               <a:ext uri="{FF2B5EF4-FFF2-40B4-BE49-F238E27FC236}">
-                <a16:creationId xmlns:a16="http://schemas.microsoft.com/office/drawing/2014/main" id="{60931606-EE09-41BB-B4D9-2A01DA2D20C8}"/>
+                <a16:creationId xmlns:a16="http://schemas.microsoft.com/office/drawing/2014/main" id="{3958D85E-B444-4887-B1C6-EB3EC30DBA8D}"/>
               </a:ext>
             </a:extLst>
           </p:cNvPr>
@@ -2465,7 +2465,7 @@
                 <a:ea typeface="PingFang SC"/>
                 <a:cs typeface="PingFang SC"/>
               </a:rPr>
-              <a:t>从公开重制课件回到可核对的学习资料</a:t>
+              <a:t>DeepSeek 与开源生态：依据、边界与延伸</a:t>
             </a:r>
           </a:p>
         </p:txBody>
@@ -2475,7 +2475,7 @@
           <p:cNvPr id="4" name="s10-footer">
             <a:extLst xmlns:a="http://schemas.openxmlformats.org/drawingml/2006/main">
               <a:ext uri="{FF2B5EF4-FFF2-40B4-BE49-F238E27FC236}">
-                <a16:creationId xmlns:a16="http://schemas.microsoft.com/office/drawing/2014/main" id="{161744A7-C911-4D7A-9773-214FC0191B39}"/>
+                <a16:creationId xmlns:a16="http://schemas.microsoft.com/office/drawing/2014/main" id="{D242F366-6404-4DBD-9249-4B4155255830}"/>
               </a:ext>
             </a:extLst>
           </p:cNvPr>
@@ -2506,7 +2506,7 @@
           <p:cNvPr id="5" name="s10-identity">
             <a:extLst xmlns:a="http://schemas.openxmlformats.org/drawingml/2006/main">
               <a:ext uri="{FF2B5EF4-FFF2-40B4-BE49-F238E27FC236}">
-                <a16:creationId xmlns:a16="http://schemas.microsoft.com/office/drawing/2014/main" id="{599D69B9-29C8-47A2-A803-1EED113D56D5}"/>
+                <a16:creationId xmlns:a16="http://schemas.microsoft.com/office/drawing/2014/main" id="{812E8C02-FB10-4EF1-8F2A-3DDB3D193AA0}"/>
               </a:ext>
             </a:extLst>
           </p:cNvPr>
@@ -2564,7 +2564,7 @@
           <p:cNvPr id="6" name="source-0">
             <a:extLst xmlns:a="http://schemas.openxmlformats.org/drawingml/2006/main">
               <a:ext uri="{FF2B5EF4-FFF2-40B4-BE49-F238E27FC236}">
-                <a16:creationId xmlns:a16="http://schemas.microsoft.com/office/drawing/2014/main" id="{9A59E2F9-4EEC-47C3-B462-2DECCBB27E26}"/>
+                <a16:creationId xmlns:a16="http://schemas.microsoft.com/office/drawing/2014/main" id="{7660D0CB-EB20-4831-AC87-43F143963F4A}"/>
               </a:ext>
             </a:extLst>
           </p:cNvPr>
@@ -2588,7 +2588,7 @@
           </a:solidFill>
           <a:ln xmlns:a="http://schemas.openxmlformats.org/drawingml/2006/main" w="9525">
             <a:solidFill>
-              <a:srgbClr val="D6A33A"/>
+              <a:srgbClr val="8A5A00"/>
             </a:solidFill>
             <a:prstDash val="solid"/>
           </a:ln>
@@ -2628,7 +2628,7 @@
           <p:cNvPr id="7" name="source-1">
             <a:extLst xmlns:a="http://schemas.openxmlformats.org/drawingml/2006/main">
               <a:ext uri="{FF2B5EF4-FFF2-40B4-BE49-F238E27FC236}">
-                <a16:creationId xmlns:a16="http://schemas.microsoft.com/office/drawing/2014/main" id="{14BDFB49-EA9B-4FB7-A4A6-BDACF5F083EA}"/>
+                <a16:creationId xmlns:a16="http://schemas.microsoft.com/office/drawing/2014/main" id="{6793C831-1079-4E3B-90E4-1C3816D7173B}"/>
               </a:ext>
             </a:extLst>
           </p:cNvPr>
@@ -2682,7 +2682,7 @@
                 <a:ea typeface="PingFang SC"/>
                 <a:cs typeface="PingFang SC"/>
               </a:rPr>
-              <a:t>02  DeepSeek-R1: Incentivizing Reasoning Capability in LLMs via Reinforcement Learning：DeepSeek-R1 官方技术论文…</a:t>
+              <a:t>02  DeepSeek-R1: Incentivizing Reasoning Capability in LLMs via Reinforcement Learning；DeepSeek-R1 官方技术论文</a:t>
             </a:r>
           </a:p>
         </p:txBody>
@@ -2692,7 +2692,7 @@
           <p:cNvPr id="8" name="s10-takeaway-rule">
             <a:extLst xmlns:a="http://schemas.openxmlformats.org/drawingml/2006/main">
               <a:ext uri="{FF2B5EF4-FFF2-40B4-BE49-F238E27FC236}">
-                <a16:creationId xmlns:a16="http://schemas.microsoft.com/office/drawing/2014/main" id="{1824830A-0D59-41FE-A01C-6806BEB87B23}"/>
+                <a16:creationId xmlns:a16="http://schemas.microsoft.com/office/drawing/2014/main" id="{A298A5F0-C077-4B86-82E8-635A29063289}"/>
               </a:ext>
             </a:extLst>
           </p:cNvPr>
@@ -2725,7 +2725,7 @@
           <p:cNvPr id="9" name="s10-takeaway">
             <a:extLst xmlns:a="http://schemas.openxmlformats.org/drawingml/2006/main">
               <a:ext uri="{FF2B5EF4-FFF2-40B4-BE49-F238E27FC236}">
-                <a16:creationId xmlns:a16="http://schemas.microsoft.com/office/drawing/2014/main" id="{FAAB108D-6549-4E5B-B970-F9F665D787B6}"/>
+                <a16:creationId xmlns:a16="http://schemas.microsoft.com/office/drawing/2014/main" id="{616B7B9F-491B-415C-A94B-ABDD2B50DAB4}"/>
               </a:ext>
             </a:extLst>
           </p:cNvPr>
@@ -2781,7 +2781,7 @@
     </p:spTree>
     <p:extLst>
       <p:ext uri="{BB962C8B-B14F-4D97-AF65-F5344CB8AC3E}">
-        <p14:creationId xmlns:p14="http://schemas.microsoft.com/office/powerpoint/2010/main" val="89884027"/>
+        <p14:creationId xmlns:p14="http://schemas.microsoft.com/office/powerpoint/2010/main" val="594213958"/>
       </p:ext>
     </p:extLst>
   </p:cSld>
@@ -2812,7 +2812,7 @@
           <p:cNvPr id="1" name="s2-rule">
             <a:extLst xmlns:a="http://schemas.openxmlformats.org/drawingml/2006/main">
               <a:ext uri="{FF2B5EF4-FFF2-40B4-BE49-F238E27FC236}">
-                <a16:creationId xmlns:a16="http://schemas.microsoft.com/office/drawing/2014/main" id="{39CFB449-A1AA-47E1-804F-11139C13298C}"/>
+                <a16:creationId xmlns:a16="http://schemas.microsoft.com/office/drawing/2014/main" id="{64D572A8-D114-4691-A84B-D73415773A66}"/>
               </a:ext>
             </a:extLst>
           </p:cNvPr>
@@ -2845,7 +2845,7 @@
           <p:cNvPr id="2" name="s2-eyebrow">
             <a:extLst xmlns:a="http://schemas.openxmlformats.org/drawingml/2006/main">
               <a:ext uri="{FF2B5EF4-FFF2-40B4-BE49-F238E27FC236}">
-                <a16:creationId xmlns:a16="http://schemas.microsoft.com/office/drawing/2014/main" id="{BD579250-2579-41FA-9E15-35EF36C5CB9F}"/>
+                <a16:creationId xmlns:a16="http://schemas.microsoft.com/office/drawing/2014/main" id="{1A110534-0659-4D23-9470-0F629BD27155}"/>
               </a:ext>
             </a:extLst>
           </p:cNvPr>
@@ -2903,7 +2903,7 @@
           <p:cNvPr id="3" name="s2-title">
             <a:extLst xmlns:a="http://schemas.openxmlformats.org/drawingml/2006/main">
               <a:ext uri="{FF2B5EF4-FFF2-40B4-BE49-F238E27FC236}">
-                <a16:creationId xmlns:a16="http://schemas.microsoft.com/office/drawing/2014/main" id="{27008FAD-A894-4E8F-9323-355867713BB9}"/>
+                <a16:creationId xmlns:a16="http://schemas.microsoft.com/office/drawing/2014/main" id="{A5C7D88F-8DFD-4304-9FF5-35292B9B0102}"/>
               </a:ext>
             </a:extLst>
           </p:cNvPr>
@@ -2951,7 +2951,7 @@
                 <a:ea typeface="PingFang SC"/>
                 <a:cs typeface="PingFang SC"/>
               </a:rPr>
-              <a:t>学完这一节，你能完成这些判断与行动</a:t>
+              <a:t>DeepSeek 与开源生态：3项学习结果</a:t>
             </a:r>
           </a:p>
         </p:txBody>
@@ -2961,7 +2961,7 @@
           <p:cNvPr id="4" name="s2-footer">
             <a:extLst xmlns:a="http://schemas.openxmlformats.org/drawingml/2006/main">
               <a:ext uri="{FF2B5EF4-FFF2-40B4-BE49-F238E27FC236}">
-                <a16:creationId xmlns:a16="http://schemas.microsoft.com/office/drawing/2014/main" id="{4DDB1BD4-12C9-4475-BF21-F5691A17344A}"/>
+                <a16:creationId xmlns:a16="http://schemas.microsoft.com/office/drawing/2014/main" id="{570EAE40-538D-4B7D-B924-22EF652FD1C2}"/>
               </a:ext>
             </a:extLst>
           </p:cNvPr>
@@ -2992,7 +2992,7 @@
           <p:cNvPr id="5" name="s2-identity">
             <a:extLst xmlns:a="http://schemas.openxmlformats.org/drawingml/2006/main">
               <a:ext uri="{FF2B5EF4-FFF2-40B4-BE49-F238E27FC236}">
-                <a16:creationId xmlns:a16="http://schemas.microsoft.com/office/drawing/2014/main" id="{720A744D-4B57-4982-BBA5-925A55B47160}"/>
+                <a16:creationId xmlns:a16="http://schemas.microsoft.com/office/drawing/2014/main" id="{540E6AB7-CE46-457E-8F0A-D350A19AC3E6}"/>
               </a:ext>
             </a:extLst>
           </p:cNvPr>
@@ -3050,7 +3050,7 @@
           <p:cNvPr id="6" name="objective-1">
             <a:extLst xmlns:a="http://schemas.openxmlformats.org/drawingml/2006/main">
               <a:ext uri="{FF2B5EF4-FFF2-40B4-BE49-F238E27FC236}">
-                <a16:creationId xmlns:a16="http://schemas.microsoft.com/office/drawing/2014/main" id="{5D0F78B0-1A82-4BD4-8F41-E1FB0202C159}"/>
+                <a16:creationId xmlns:a16="http://schemas.microsoft.com/office/drawing/2014/main" id="{39FA36E5-79EE-4662-BEB1-DDD4D17DFAC8}"/>
               </a:ext>
             </a:extLst>
           </p:cNvPr>
@@ -3137,7 +3137,7 @@
           <p:cNvPr id="7" name="objective-2">
             <a:extLst xmlns:a="http://schemas.openxmlformats.org/drawingml/2006/main">
               <a:ext uri="{FF2B5EF4-FFF2-40B4-BE49-F238E27FC236}">
-                <a16:creationId xmlns:a16="http://schemas.microsoft.com/office/drawing/2014/main" id="{99B6FAB6-A781-4A6F-818D-EF8E940A67C7}"/>
+                <a16:creationId xmlns:a16="http://schemas.microsoft.com/office/drawing/2014/main" id="{B1DA4268-51BF-479F-AFD7-58909AC15161}"/>
               </a:ext>
             </a:extLst>
           </p:cNvPr>
@@ -3224,7 +3224,7 @@
           <p:cNvPr id="8" name="objective-3">
             <a:extLst xmlns:a="http://schemas.openxmlformats.org/drawingml/2006/main">
               <a:ext uri="{FF2B5EF4-FFF2-40B4-BE49-F238E27FC236}">
-                <a16:creationId xmlns:a16="http://schemas.microsoft.com/office/drawing/2014/main" id="{BE175BCB-2A77-488B-9871-DDFFAFEC1C7C}"/>
+                <a16:creationId xmlns:a16="http://schemas.microsoft.com/office/drawing/2014/main" id="{D5911979-C088-4774-8C86-217A41E8EE0A}"/>
               </a:ext>
             </a:extLst>
           </p:cNvPr>
@@ -3248,7 +3248,7 @@
           </a:solidFill>
           <a:ln xmlns:a="http://schemas.openxmlformats.org/drawingml/2006/main" w="19050">
             <a:solidFill>
-              <a:srgbClr val="D6A33A"/>
+              <a:srgbClr val="8A5A00"/>
             </a:solidFill>
             <a:prstDash val="solid"/>
           </a:ln>
@@ -3309,7 +3309,7 @@
     </p:spTree>
     <p:extLst>
       <p:ext uri="{BB962C8B-B14F-4D97-AF65-F5344CB8AC3E}">
-        <p14:creationId xmlns:p14="http://schemas.microsoft.com/office/powerpoint/2010/main" val="1620507287"/>
+        <p14:creationId xmlns:p14="http://schemas.microsoft.com/office/powerpoint/2010/main" val="1130368631"/>
       </p:ext>
     </p:extLst>
   </p:cSld>
@@ -3340,7 +3340,7 @@
           <p:cNvPr id="1" name="s3-rule">
             <a:extLst xmlns:a="http://schemas.openxmlformats.org/drawingml/2006/main">
               <a:ext uri="{FF2B5EF4-FFF2-40B4-BE49-F238E27FC236}">
-                <a16:creationId xmlns:a16="http://schemas.microsoft.com/office/drawing/2014/main" id="{504999FF-88F7-486C-A3A5-746F1D2F17EF}"/>
+                <a16:creationId xmlns:a16="http://schemas.microsoft.com/office/drawing/2014/main" id="{A3CCCA59-611E-4BED-855F-42973CB44B23}"/>
               </a:ext>
             </a:extLst>
           </p:cNvPr>
@@ -3373,7 +3373,7 @@
           <p:cNvPr id="2" name="s3-eyebrow">
             <a:extLst xmlns:a="http://schemas.openxmlformats.org/drawingml/2006/main">
               <a:ext uri="{FF2B5EF4-FFF2-40B4-BE49-F238E27FC236}">
-                <a16:creationId xmlns:a16="http://schemas.microsoft.com/office/drawing/2014/main" id="{52313172-6B22-421D-935B-0DC278E8628F}"/>
+                <a16:creationId xmlns:a16="http://schemas.microsoft.com/office/drawing/2014/main" id="{5F3A92B2-245C-46AB-AB02-6551E0085A2B}"/>
               </a:ext>
             </a:extLst>
           </p:cNvPr>
@@ -3431,7 +3431,7 @@
           <p:cNvPr id="3" name="s3-title">
             <a:extLst xmlns:a="http://schemas.openxmlformats.org/drawingml/2006/main">
               <a:ext uri="{FF2B5EF4-FFF2-40B4-BE49-F238E27FC236}">
-                <a16:creationId xmlns:a16="http://schemas.microsoft.com/office/drawing/2014/main" id="{6F53004A-DB9F-4EA0-95D5-29CFC60A1DA2}"/>
+                <a16:creationId xmlns:a16="http://schemas.microsoft.com/office/drawing/2014/main" id="{B833D68B-FF67-4FFD-84A5-C4EA1E1A48A9}"/>
               </a:ext>
             </a:extLst>
           </p:cNvPr>
@@ -3489,7 +3489,7 @@
           <p:cNvPr id="4" name="s3-footer">
             <a:extLst xmlns:a="http://schemas.openxmlformats.org/drawingml/2006/main">
               <a:ext uri="{FF2B5EF4-FFF2-40B4-BE49-F238E27FC236}">
-                <a16:creationId xmlns:a16="http://schemas.microsoft.com/office/drawing/2014/main" id="{BE688E61-0938-4729-A5B8-422F324B179F}"/>
+                <a16:creationId xmlns:a16="http://schemas.microsoft.com/office/drawing/2014/main" id="{4D9D0CD4-4E58-4B78-8273-C27685B73903}"/>
               </a:ext>
             </a:extLst>
           </p:cNvPr>
@@ -3520,7 +3520,7 @@
           <p:cNvPr id="5" name="s3-identity">
             <a:extLst xmlns:a="http://schemas.openxmlformats.org/drawingml/2006/main">
               <a:ext uri="{FF2B5EF4-FFF2-40B4-BE49-F238E27FC236}">
-                <a16:creationId xmlns:a16="http://schemas.microsoft.com/office/drawing/2014/main" id="{2088001B-99E4-4C75-9BEE-F13AF5BB76EE}"/>
+                <a16:creationId xmlns:a16="http://schemas.microsoft.com/office/drawing/2014/main" id="{ED13A467-C9AC-410B-8383-9A65EC4CDD8E}"/>
               </a:ext>
             </a:extLst>
           </p:cNvPr>
@@ -3578,7 +3578,7 @@
           <p:cNvPr id="6" name="core-no-0">
             <a:extLst xmlns:a="http://schemas.openxmlformats.org/drawingml/2006/main">
               <a:ext uri="{FF2B5EF4-FFF2-40B4-BE49-F238E27FC236}">
-                <a16:creationId xmlns:a16="http://schemas.microsoft.com/office/drawing/2014/main" id="{F8CABBE7-0B4F-4678-8899-C337EEFB31C6}"/>
+                <a16:creationId xmlns:a16="http://schemas.microsoft.com/office/drawing/2014/main" id="{E9731A21-45FA-4E18-BF94-BCC43E312554}"/>
               </a:ext>
             </a:extLst>
           </p:cNvPr>
@@ -3610,7 +3610,7 @@
             <a:pPr algn="l">
               <a:defRPr sz="2250" b="1">
                 <a:solidFill>
-                  <a:srgbClr val="D6A33A"/>
+                  <a:srgbClr val="8A5A00"/>
                 </a:solidFill>
                 <a:latin typeface="PingFang SC"/>
                 <a:ea typeface="PingFang SC"/>
@@ -3620,7 +3620,7 @@
             <a:r>
               <a:rPr sz="2250" b="1">
                 <a:solidFill>
-                  <a:srgbClr val="D6A33A"/>
+                  <a:srgbClr val="8A5A00"/>
                 </a:solidFill>
                 <a:latin typeface="PingFang SC"/>
                 <a:ea typeface="PingFang SC"/>
@@ -3636,7 +3636,7 @@
           <p:cNvPr id="7" name="core-label-0">
             <a:extLst xmlns:a="http://schemas.openxmlformats.org/drawingml/2006/main">
               <a:ext uri="{FF2B5EF4-FFF2-40B4-BE49-F238E27FC236}">
-                <a16:creationId xmlns:a16="http://schemas.microsoft.com/office/drawing/2014/main" id="{3636C390-251F-4834-961D-4A06985C655B}"/>
+                <a16:creationId xmlns:a16="http://schemas.microsoft.com/office/drawing/2014/main" id="{07F9B896-6A45-4D79-93A3-FAFEF295B964}"/>
               </a:ext>
             </a:extLst>
           </p:cNvPr>
@@ -3694,7 +3694,7 @@
           <p:cNvPr id="8" name="core-body-0">
             <a:extLst xmlns:a="http://schemas.openxmlformats.org/drawingml/2006/main">
               <a:ext uri="{FF2B5EF4-FFF2-40B4-BE49-F238E27FC236}">
-                <a16:creationId xmlns:a16="http://schemas.microsoft.com/office/drawing/2014/main" id="{A5CF3069-3B4F-4051-AEC3-BD6C11F8B133}"/>
+                <a16:creationId xmlns:a16="http://schemas.microsoft.com/office/drawing/2014/main" id="{B8286EBE-14F8-4B05-B378-A5E9D97E2D8A}"/>
               </a:ext>
             </a:extLst>
           </p:cNvPr>
@@ -3718,7 +3718,7 @@
           </a:solidFill>
           <a:ln xmlns:a="http://schemas.openxmlformats.org/drawingml/2006/main" w="19050">
             <a:solidFill>
-              <a:srgbClr val="D6A33A"/>
+              <a:srgbClr val="8A5A00"/>
             </a:solidFill>
             <a:prstDash val="solid"/>
           </a:ln>
@@ -3748,7 +3748,7 @@
                 <a:ea typeface="PingFang SC"/>
                 <a:cs typeface="PingFang SC"/>
               </a:rPr>
-              <a:t>普通生成模型倾向于直接预测下一个 token。推理模型则通过训练，使模型在数学、代码、规划等任务上更善于分解问题、检查中间结果并在推理阶段投入更多计算。它并不意味着模型拥有稳定的逻辑真理…</a:t>
+              <a:t>普通生成模型倾向于直接预测下一个 token；推理模型则通过训练；使模型在数学、代码、规划等任务上更善于分解问题、检查中间结果并在推理阶段投入更多计算；它并不意味着模型拥有稳定的逻辑真理</a:t>
             </a:r>
           </a:p>
         </p:txBody>
@@ -3758,7 +3758,7 @@
           <p:cNvPr id="9" name="core-no-1">
             <a:extLst xmlns:a="http://schemas.openxmlformats.org/drawingml/2006/main">
               <a:ext uri="{FF2B5EF4-FFF2-40B4-BE49-F238E27FC236}">
-                <a16:creationId xmlns:a16="http://schemas.microsoft.com/office/drawing/2014/main" id="{434979E6-06DC-4472-8E44-B6142D069BE2}"/>
+                <a16:creationId xmlns:a16="http://schemas.microsoft.com/office/drawing/2014/main" id="{009D2BCB-C3B5-4421-B228-9E9AD1634365}"/>
               </a:ext>
             </a:extLst>
           </p:cNvPr>
@@ -3790,7 +3790,7 @@
             <a:pPr algn="l">
               <a:defRPr sz="2250" b="1">
                 <a:solidFill>
-                  <a:srgbClr val="D6A33A"/>
+                  <a:srgbClr val="8A5A00"/>
                 </a:solidFill>
                 <a:latin typeface="PingFang SC"/>
                 <a:ea typeface="PingFang SC"/>
@@ -3800,7 +3800,7 @@
             <a:r>
               <a:rPr sz="2250" b="1">
                 <a:solidFill>
-                  <a:srgbClr val="D6A33A"/>
+                  <a:srgbClr val="8A5A00"/>
                 </a:solidFill>
                 <a:latin typeface="PingFang SC"/>
                 <a:ea typeface="PingFang SC"/>
@@ -3816,7 +3816,7 @@
           <p:cNvPr id="10" name="core-body-1">
             <a:extLst xmlns:a="http://schemas.openxmlformats.org/drawingml/2006/main">
               <a:ext uri="{FF2B5EF4-FFF2-40B4-BE49-F238E27FC236}">
-                <a16:creationId xmlns:a16="http://schemas.microsoft.com/office/drawing/2014/main" id="{75D9499B-3B87-4E66-9138-6DE82D5EDE72}"/>
+                <a16:creationId xmlns:a16="http://schemas.microsoft.com/office/drawing/2014/main" id="{384FF6AD-C6FC-49ED-9BD8-AFBC65336D3D}"/>
               </a:ext>
             </a:extLst>
           </p:cNvPr>
@@ -3870,7 +3870,7 @@
                 <a:ea typeface="PingFang SC"/>
                 <a:cs typeface="PingFang SC"/>
               </a:rPr>
-              <a:t>DeepSeek-R1 论文描述的路线包含冷启动监督数据、面向推理的强化学习、混合数据监督微调和后续强化学习等阶段。强化学习用于奖励可验证的正确结果和合适行为…</a:t>
+              <a:t>DeepSeek-R1 论文描述的路线包含冷启动监督数据、面向推理的强化学习、混合数据监督微调和后续强化学习等阶段；强化学习用于奖励可验证的正确结果和合适行为</a:t>
             </a:r>
           </a:p>
         </p:txBody>
@@ -3880,7 +3880,7 @@
           <p:cNvPr id="11" name="s3-takeaway-rule">
             <a:extLst xmlns:a="http://schemas.openxmlformats.org/drawingml/2006/main">
               <a:ext uri="{FF2B5EF4-FFF2-40B4-BE49-F238E27FC236}">
-                <a16:creationId xmlns:a16="http://schemas.microsoft.com/office/drawing/2014/main" id="{23B976B7-1A7A-4764-95FD-BE4F92544F90}"/>
+                <a16:creationId xmlns:a16="http://schemas.microsoft.com/office/drawing/2014/main" id="{46393432-E86F-4695-8496-A810AD57A2BB}"/>
               </a:ext>
             </a:extLst>
           </p:cNvPr>
@@ -3913,7 +3913,7 @@
           <p:cNvPr id="12" name="s3-takeaway">
             <a:extLst xmlns:a="http://schemas.openxmlformats.org/drawingml/2006/main">
               <a:ext uri="{FF2B5EF4-FFF2-40B4-BE49-F238E27FC236}">
-                <a16:creationId xmlns:a16="http://schemas.microsoft.com/office/drawing/2014/main" id="{B44189A1-AFEB-4016-990E-340128B67E3D}"/>
+                <a16:creationId xmlns:a16="http://schemas.microsoft.com/office/drawing/2014/main" id="{C8B1B495-B50E-4274-A6AD-CB5CC5AED033}"/>
               </a:ext>
             </a:extLst>
           </p:cNvPr>
@@ -3969,7 +3969,7 @@
     </p:spTree>
     <p:extLst>
       <p:ext uri="{BB962C8B-B14F-4D97-AF65-F5344CB8AC3E}">
-        <p14:creationId xmlns:p14="http://schemas.microsoft.com/office/powerpoint/2010/main" val="1541901784"/>
+        <p14:creationId xmlns:p14="http://schemas.microsoft.com/office/powerpoint/2010/main" val="701314792"/>
       </p:ext>
     </p:extLst>
   </p:cSld>
@@ -4000,7 +4000,7 @@
           <p:cNvPr id="1" name="s4-rule">
             <a:extLst xmlns:a="http://schemas.openxmlformats.org/drawingml/2006/main">
               <a:ext uri="{FF2B5EF4-FFF2-40B4-BE49-F238E27FC236}">
-                <a16:creationId xmlns:a16="http://schemas.microsoft.com/office/drawing/2014/main" id="{97D4F66C-A03F-481B-A2A0-84BEFF4EBFE8}"/>
+                <a16:creationId xmlns:a16="http://schemas.microsoft.com/office/drawing/2014/main" id="{BCE7B328-B9BD-44EF-834E-1AE29259B99A}"/>
               </a:ext>
             </a:extLst>
           </p:cNvPr>
@@ -4033,7 +4033,7 @@
           <p:cNvPr id="2" name="s4-eyebrow">
             <a:extLst xmlns:a="http://schemas.openxmlformats.org/drawingml/2006/main">
               <a:ext uri="{FF2B5EF4-FFF2-40B4-BE49-F238E27FC236}">
-                <a16:creationId xmlns:a16="http://schemas.microsoft.com/office/drawing/2014/main" id="{0B09DC46-88EC-48EF-BE8A-B6B0EBB17A60}"/>
+                <a16:creationId xmlns:a16="http://schemas.microsoft.com/office/drawing/2014/main" id="{38F78770-ED33-40CB-84B5-8D613CDF50F9}"/>
               </a:ext>
             </a:extLst>
           </p:cNvPr>
@@ -4091,7 +4091,7 @@
           <p:cNvPr id="3" name="s4-title">
             <a:extLst xmlns:a="http://schemas.openxmlformats.org/drawingml/2006/main">
               <a:ext uri="{FF2B5EF4-FFF2-40B4-BE49-F238E27FC236}">
-                <a16:creationId xmlns:a16="http://schemas.microsoft.com/office/drawing/2014/main" id="{27BDCB45-1781-4897-A49A-5AA4D01B8D81}"/>
+                <a16:creationId xmlns:a16="http://schemas.microsoft.com/office/drawing/2014/main" id="{813A2F99-55E3-47CD-A96E-958B3036BD86}"/>
               </a:ext>
             </a:extLst>
           </p:cNvPr>
@@ -4149,7 +4149,7 @@
           <p:cNvPr id="4" name="s4-footer">
             <a:extLst xmlns:a="http://schemas.openxmlformats.org/drawingml/2006/main">
               <a:ext uri="{FF2B5EF4-FFF2-40B4-BE49-F238E27FC236}">
-                <a16:creationId xmlns:a16="http://schemas.microsoft.com/office/drawing/2014/main" id="{DC36D36A-D7FC-4B49-8641-67E467C9A6E4}"/>
+                <a16:creationId xmlns:a16="http://schemas.microsoft.com/office/drawing/2014/main" id="{773A50B7-CE0B-4167-B6CA-FD78ED861C0D}"/>
               </a:ext>
             </a:extLst>
           </p:cNvPr>
@@ -4180,7 +4180,7 @@
           <p:cNvPr id="5" name="s4-identity">
             <a:extLst xmlns:a="http://schemas.openxmlformats.org/drawingml/2006/main">
               <a:ext uri="{FF2B5EF4-FFF2-40B4-BE49-F238E27FC236}">
-                <a16:creationId xmlns:a16="http://schemas.microsoft.com/office/drawing/2014/main" id="{3413284B-422E-4EBB-8CD6-F3060350C1D9}"/>
+                <a16:creationId xmlns:a16="http://schemas.microsoft.com/office/drawing/2014/main" id="{EAED8AF6-74E3-4C47-825A-405B1B32A05A}"/>
               </a:ext>
             </a:extLst>
           </p:cNvPr>
@@ -4238,7 +4238,7 @@
           <p:cNvPr id="6" name="core-no-0">
             <a:extLst xmlns:a="http://schemas.openxmlformats.org/drawingml/2006/main">
               <a:ext uri="{FF2B5EF4-FFF2-40B4-BE49-F238E27FC236}">
-                <a16:creationId xmlns:a16="http://schemas.microsoft.com/office/drawing/2014/main" id="{100F29AA-3716-4BBA-BC7E-E41FB930D145}"/>
+                <a16:creationId xmlns:a16="http://schemas.microsoft.com/office/drawing/2014/main" id="{253F9094-0721-4B93-B354-CD2103B61799}"/>
               </a:ext>
             </a:extLst>
           </p:cNvPr>
@@ -4270,7 +4270,7 @@
             <a:pPr algn="l">
               <a:defRPr sz="2250" b="1">
                 <a:solidFill>
-                  <a:srgbClr val="D6A33A"/>
+                  <a:srgbClr val="8A5A00"/>
                 </a:solidFill>
                 <a:latin typeface="PingFang SC"/>
                 <a:ea typeface="PingFang SC"/>
@@ -4280,7 +4280,7 @@
             <a:r>
               <a:rPr sz="2250" b="1">
                 <a:solidFill>
-                  <a:srgbClr val="D6A33A"/>
+                  <a:srgbClr val="8A5A00"/>
                 </a:solidFill>
                 <a:latin typeface="PingFang SC"/>
                 <a:ea typeface="PingFang SC"/>
@@ -4296,7 +4296,7 @@
           <p:cNvPr id="7" name="core-label-0">
             <a:extLst xmlns:a="http://schemas.openxmlformats.org/drawingml/2006/main">
               <a:ext uri="{FF2B5EF4-FFF2-40B4-BE49-F238E27FC236}">
-                <a16:creationId xmlns:a16="http://schemas.microsoft.com/office/drawing/2014/main" id="{7BB4A48F-84F3-4A8C-A696-D770077EF8DE}"/>
+                <a16:creationId xmlns:a16="http://schemas.microsoft.com/office/drawing/2014/main" id="{52A7CF29-31AF-4954-BD94-99D8E46A1544}"/>
               </a:ext>
             </a:extLst>
           </p:cNvPr>
@@ -4354,7 +4354,7 @@
           <p:cNvPr id="8" name="core-body-0">
             <a:extLst xmlns:a="http://schemas.openxmlformats.org/drawingml/2006/main">
               <a:ext uri="{FF2B5EF4-FFF2-40B4-BE49-F238E27FC236}">
-                <a16:creationId xmlns:a16="http://schemas.microsoft.com/office/drawing/2014/main" id="{DFCDC94E-7916-4B06-B512-C9C962CC1927}"/>
+                <a16:creationId xmlns:a16="http://schemas.microsoft.com/office/drawing/2014/main" id="{44E7F871-CBD0-49E3-9249-390B0737757A}"/>
               </a:ext>
             </a:extLst>
           </p:cNvPr>
@@ -4378,7 +4378,7 @@
           </a:solidFill>
           <a:ln xmlns:a="http://schemas.openxmlformats.org/drawingml/2006/main" w="19050">
             <a:solidFill>
-              <a:srgbClr val="D6A33A"/>
+              <a:srgbClr val="8A5A00"/>
             </a:solidFill>
             <a:prstDash val="solid"/>
           </a:ln>
@@ -4418,7 +4418,7 @@
           <p:cNvPr id="9" name="core-no-1">
             <a:extLst xmlns:a="http://schemas.openxmlformats.org/drawingml/2006/main">
               <a:ext uri="{FF2B5EF4-FFF2-40B4-BE49-F238E27FC236}">
-                <a16:creationId xmlns:a16="http://schemas.microsoft.com/office/drawing/2014/main" id="{D3467EE8-F641-44E2-AFF3-B4E9DCF1D288}"/>
+                <a16:creationId xmlns:a16="http://schemas.microsoft.com/office/drawing/2014/main" id="{EF4E837B-6AEA-4828-AFCF-BD62893EC5A1}"/>
               </a:ext>
             </a:extLst>
           </p:cNvPr>
@@ -4450,7 +4450,7 @@
             <a:pPr algn="l">
               <a:defRPr sz="2250" b="1">
                 <a:solidFill>
-                  <a:srgbClr val="D6A33A"/>
+                  <a:srgbClr val="8A5A00"/>
                 </a:solidFill>
                 <a:latin typeface="PingFang SC"/>
                 <a:ea typeface="PingFang SC"/>
@@ -4460,7 +4460,7 @@
             <a:r>
               <a:rPr sz="2250" b="1">
                 <a:solidFill>
-                  <a:srgbClr val="D6A33A"/>
+                  <a:srgbClr val="8A5A00"/>
                 </a:solidFill>
                 <a:latin typeface="PingFang SC"/>
                 <a:ea typeface="PingFang SC"/>
@@ -4476,7 +4476,7 @@
           <p:cNvPr id="10" name="core-body-1">
             <a:extLst xmlns:a="http://schemas.openxmlformats.org/drawingml/2006/main">
               <a:ext uri="{FF2B5EF4-FFF2-40B4-BE49-F238E27FC236}">
-                <a16:creationId xmlns:a16="http://schemas.microsoft.com/office/drawing/2014/main" id="{E732CC42-FC37-4D2B-B1AC-C32E56BE503D}"/>
+                <a16:creationId xmlns:a16="http://schemas.microsoft.com/office/drawing/2014/main" id="{F5C62A39-44FB-4802-A8CB-BCF5ED3851E4}"/>
               </a:ext>
             </a:extLst>
           </p:cNvPr>
@@ -4530,7 +4530,7 @@
                 <a:ea typeface="PingFang SC"/>
                 <a:cs typeface="PingFang SC"/>
               </a:rPr>
-              <a:t>只有权重可下载，通常更准确地称为 开放权重模型 。它仍然很有价值：团队可以在自己的基础设施上运行、量化、评测和微调；但它并不自动带来训练透明度，也不代表所有用途都无条件允许…</a:t>
+              <a:t>只有权重可下载，通常更准确地称为 开放权重模型；它仍然很有价值，团队可以在自己的基础设施上运行、量化、评测和微调；但它并不自动带来训练透明度；也不代表所有用途都无条件允许</a:t>
             </a:r>
           </a:p>
         </p:txBody>
@@ -4540,7 +4540,7 @@
           <p:cNvPr id="11" name="s4-takeaway-rule">
             <a:extLst xmlns:a="http://schemas.openxmlformats.org/drawingml/2006/main">
               <a:ext uri="{FF2B5EF4-FFF2-40B4-BE49-F238E27FC236}">
-                <a16:creationId xmlns:a16="http://schemas.microsoft.com/office/drawing/2014/main" id="{2C75B7B0-A443-4AEE-94AE-4B5F2E085CD2}"/>
+                <a16:creationId xmlns:a16="http://schemas.microsoft.com/office/drawing/2014/main" id="{305711F3-8AFA-4FB1-8F0A-E1D8B2EB6621}"/>
               </a:ext>
             </a:extLst>
           </p:cNvPr>
@@ -4573,7 +4573,7 @@
           <p:cNvPr id="12" name="s4-takeaway">
             <a:extLst xmlns:a="http://schemas.openxmlformats.org/drawingml/2006/main">
               <a:ext uri="{FF2B5EF4-FFF2-40B4-BE49-F238E27FC236}">
-                <a16:creationId xmlns:a16="http://schemas.microsoft.com/office/drawing/2014/main" id="{00655373-428A-455F-A3A7-05EE8BC0A988}"/>
+                <a16:creationId xmlns:a16="http://schemas.microsoft.com/office/drawing/2014/main" id="{E866FA39-9602-494B-A4BC-E600A6970C21}"/>
               </a:ext>
             </a:extLst>
           </p:cNvPr>
@@ -4629,7 +4629,7 @@
     </p:spTree>
     <p:extLst>
       <p:ext uri="{BB962C8B-B14F-4D97-AF65-F5344CB8AC3E}">
-        <p14:creationId xmlns:p14="http://schemas.microsoft.com/office/powerpoint/2010/main" val="1580849097"/>
+        <p14:creationId xmlns:p14="http://schemas.microsoft.com/office/powerpoint/2010/main" val="915914654"/>
       </p:ext>
     </p:extLst>
   </p:cSld>
@@ -4660,7 +4660,7 @@
           <p:cNvPr id="1" name="s5-rule">
             <a:extLst xmlns:a="http://schemas.openxmlformats.org/drawingml/2006/main">
               <a:ext uri="{FF2B5EF4-FFF2-40B4-BE49-F238E27FC236}">
-                <a16:creationId xmlns:a16="http://schemas.microsoft.com/office/drawing/2014/main" id="{4AFD9BFB-359B-44A2-905F-4DFC5FE19EB6}"/>
+                <a16:creationId xmlns:a16="http://schemas.microsoft.com/office/drawing/2014/main" id="{50635D53-B660-45CC-BB6A-1B42F3DF1879}"/>
               </a:ext>
             </a:extLst>
           </p:cNvPr>
@@ -4693,7 +4693,7 @@
           <p:cNvPr id="2" name="s5-eyebrow">
             <a:extLst xmlns:a="http://schemas.openxmlformats.org/drawingml/2006/main">
               <a:ext uri="{FF2B5EF4-FFF2-40B4-BE49-F238E27FC236}">
-                <a16:creationId xmlns:a16="http://schemas.microsoft.com/office/drawing/2014/main" id="{1B9CFCE7-AB17-4109-9DFA-7C4CA7BB988D}"/>
+                <a16:creationId xmlns:a16="http://schemas.microsoft.com/office/drawing/2014/main" id="{BFC2CBF8-59C6-498A-845C-F9BED59ECC4A}"/>
               </a:ext>
             </a:extLst>
           </p:cNvPr>
@@ -4751,7 +4751,7 @@
           <p:cNvPr id="3" name="s5-title">
             <a:extLst xmlns:a="http://schemas.openxmlformats.org/drawingml/2006/main">
               <a:ext uri="{FF2B5EF4-FFF2-40B4-BE49-F238E27FC236}">
-                <a16:creationId xmlns:a16="http://schemas.microsoft.com/office/drawing/2014/main" id="{F2AAFDB6-3994-423A-9141-17F4E05BA0AE}"/>
+                <a16:creationId xmlns:a16="http://schemas.microsoft.com/office/drawing/2014/main" id="{B278C1E7-C4E2-4EB1-ADC5-D109113BB449}"/>
               </a:ext>
             </a:extLst>
           </p:cNvPr>
@@ -4776,7 +4776,7 @@
         </p:spPr>
         <p:txBody>
           <a:bodyPr xmlns:a="http://schemas.openxmlformats.org/drawingml/2006/main" lIns="0" tIns="0" rIns="0" bIns="0" anchor="ctr">
-            <a:normAutofit fontScale="87790"/>
+            <a:normAutofit fontScale="100000"/>
           </a:bodyPr>
           <a:lstStyle xmlns:a="http://schemas.openxmlformats.org/drawingml/2006/main"/>
           <a:p xmlns:a="http://schemas.openxmlformats.org/drawingml/2006/main">
@@ -4799,7 +4799,7 @@
                 <a:ea typeface="PingFang SC"/>
                 <a:cs typeface="PingFang SC"/>
               </a:rPr>
-              <a:t>调用外部 API 上手快、无需管理 GPU，适合快速试验和波动负载</a:t>
+              <a:t>部署方式交换的是速度、控制与运维成本</a:t>
             </a:r>
           </a:p>
         </p:txBody>
@@ -4809,7 +4809,7 @@
           <p:cNvPr id="4" name="s5-footer">
             <a:extLst xmlns:a="http://schemas.openxmlformats.org/drawingml/2006/main">
               <a:ext uri="{FF2B5EF4-FFF2-40B4-BE49-F238E27FC236}">
-                <a16:creationId xmlns:a16="http://schemas.microsoft.com/office/drawing/2014/main" id="{82825B01-343E-471F-B493-EB9C2C5158C3}"/>
+                <a16:creationId xmlns:a16="http://schemas.microsoft.com/office/drawing/2014/main" id="{7BFD3EDF-5793-4788-A9F2-FADCBCC4CBF2}"/>
               </a:ext>
             </a:extLst>
           </p:cNvPr>
@@ -4840,7 +4840,7 @@
           <p:cNvPr id="5" name="s5-identity">
             <a:extLst xmlns:a="http://schemas.openxmlformats.org/drawingml/2006/main">
               <a:ext uri="{FF2B5EF4-FFF2-40B4-BE49-F238E27FC236}">
-                <a16:creationId xmlns:a16="http://schemas.microsoft.com/office/drawing/2014/main" id="{455E3E8F-D776-4DFC-825D-4FB3202BBD89}"/>
+                <a16:creationId xmlns:a16="http://schemas.microsoft.com/office/drawing/2014/main" id="{A3AF971F-24C7-4419-9117-E246B61C6044}"/>
               </a:ext>
             </a:extLst>
           </p:cNvPr>
@@ -4898,7 +4898,7 @@
           <p:cNvPr id="6" name="core-no-0">
             <a:extLst xmlns:a="http://schemas.openxmlformats.org/drawingml/2006/main">
               <a:ext uri="{FF2B5EF4-FFF2-40B4-BE49-F238E27FC236}">
-                <a16:creationId xmlns:a16="http://schemas.microsoft.com/office/drawing/2014/main" id="{54D1F0CE-16CD-464D-92AC-E4692C58377A}"/>
+                <a16:creationId xmlns:a16="http://schemas.microsoft.com/office/drawing/2014/main" id="{F053EA85-C6D3-4B2D-B81E-9EE9F662BE89}"/>
               </a:ext>
             </a:extLst>
           </p:cNvPr>
@@ -4930,7 +4930,7 @@
             <a:pPr algn="l">
               <a:defRPr sz="2250" b="1">
                 <a:solidFill>
-                  <a:srgbClr val="D6A33A"/>
+                  <a:srgbClr val="8A5A00"/>
                 </a:solidFill>
                 <a:latin typeface="PingFang SC"/>
                 <a:ea typeface="PingFang SC"/>
@@ -4940,7 +4940,7 @@
             <a:r>
               <a:rPr sz="2250" b="1">
                 <a:solidFill>
-                  <a:srgbClr val="D6A33A"/>
+                  <a:srgbClr val="8A5A00"/>
                 </a:solidFill>
                 <a:latin typeface="PingFang SC"/>
                 <a:ea typeface="PingFang SC"/>
@@ -4956,7 +4956,7 @@
           <p:cNvPr id="7" name="core-label-0">
             <a:extLst xmlns:a="http://schemas.openxmlformats.org/drawingml/2006/main">
               <a:ext uri="{FF2B5EF4-FFF2-40B4-BE49-F238E27FC236}">
-                <a16:creationId xmlns:a16="http://schemas.microsoft.com/office/drawing/2014/main" id="{3682EF00-C6D9-45F8-A46E-878AB7B12EE2}"/>
+                <a16:creationId xmlns:a16="http://schemas.microsoft.com/office/drawing/2014/main" id="{DDE6CEB3-4AF8-43D7-A563-47C3A1AF1DEA}"/>
               </a:ext>
             </a:extLst>
           </p:cNvPr>
@@ -5014,7 +5014,7 @@
           <p:cNvPr id="8" name="core-body-0">
             <a:extLst xmlns:a="http://schemas.openxmlformats.org/drawingml/2006/main">
               <a:ext uri="{FF2B5EF4-FFF2-40B4-BE49-F238E27FC236}">
-                <a16:creationId xmlns:a16="http://schemas.microsoft.com/office/drawing/2014/main" id="{7FD04CB8-2BCF-4A07-8142-4B6896413CB8}"/>
+                <a16:creationId xmlns:a16="http://schemas.microsoft.com/office/drawing/2014/main" id="{1B740346-3AE8-4C16-9FDF-71C0799ED10B}"/>
               </a:ext>
             </a:extLst>
           </p:cNvPr>
@@ -5038,14 +5038,14 @@
           </a:solidFill>
           <a:ln xmlns:a="http://schemas.openxmlformats.org/drawingml/2006/main" w="19050">
             <a:solidFill>
-              <a:srgbClr val="D6A33A"/>
+              <a:srgbClr val="8A5A00"/>
             </a:solidFill>
             <a:prstDash val="solid"/>
           </a:ln>
         </p:spPr>
         <p:txBody>
           <a:bodyPr xmlns:a="http://schemas.openxmlformats.org/drawingml/2006/main" lIns="152400" tIns="133350" rIns="152400" bIns="133350" anchor="ctr">
-            <a:normAutofit fontScale="98233"/>
+            <a:normAutofit fontScale="100000"/>
           </a:bodyPr>
           <a:lstStyle xmlns:a="http://schemas.openxmlformats.org/drawingml/2006/main"/>
           <a:p xmlns:a="http://schemas.openxmlformats.org/drawingml/2006/main">
@@ -5068,7 +5068,7 @@
                 <a:ea typeface="PingFang SC"/>
                 <a:cs typeface="PingFang SC"/>
               </a:rPr>
-              <a:t>调用外部 API 上手快、无需管理 GPU，适合快速试验和波动负载；托管专属实例能增加网络与容量控制；本地部署可以让数据、日志和模型运行环境留在组织边界内，却要自己承担硬件、推理框架、容量规划…</a:t>
+              <a:t>调用外部 API 上手快、无需管理 GPU；适合快速试验和波动负载；托管专属实例能增加网络与容量控制；本地部署可以让数据、日志和模型运行环境留在组织边界内</a:t>
             </a:r>
           </a:p>
         </p:txBody>
@@ -5078,7 +5078,7 @@
           <p:cNvPr id="9" name="core-no-1">
             <a:extLst xmlns:a="http://schemas.openxmlformats.org/drawingml/2006/main">
               <a:ext uri="{FF2B5EF4-FFF2-40B4-BE49-F238E27FC236}">
-                <a16:creationId xmlns:a16="http://schemas.microsoft.com/office/drawing/2014/main" id="{2FC50164-722B-4A2B-9FCB-AEEE73E40777}"/>
+                <a16:creationId xmlns:a16="http://schemas.microsoft.com/office/drawing/2014/main" id="{358DEEE5-FB30-4D22-B086-3D1FC2951D84}"/>
               </a:ext>
             </a:extLst>
           </p:cNvPr>
@@ -5110,7 +5110,7 @@
             <a:pPr algn="l">
               <a:defRPr sz="2250" b="1">
                 <a:solidFill>
-                  <a:srgbClr val="D6A33A"/>
+                  <a:srgbClr val="8A5A00"/>
                 </a:solidFill>
                 <a:latin typeface="PingFang SC"/>
                 <a:ea typeface="PingFang SC"/>
@@ -5120,7 +5120,7 @@
             <a:r>
               <a:rPr sz="2250" b="1">
                 <a:solidFill>
-                  <a:srgbClr val="D6A33A"/>
+                  <a:srgbClr val="8A5A00"/>
                 </a:solidFill>
                 <a:latin typeface="PingFang SC"/>
                 <a:ea typeface="PingFang SC"/>
@@ -5136,7 +5136,7 @@
           <p:cNvPr id="10" name="core-body-1">
             <a:extLst xmlns:a="http://schemas.openxmlformats.org/drawingml/2006/main">
               <a:ext uri="{FF2B5EF4-FFF2-40B4-BE49-F238E27FC236}">
-                <a16:creationId xmlns:a16="http://schemas.microsoft.com/office/drawing/2014/main" id="{6A12528D-E01D-4AFA-98B6-AF38F4C98791}"/>
+                <a16:creationId xmlns:a16="http://schemas.microsoft.com/office/drawing/2014/main" id="{8AFFC6EB-440C-4B77-B666-860299DD5984}"/>
               </a:ext>
             </a:extLst>
           </p:cNvPr>
@@ -5190,7 +5190,7 @@
                 <a:ea typeface="PingFang SC"/>
                 <a:cs typeface="PingFang SC"/>
               </a:rPr>
-              <a:t>判断方案时至少测六项：目标任务质量、端到端时延、峰值吞吐、单位任务总成本、敏感数据暴露面和持续运维能力。参数量不是硬件需求的唯一决定因素；权重量化、上下文长度…</a:t>
+              <a:t>判断方案时至少测六项；目标任务质量、端到端时延、峰值吞吐、单位任务总成本、敏感数据暴露面和持续运维能力；参数量不是硬件需求的唯一决定因素</a:t>
             </a:r>
           </a:p>
         </p:txBody>
@@ -5200,7 +5200,7 @@
           <p:cNvPr id="11" name="s5-takeaway-rule">
             <a:extLst xmlns:a="http://schemas.openxmlformats.org/drawingml/2006/main">
               <a:ext uri="{FF2B5EF4-FFF2-40B4-BE49-F238E27FC236}">
-                <a16:creationId xmlns:a16="http://schemas.microsoft.com/office/drawing/2014/main" id="{90F485EE-2878-4167-972F-7296074631E7}"/>
+                <a16:creationId xmlns:a16="http://schemas.microsoft.com/office/drawing/2014/main" id="{8E1AD9F2-BC69-49E5-B6E2-C8877A18EA8F}"/>
               </a:ext>
             </a:extLst>
           </p:cNvPr>
@@ -5233,7 +5233,7 @@
           <p:cNvPr id="12" name="s5-takeaway">
             <a:extLst xmlns:a="http://schemas.openxmlformats.org/drawingml/2006/main">
               <a:ext uri="{FF2B5EF4-FFF2-40B4-BE49-F238E27FC236}">
-                <a16:creationId xmlns:a16="http://schemas.microsoft.com/office/drawing/2014/main" id="{4104B413-711C-4E41-B3DD-728329B5CB84}"/>
+                <a16:creationId xmlns:a16="http://schemas.microsoft.com/office/drawing/2014/main" id="{59D8DD3F-9F9E-4555-ADF0-850C00288970}"/>
               </a:ext>
             </a:extLst>
           </p:cNvPr>
@@ -5281,7 +5281,7 @@
                 <a:ea typeface="PingFang SC"/>
                 <a:cs typeface="PingFang SC"/>
               </a:rPr>
-              <a:t>调用外部 API 上手快、无需管理 GPU，适合快速试验和波动负载</a:t>
+              <a:t>部署方式交换的是速度、控制与运维成本</a:t>
             </a:r>
           </a:p>
         </p:txBody>
@@ -5289,7 +5289,7 @@
     </p:spTree>
     <p:extLst>
       <p:ext uri="{BB962C8B-B14F-4D97-AF65-F5344CB8AC3E}">
-        <p14:creationId xmlns:p14="http://schemas.microsoft.com/office/powerpoint/2010/main" val="1188050036"/>
+        <p14:creationId xmlns:p14="http://schemas.microsoft.com/office/powerpoint/2010/main" val="1346267046"/>
       </p:ext>
     </p:extLst>
   </p:cSld>
@@ -5320,7 +5320,7 @@
           <p:cNvPr id="1" name="s6-rule">
             <a:extLst xmlns:a="http://schemas.openxmlformats.org/drawingml/2006/main">
               <a:ext uri="{FF2B5EF4-FFF2-40B4-BE49-F238E27FC236}">
-                <a16:creationId xmlns:a16="http://schemas.microsoft.com/office/drawing/2014/main" id="{B17ECBB5-BDEB-4FB7-86BE-94ACC93DE706}"/>
+                <a16:creationId xmlns:a16="http://schemas.microsoft.com/office/drawing/2014/main" id="{34C1C0F0-396D-42F9-B1B0-81DE3B8FCDBA}"/>
               </a:ext>
             </a:extLst>
           </p:cNvPr>
@@ -5353,7 +5353,7 @@
           <p:cNvPr id="2" name="s6-eyebrow">
             <a:extLst xmlns:a="http://schemas.openxmlformats.org/drawingml/2006/main">
               <a:ext uri="{FF2B5EF4-FFF2-40B4-BE49-F238E27FC236}">
-                <a16:creationId xmlns:a16="http://schemas.microsoft.com/office/drawing/2014/main" id="{261F4487-13D9-4976-B461-3BF2FB088679}"/>
+                <a16:creationId xmlns:a16="http://schemas.microsoft.com/office/drawing/2014/main" id="{6818DF42-E816-4A42-A2A6-9AE5090AB58B}"/>
               </a:ext>
             </a:extLst>
           </p:cNvPr>
@@ -5411,7 +5411,7 @@
           <p:cNvPr id="3" name="s6-title">
             <a:extLst xmlns:a="http://schemas.openxmlformats.org/drawingml/2006/main">
               <a:ext uri="{FF2B5EF4-FFF2-40B4-BE49-F238E27FC236}">
-                <a16:creationId xmlns:a16="http://schemas.microsoft.com/office/drawing/2014/main" id="{B2D49F5C-DE1E-4DBA-864B-5924C8581A2B}"/>
+                <a16:creationId xmlns:a16="http://schemas.microsoft.com/office/drawing/2014/main" id="{BFC4D2A6-0447-481F-AFBC-0B715D073704}"/>
               </a:ext>
             </a:extLst>
           </p:cNvPr>
@@ -5436,7 +5436,7 @@
         </p:spPr>
         <p:txBody>
           <a:bodyPr xmlns:a="http://schemas.openxmlformats.org/drawingml/2006/main" lIns="0" tIns="0" rIns="0" bIns="0" anchor="ctr">
-            <a:normAutofit fontScale="86983"/>
+            <a:normAutofit fontScale="100000"/>
           </a:bodyPr>
           <a:lstStyle xmlns:a="http://schemas.openxmlformats.org/drawingml/2006/main"/>
           <a:p xmlns:a="http://schemas.openxmlformats.org/drawingml/2006/main">
@@ -5459,7 +5459,7 @@
                 <a:ea typeface="PingFang SC"/>
                 <a:cs typeface="PingFang SC"/>
               </a:rPr>
-              <a:t>公开榜单适合形成候选列表，最终选择应使用自己的代表性任务集</a:t>
+              <a:t>榜单只能筛选候选，真实任务才能决定选型</a:t>
             </a:r>
           </a:p>
         </p:txBody>
@@ -5469,7 +5469,7 @@
           <p:cNvPr id="4" name="s6-footer">
             <a:extLst xmlns:a="http://schemas.openxmlformats.org/drawingml/2006/main">
               <a:ext uri="{FF2B5EF4-FFF2-40B4-BE49-F238E27FC236}">
-                <a16:creationId xmlns:a16="http://schemas.microsoft.com/office/drawing/2014/main" id="{985EC0F9-160C-46AA-80CD-6B73E86867FE}"/>
+                <a16:creationId xmlns:a16="http://schemas.microsoft.com/office/drawing/2014/main" id="{471C1B6A-C643-4B51-9617-531386B6712B}"/>
               </a:ext>
             </a:extLst>
           </p:cNvPr>
@@ -5500,7 +5500,7 @@
           <p:cNvPr id="5" name="s6-identity">
             <a:extLst xmlns:a="http://schemas.openxmlformats.org/drawingml/2006/main">
               <a:ext uri="{FF2B5EF4-FFF2-40B4-BE49-F238E27FC236}">
-                <a16:creationId xmlns:a16="http://schemas.microsoft.com/office/drawing/2014/main" id="{A72A2B42-C7F5-456B-A24A-80BB4FDECAC2}"/>
+                <a16:creationId xmlns:a16="http://schemas.microsoft.com/office/drawing/2014/main" id="{0A426B7D-B509-47E7-BD3E-75D70663EA5F}"/>
               </a:ext>
             </a:extLst>
           </p:cNvPr>
@@ -5558,7 +5558,7 @@
           <p:cNvPr id="6" name="core-no-0">
             <a:extLst xmlns:a="http://schemas.openxmlformats.org/drawingml/2006/main">
               <a:ext uri="{FF2B5EF4-FFF2-40B4-BE49-F238E27FC236}">
-                <a16:creationId xmlns:a16="http://schemas.microsoft.com/office/drawing/2014/main" id="{BEA608B4-E810-4C84-8F0B-F73C8904F82B}"/>
+                <a16:creationId xmlns:a16="http://schemas.microsoft.com/office/drawing/2014/main" id="{A6CA5C63-D82D-43EF-A0B1-39A8850E7129}"/>
               </a:ext>
             </a:extLst>
           </p:cNvPr>
@@ -5590,7 +5590,7 @@
             <a:pPr algn="l">
               <a:defRPr sz="2250" b="1">
                 <a:solidFill>
-                  <a:srgbClr val="D6A33A"/>
+                  <a:srgbClr val="8A5A00"/>
                 </a:solidFill>
                 <a:latin typeface="PingFang SC"/>
                 <a:ea typeface="PingFang SC"/>
@@ -5600,7 +5600,7 @@
             <a:r>
               <a:rPr sz="2250" b="1">
                 <a:solidFill>
-                  <a:srgbClr val="D6A33A"/>
+                  <a:srgbClr val="8A5A00"/>
                 </a:solidFill>
                 <a:latin typeface="PingFang SC"/>
                 <a:ea typeface="PingFang SC"/>
@@ -5616,7 +5616,7 @@
           <p:cNvPr id="7" name="core-label-0">
             <a:extLst xmlns:a="http://schemas.openxmlformats.org/drawingml/2006/main">
               <a:ext uri="{FF2B5EF4-FFF2-40B4-BE49-F238E27FC236}">
-                <a16:creationId xmlns:a16="http://schemas.microsoft.com/office/drawing/2014/main" id="{40C81E51-F57D-4D6C-9B27-FA17CB8CB8AE}"/>
+                <a16:creationId xmlns:a16="http://schemas.microsoft.com/office/drawing/2014/main" id="{EC9B1671-6D73-4045-8F7E-A6538576C07E}"/>
               </a:ext>
             </a:extLst>
           </p:cNvPr>
@@ -5674,7 +5674,7 @@
           <p:cNvPr id="8" name="core-body-0">
             <a:extLst xmlns:a="http://schemas.openxmlformats.org/drawingml/2006/main">
               <a:ext uri="{FF2B5EF4-FFF2-40B4-BE49-F238E27FC236}">
-                <a16:creationId xmlns:a16="http://schemas.microsoft.com/office/drawing/2014/main" id="{FB33567D-6435-4C20-B06B-2FF4D09C8F84}"/>
+                <a16:creationId xmlns:a16="http://schemas.microsoft.com/office/drawing/2014/main" id="{438953F7-CD6C-4185-BDE3-A4CF30DB38C4}"/>
               </a:ext>
             </a:extLst>
           </p:cNvPr>
@@ -5698,7 +5698,7 @@
           </a:solidFill>
           <a:ln xmlns:a="http://schemas.openxmlformats.org/drawingml/2006/main" w="19050">
             <a:solidFill>
-              <a:srgbClr val="D6A33A"/>
+              <a:srgbClr val="8A5A00"/>
             </a:solidFill>
             <a:prstDash val="solid"/>
           </a:ln>
@@ -5728,7 +5728,7 @@
                 <a:ea typeface="PingFang SC"/>
                 <a:cs typeface="PingFang SC"/>
               </a:rPr>
-              <a:t>公开榜单适合形成候选列表，最终选择应使用自己的代表性任务集。知识问答要检查引用是否支持结论；代码任务要运行测试；结构化抽取要核对字段；推理任务要验证最终答案和关键约束；高风险任务还要测拒答…</a:t>
+              <a:t>公开榜单适合形成候选列表；最终选择应使用自己的代表性任务集；知识问答要检查引用是否支持结论；代码任务要运行测试；结构化抽取要核对字段；推理任务要验证最终答案和关键约束</a:t>
             </a:r>
           </a:p>
         </p:txBody>
@@ -5738,7 +5738,7 @@
           <p:cNvPr id="9" name="core-no-1">
             <a:extLst xmlns:a="http://schemas.openxmlformats.org/drawingml/2006/main">
               <a:ext uri="{FF2B5EF4-FFF2-40B4-BE49-F238E27FC236}">
-                <a16:creationId xmlns:a16="http://schemas.microsoft.com/office/drawing/2014/main" id="{17E5B276-DFFC-41B1-AE32-F3AD116299C1}"/>
+                <a16:creationId xmlns:a16="http://schemas.microsoft.com/office/drawing/2014/main" id="{209743B6-F4F8-4EA8-B489-1DCCE2CA2AA8}"/>
               </a:ext>
             </a:extLst>
           </p:cNvPr>
@@ -5770,7 +5770,7 @@
             <a:pPr algn="l">
               <a:defRPr sz="2250" b="1">
                 <a:solidFill>
-                  <a:srgbClr val="D6A33A"/>
+                  <a:srgbClr val="8A5A00"/>
                 </a:solidFill>
                 <a:latin typeface="PingFang SC"/>
                 <a:ea typeface="PingFang SC"/>
@@ -5780,7 +5780,7 @@
             <a:r>
               <a:rPr sz="2250" b="1">
                 <a:solidFill>
-                  <a:srgbClr val="D6A33A"/>
+                  <a:srgbClr val="8A5A00"/>
                 </a:solidFill>
                 <a:latin typeface="PingFang SC"/>
                 <a:ea typeface="PingFang SC"/>
@@ -5796,7 +5796,7 @@
           <p:cNvPr id="10" name="core-body-1">
             <a:extLst xmlns:a="http://schemas.openxmlformats.org/drawingml/2006/main">
               <a:ext uri="{FF2B5EF4-FFF2-40B4-BE49-F238E27FC236}">
-                <a16:creationId xmlns:a16="http://schemas.microsoft.com/office/drawing/2014/main" id="{D0AB72C9-9FEF-4EA9-AC1D-1D476722D6B4}"/>
+                <a16:creationId xmlns:a16="http://schemas.microsoft.com/office/drawing/2014/main" id="{324A3F23-AF19-472C-9DC5-7924FCA8D820}"/>
               </a:ext>
             </a:extLst>
           </p:cNvPr>
@@ -5860,7 +5860,7 @@
           <p:cNvPr id="11" name="s6-takeaway-rule">
             <a:extLst xmlns:a="http://schemas.openxmlformats.org/drawingml/2006/main">
               <a:ext uri="{FF2B5EF4-FFF2-40B4-BE49-F238E27FC236}">
-                <a16:creationId xmlns:a16="http://schemas.microsoft.com/office/drawing/2014/main" id="{8059DC25-98F4-4A50-8A6B-629D1908A90F}"/>
+                <a16:creationId xmlns:a16="http://schemas.microsoft.com/office/drawing/2014/main" id="{42D440A2-440F-4ED9-A64E-993E825691C1}"/>
               </a:ext>
             </a:extLst>
           </p:cNvPr>
@@ -5893,7 +5893,7 @@
           <p:cNvPr id="12" name="s6-takeaway">
             <a:extLst xmlns:a="http://schemas.openxmlformats.org/drawingml/2006/main">
               <a:ext uri="{FF2B5EF4-FFF2-40B4-BE49-F238E27FC236}">
-                <a16:creationId xmlns:a16="http://schemas.microsoft.com/office/drawing/2014/main" id="{410EB6B7-072C-42A8-BB1A-CD32A70EC530}"/>
+                <a16:creationId xmlns:a16="http://schemas.microsoft.com/office/drawing/2014/main" id="{0C7144C8-E684-44C3-9C0D-15F0602A46DB}"/>
               </a:ext>
             </a:extLst>
           </p:cNvPr>
@@ -5941,7 +5941,7 @@
                 <a:ea typeface="PingFang SC"/>
                 <a:cs typeface="PingFang SC"/>
               </a:rPr>
-              <a:t>公开榜单适合形成候选列表，最终选择应使用自己的代表性任务集</a:t>
+              <a:t>榜单只能筛选候选，真实任务才能决定选型</a:t>
             </a:r>
           </a:p>
         </p:txBody>
@@ -5949,7 +5949,7 @@
     </p:spTree>
     <p:extLst>
       <p:ext uri="{BB962C8B-B14F-4D97-AF65-F5344CB8AC3E}">
-        <p14:creationId xmlns:p14="http://schemas.microsoft.com/office/powerpoint/2010/main" val="841907779"/>
+        <p14:creationId xmlns:p14="http://schemas.microsoft.com/office/powerpoint/2010/main" val="183621213"/>
       </p:ext>
     </p:extLst>
   </p:cSld>
@@ -5980,7 +5980,7 @@
           <p:cNvPr id="1" name="s7-rule">
             <a:extLst xmlns:a="http://schemas.openxmlformats.org/drawingml/2006/main">
               <a:ext uri="{FF2B5EF4-FFF2-40B4-BE49-F238E27FC236}">
-                <a16:creationId xmlns:a16="http://schemas.microsoft.com/office/drawing/2014/main" id="{ACFFF692-D30F-49F3-9AB5-BC16F54B1139}"/>
+                <a16:creationId xmlns:a16="http://schemas.microsoft.com/office/drawing/2014/main" id="{07FFFB71-C71C-4A2C-B427-980CDA68749D}"/>
               </a:ext>
             </a:extLst>
           </p:cNvPr>
@@ -6013,7 +6013,7 @@
           <p:cNvPr id="2" name="s7-eyebrow">
             <a:extLst xmlns:a="http://schemas.openxmlformats.org/drawingml/2006/main">
               <a:ext uri="{FF2B5EF4-FFF2-40B4-BE49-F238E27FC236}">
-                <a16:creationId xmlns:a16="http://schemas.microsoft.com/office/drawing/2014/main" id="{61784BED-A3B3-4954-A65C-1C880C3B3356}"/>
+                <a16:creationId xmlns:a16="http://schemas.microsoft.com/office/drawing/2014/main" id="{04C4AEE2-C47C-42D5-A349-098656948879}"/>
               </a:ext>
             </a:extLst>
           </p:cNvPr>
@@ -6071,7 +6071,7 @@
           <p:cNvPr id="3" name="s7-title">
             <a:extLst xmlns:a="http://schemas.openxmlformats.org/drawingml/2006/main">
               <a:ext uri="{FF2B5EF4-FFF2-40B4-BE49-F238E27FC236}">
-                <a16:creationId xmlns:a16="http://schemas.microsoft.com/office/drawing/2014/main" id="{954101A3-6EE6-4340-8235-FA41338BDDC7}"/>
+                <a16:creationId xmlns:a16="http://schemas.microsoft.com/office/drawing/2014/main" id="{36244F98-0C2B-4C58-8410-408E97668824}"/>
               </a:ext>
             </a:extLst>
           </p:cNvPr>
@@ -6129,7 +6129,7 @@
           <p:cNvPr id="4" name="s7-footer">
             <a:extLst xmlns:a="http://schemas.openxmlformats.org/drawingml/2006/main">
               <a:ext uri="{FF2B5EF4-FFF2-40B4-BE49-F238E27FC236}">
-                <a16:creationId xmlns:a16="http://schemas.microsoft.com/office/drawing/2014/main" id="{485007E4-E2B3-4BA9-A9B1-0DCFE30F0EEB}"/>
+                <a16:creationId xmlns:a16="http://schemas.microsoft.com/office/drawing/2014/main" id="{24723CF0-EB65-4336-A4F7-AEF0FB2E1DD0}"/>
               </a:ext>
             </a:extLst>
           </p:cNvPr>
@@ -6160,7 +6160,7 @@
           <p:cNvPr id="5" name="s7-identity">
             <a:extLst xmlns:a="http://schemas.openxmlformats.org/drawingml/2006/main">
               <a:ext uri="{FF2B5EF4-FFF2-40B4-BE49-F238E27FC236}">
-                <a16:creationId xmlns:a16="http://schemas.microsoft.com/office/drawing/2014/main" id="{8387186B-D944-4534-8BCC-15585678B721}"/>
+                <a16:creationId xmlns:a16="http://schemas.microsoft.com/office/drawing/2014/main" id="{6914A4F1-A8DB-4356-8F24-3A0C7CD73151}"/>
               </a:ext>
             </a:extLst>
           </p:cNvPr>
@@ -6218,7 +6218,7 @@
           <p:cNvPr id="6" name="case-title">
             <a:extLst xmlns:a="http://schemas.openxmlformats.org/drawingml/2006/main">
               <a:ext uri="{FF2B5EF4-FFF2-40B4-BE49-F238E27FC236}">
-                <a16:creationId xmlns:a16="http://schemas.microsoft.com/office/drawing/2014/main" id="{57A64F4E-5FD5-4D5A-9159-AF1CFBE654B2}"/>
+                <a16:creationId xmlns:a16="http://schemas.microsoft.com/office/drawing/2014/main" id="{23AE1741-8459-4F35-A743-083E6CD3E095}"/>
               </a:ext>
             </a:extLst>
           </p:cNvPr>
@@ -6282,23 +6282,23 @@
           <p:cNvPr id="7" name="case-row-0">
             <a:extLst xmlns:a="http://schemas.openxmlformats.org/drawingml/2006/main">
               <a:ext uri="{FF2B5EF4-FFF2-40B4-BE49-F238E27FC236}">
-                <a16:creationId xmlns:a16="http://schemas.microsoft.com/office/drawing/2014/main" id="{6CE5270C-909F-4F73-B24C-43C11445259F}"/>
-              </a:ext>
-            </a:extLst>
-          </p:cNvPr>
-          <p:cNvSpPr>
-            <a:spLocks xmlns:a="http://schemas.openxmlformats.org/drawingml/2006/main" noGrp="1"/>
-          </p:cNvSpPr>
-          <p:nvPr/>
-        </p:nvSpPr>
-        <p:spPr>
-          <a:xfrm xmlns:a="http://schemas.openxmlformats.org/drawingml/2006/main">
-            <a:off x="4286250" y="2228850"/>
-            <a:ext cx="6534150" cy="1238250"/>
+                <a16:creationId xmlns:a16="http://schemas.microsoft.com/office/drawing/2014/main" id="{7A35132D-7734-42E4-ABAA-2035AE4B3C27}"/>
+              </a:ext>
+            </a:extLst>
+          </p:cNvPr>
+          <p:cNvSpPr>
+            <a:spLocks xmlns:a="http://schemas.openxmlformats.org/drawingml/2006/main" noGrp="1"/>
+          </p:cNvSpPr>
+          <p:nvPr/>
+        </p:nvSpPr>
+        <p:spPr>
+          <a:xfrm xmlns:a="http://schemas.openxmlformats.org/drawingml/2006/main">
+            <a:off x="4286250" y="2038350"/>
+            <a:ext cx="6534150" cy="514350"/>
           </a:xfrm>
           <a:prstGeom xmlns:a="http://schemas.openxmlformats.org/drawingml/2006/main" prst="roundRect">
             <a:avLst>
-              <a:gd name="adj" fmla="val 10000"/>
+              <a:gd name="adj" fmla="val 24074"/>
             </a:avLst>
           </a:prstGeom>
           <a:solidFill xmlns:a="http://schemas.openxmlformats.org/drawingml/2006/main">
@@ -6313,7 +6313,7 @@
         </p:spPr>
         <p:txBody>
           <a:bodyPr xmlns:a="http://schemas.openxmlformats.org/drawingml/2006/main" lIns="152400" tIns="133350" rIns="152400" bIns="133350" anchor="ctr">
-            <a:normAutofit fontScale="93636"/>
+            <a:normAutofit fontScale="72956"/>
           </a:bodyPr>
           <a:lstStyle xmlns:a="http://schemas.openxmlformats.org/drawingml/2006/main"/>
           <a:p xmlns:a="http://schemas.openxmlformats.org/drawingml/2006/main">
@@ -6336,7 +6336,7 @@
                 <a:ea typeface="PingFang SC"/>
                 <a:cs typeface="PingFang SC"/>
               </a:rPr>
-              <a:t>场景｜一家企业希望员工查询内部制度，初看适合本地部署。团队先把 100 个真实问题整理成评测集，要求回答同时给出制度名称、章节和生效日期。方案采用权限过滤后的文档检索…</a:t>
+              <a:t>场景｜一家企业希望员工查询内部制度，初看适合本地部署</a:t>
             </a:r>
           </a:p>
         </p:txBody>
@@ -6346,23 +6346,215 @@
           <p:cNvPr id="8" name="case-row-1">
             <a:extLst xmlns:a="http://schemas.openxmlformats.org/drawingml/2006/main">
               <a:ext uri="{FF2B5EF4-FFF2-40B4-BE49-F238E27FC236}">
-                <a16:creationId xmlns:a16="http://schemas.microsoft.com/office/drawing/2014/main" id="{F4A03557-8245-4C6E-BCFB-F999A22A29AA}"/>
-              </a:ext>
-            </a:extLst>
-          </p:cNvPr>
-          <p:cNvSpPr>
-            <a:spLocks xmlns:a="http://schemas.openxmlformats.org/drawingml/2006/main" noGrp="1"/>
-          </p:cNvSpPr>
-          <p:nvPr/>
-        </p:nvSpPr>
-        <p:spPr>
-          <a:xfrm xmlns:a="http://schemas.openxmlformats.org/drawingml/2006/main">
-            <a:off x="4286250" y="3714750"/>
-            <a:ext cx="6534150" cy="1238250"/>
+                <a16:creationId xmlns:a16="http://schemas.microsoft.com/office/drawing/2014/main" id="{AAFA1BC8-B181-40D1-A721-29D83AB3992C}"/>
+              </a:ext>
+            </a:extLst>
+          </p:cNvPr>
+          <p:cNvSpPr>
+            <a:spLocks xmlns:a="http://schemas.openxmlformats.org/drawingml/2006/main" noGrp="1"/>
+          </p:cNvSpPr>
+          <p:nvPr/>
+        </p:nvSpPr>
+        <p:spPr>
+          <a:xfrm xmlns:a="http://schemas.openxmlformats.org/drawingml/2006/main">
+            <a:off x="4286250" y="2667000"/>
+            <a:ext cx="6534150" cy="514350"/>
           </a:xfrm>
           <a:prstGeom xmlns:a="http://schemas.openxmlformats.org/drawingml/2006/main" prst="roundRect">
             <a:avLst>
-              <a:gd name="adj" fmla="val 10000"/>
+              <a:gd name="adj" fmla="val 24074"/>
+            </a:avLst>
+          </a:prstGeom>
+          <a:solidFill xmlns:a="http://schemas.openxmlformats.org/drawingml/2006/main">
+            <a:srgbClr val="FFFFFF"/>
+          </a:solidFill>
+          <a:ln xmlns:a="http://schemas.openxmlformats.org/drawingml/2006/main" w="9525">
+            <a:solidFill>
+              <a:srgbClr val="D8E0E8"/>
+            </a:solidFill>
+            <a:prstDash val="solid"/>
+          </a:ln>
+        </p:spPr>
+        <p:txBody>
+          <a:bodyPr xmlns:a="http://schemas.openxmlformats.org/drawingml/2006/main" lIns="152400" tIns="133350" rIns="152400" bIns="133350" anchor="ctr">
+            <a:normAutofit fontScale="72956"/>
+          </a:bodyPr>
+          <a:lstStyle xmlns:a="http://schemas.openxmlformats.org/drawingml/2006/main"/>
+          <a:p xmlns:a="http://schemas.openxmlformats.org/drawingml/2006/main">
+            <a:pPr algn="l">
+              <a:defRPr sz="1575" b="0">
+                <a:solidFill>
+                  <a:srgbClr val="10233F"/>
+                </a:solidFill>
+                <a:latin typeface="PingFang SC"/>
+                <a:ea typeface="PingFang SC"/>
+                <a:cs typeface="PingFang SC"/>
+              </a:defRPr>
+            </a:pPr>
+            <a:r>
+              <a:rPr sz="1575" b="0">
+                <a:solidFill>
+                  <a:srgbClr val="10233F"/>
+                </a:solidFill>
+                <a:latin typeface="PingFang SC"/>
+                <a:ea typeface="PingFang SC"/>
+                <a:cs typeface="PingFang SC"/>
+              </a:rPr>
+              <a:t>方法｜团队先把 100 个真实问题整理成评测集，要求回答同时给出制度名称、章节和生效日期</a:t>
+            </a:r>
+          </a:p>
+        </p:txBody>
+      </p:sp>
+      <p:sp>
+        <p:nvSpPr>
+          <p:cNvPr id="9" name="case-row-2">
+            <a:extLst xmlns:a="http://schemas.openxmlformats.org/drawingml/2006/main">
+              <a:ext uri="{FF2B5EF4-FFF2-40B4-BE49-F238E27FC236}">
+                <a16:creationId xmlns:a16="http://schemas.microsoft.com/office/drawing/2014/main" id="{E62D2073-6C64-418B-9035-20C15B8A8DF9}"/>
+              </a:ext>
+            </a:extLst>
+          </p:cNvPr>
+          <p:cNvSpPr>
+            <a:spLocks xmlns:a="http://schemas.openxmlformats.org/drawingml/2006/main" noGrp="1"/>
+          </p:cNvSpPr>
+          <p:nvPr/>
+        </p:nvSpPr>
+        <p:spPr>
+          <a:xfrm xmlns:a="http://schemas.openxmlformats.org/drawingml/2006/main">
+            <a:off x="4286250" y="3295650"/>
+            <a:ext cx="6534150" cy="514350"/>
+          </a:xfrm>
+          <a:prstGeom xmlns:a="http://schemas.openxmlformats.org/drawingml/2006/main" prst="roundRect">
+            <a:avLst>
+              <a:gd name="adj" fmla="val 24074"/>
+            </a:avLst>
+          </a:prstGeom>
+          <a:solidFill xmlns:a="http://schemas.openxmlformats.org/drawingml/2006/main">
+            <a:srgbClr val="FFFFFF"/>
+          </a:solidFill>
+          <a:ln xmlns:a="http://schemas.openxmlformats.org/drawingml/2006/main" w="9525">
+            <a:solidFill>
+              <a:srgbClr val="D8E0E8"/>
+            </a:solidFill>
+            <a:prstDash val="solid"/>
+          </a:ln>
+        </p:spPr>
+        <p:txBody>
+          <a:bodyPr xmlns:a="http://schemas.openxmlformats.org/drawingml/2006/main" lIns="152400" tIns="133350" rIns="152400" bIns="133350" anchor="ctr">
+            <a:normAutofit fontScale="72956"/>
+          </a:bodyPr>
+          <a:lstStyle xmlns:a="http://schemas.openxmlformats.org/drawingml/2006/main"/>
+          <a:p xmlns:a="http://schemas.openxmlformats.org/drawingml/2006/main">
+            <a:pPr algn="l">
+              <a:defRPr sz="1575" b="0">
+                <a:solidFill>
+                  <a:srgbClr val="10233F"/>
+                </a:solidFill>
+                <a:latin typeface="PingFang SC"/>
+                <a:ea typeface="PingFang SC"/>
+                <a:cs typeface="PingFang SC"/>
+              </a:defRPr>
+            </a:pPr>
+            <a:r>
+              <a:rPr sz="1575" b="0">
+                <a:solidFill>
+                  <a:srgbClr val="10233F"/>
+                </a:solidFill>
+                <a:latin typeface="PingFang SC"/>
+                <a:ea typeface="PingFang SC"/>
+                <a:cs typeface="PingFang SC"/>
+              </a:rPr>
+              <a:t>边界｜方案采用权限过滤后的文档检索，再把证据交给模型生成答案</a:t>
+            </a:r>
+          </a:p>
+        </p:txBody>
+      </p:sp>
+      <p:sp>
+        <p:nvSpPr>
+          <p:cNvPr id="10" name="case-row-3">
+            <a:extLst xmlns:a="http://schemas.openxmlformats.org/drawingml/2006/main">
+              <a:ext uri="{FF2B5EF4-FFF2-40B4-BE49-F238E27FC236}">
+                <a16:creationId xmlns:a16="http://schemas.microsoft.com/office/drawing/2014/main" id="{56EB6C8A-802E-482E-A3EF-9FE4EA7ACEC8}"/>
+              </a:ext>
+            </a:extLst>
+          </p:cNvPr>
+          <p:cNvSpPr>
+            <a:spLocks xmlns:a="http://schemas.openxmlformats.org/drawingml/2006/main" noGrp="1"/>
+          </p:cNvSpPr>
+          <p:nvPr/>
+        </p:nvSpPr>
+        <p:spPr>
+          <a:xfrm xmlns:a="http://schemas.openxmlformats.org/drawingml/2006/main">
+            <a:off x="4286250" y="3924300"/>
+            <a:ext cx="6534150" cy="514350"/>
+          </a:xfrm>
+          <a:prstGeom xmlns:a="http://schemas.openxmlformats.org/drawingml/2006/main" prst="roundRect">
+            <a:avLst>
+              <a:gd name="adj" fmla="val 24074"/>
+            </a:avLst>
+          </a:prstGeom>
+          <a:solidFill xmlns:a="http://schemas.openxmlformats.org/drawingml/2006/main">
+            <a:srgbClr val="FFFFFF"/>
+          </a:solidFill>
+          <a:ln xmlns:a="http://schemas.openxmlformats.org/drawingml/2006/main" w="9525">
+            <a:solidFill>
+              <a:srgbClr val="D8E0E8"/>
+            </a:solidFill>
+            <a:prstDash val="solid"/>
+          </a:ln>
+        </p:spPr>
+        <p:txBody>
+          <a:bodyPr xmlns:a="http://schemas.openxmlformats.org/drawingml/2006/main" lIns="152400" tIns="133350" rIns="152400" bIns="133350" anchor="ctr">
+            <a:normAutofit fontScale="72956"/>
+          </a:bodyPr>
+          <a:lstStyle xmlns:a="http://schemas.openxmlformats.org/drawingml/2006/main"/>
+          <a:p xmlns:a="http://schemas.openxmlformats.org/drawingml/2006/main">
+            <a:pPr algn="l">
+              <a:defRPr sz="1575" b="0">
+                <a:solidFill>
+                  <a:srgbClr val="10233F"/>
+                </a:solidFill>
+                <a:latin typeface="PingFang SC"/>
+                <a:ea typeface="PingFang SC"/>
+                <a:cs typeface="PingFang SC"/>
+              </a:defRPr>
+            </a:pPr>
+            <a:r>
+              <a:rPr sz="1575" b="0">
+                <a:solidFill>
+                  <a:srgbClr val="10233F"/>
+                </a:solidFill>
+                <a:latin typeface="PingFang SC"/>
+                <a:ea typeface="PingFang SC"/>
+                <a:cs typeface="PingFang SC"/>
+              </a:rPr>
+              <a:t>边界｜找不到可靠依据时明确转人工</a:t>
+            </a:r>
+          </a:p>
+        </p:txBody>
+      </p:sp>
+      <p:sp>
+        <p:nvSpPr>
+          <p:cNvPr id="11" name="case-row-4">
+            <a:extLst xmlns:a="http://schemas.openxmlformats.org/drawingml/2006/main">
+              <a:ext uri="{FF2B5EF4-FFF2-40B4-BE49-F238E27FC236}">
+                <a16:creationId xmlns:a16="http://schemas.microsoft.com/office/drawing/2014/main" id="{B49F582E-58C8-467B-8891-2BFC41246012}"/>
+              </a:ext>
+            </a:extLst>
+          </p:cNvPr>
+          <p:cNvSpPr>
+            <a:spLocks xmlns:a="http://schemas.openxmlformats.org/drawingml/2006/main" noGrp="1"/>
+          </p:cNvSpPr>
+          <p:nvPr/>
+        </p:nvSpPr>
+        <p:spPr>
+          <a:xfrm xmlns:a="http://schemas.openxmlformats.org/drawingml/2006/main">
+            <a:off x="4286250" y="4552950"/>
+            <a:ext cx="6534150" cy="514350"/>
+          </a:xfrm>
+          <a:prstGeom xmlns:a="http://schemas.openxmlformats.org/drawingml/2006/main" prst="roundRect">
+            <a:avLst>
+              <a:gd name="adj" fmla="val 24074"/>
             </a:avLst>
           </a:prstGeom>
           <a:solidFill xmlns:a="http://schemas.openxmlformats.org/drawingml/2006/main">
@@ -6370,14 +6562,14 @@
           </a:solidFill>
           <a:ln xmlns:a="http://schemas.openxmlformats.org/drawingml/2006/main" w="9525">
             <a:solidFill>
-              <a:srgbClr val="D6A33A"/>
+              <a:srgbClr val="8A5A00"/>
             </a:solidFill>
             <a:prstDash val="solid"/>
           </a:ln>
         </p:spPr>
         <p:txBody>
           <a:bodyPr xmlns:a="http://schemas.openxmlformats.org/drawingml/2006/main" lIns="152400" tIns="133350" rIns="152400" bIns="133350" anchor="ctr">
-            <a:normAutofit fontScale="93636"/>
+            <a:normAutofit fontScale="72956"/>
           </a:bodyPr>
           <a:lstStyle xmlns:a="http://schemas.openxmlformats.org/drawingml/2006/main"/>
           <a:p xmlns:a="http://schemas.openxmlformats.org/drawingml/2006/main">
@@ -6400,17 +6592,17 @@
                 <a:ea typeface="PingFang SC"/>
                 <a:cs typeface="PingFang SC"/>
               </a:rPr>
-              <a:t>机制｜试点同时比较外部 API、专属托管和本地开放权重模型。最终选择不由单次演示决定，而由引用正确率、无依据回答率、响应时延、单位任务成本、运维工时和敏感数据边界共同决定…</a:t>
+              <a:t>方法｜试点同时比较外部 API、专属托管和本地开放权重模型</a:t>
             </a:r>
           </a:p>
         </p:txBody>
       </p:sp>
       <p:sp>
         <p:nvSpPr>
-          <p:cNvPr id="9" name="s7-takeaway-rule">
-            <a:extLst xmlns:a="http://schemas.openxmlformats.org/drawingml/2006/main">
-              <a:ext uri="{FF2B5EF4-FFF2-40B4-BE49-F238E27FC236}">
-                <a16:creationId xmlns:a16="http://schemas.microsoft.com/office/drawing/2014/main" id="{C3DB306A-3FE0-4363-A463-5131AA6B1355}"/>
+          <p:cNvPr id="12" name="s7-takeaway-rule">
+            <a:extLst xmlns:a="http://schemas.openxmlformats.org/drawingml/2006/main">
+              <a:ext uri="{FF2B5EF4-FFF2-40B4-BE49-F238E27FC236}">
+                <a16:creationId xmlns:a16="http://schemas.microsoft.com/office/drawing/2014/main" id="{725C2918-AE48-4B8B-BE01-B38E1FECBE21}"/>
               </a:ext>
             </a:extLst>
           </p:cNvPr>
@@ -6440,10 +6632,10 @@
       </p:sp>
       <p:sp>
         <p:nvSpPr>
-          <p:cNvPr id="10" name="s7-takeaway">
-            <a:extLst xmlns:a="http://schemas.openxmlformats.org/drawingml/2006/main">
-              <a:ext uri="{FF2B5EF4-FFF2-40B4-BE49-F238E27FC236}">
-                <a16:creationId xmlns:a16="http://schemas.microsoft.com/office/drawing/2014/main" id="{BB5C417D-E5D2-4EE3-8629-364F68F2D2CC}"/>
+          <p:cNvPr id="13" name="s7-takeaway">
+            <a:extLst xmlns:a="http://schemas.openxmlformats.org/drawingml/2006/main">
+              <a:ext uri="{FF2B5EF4-FFF2-40B4-BE49-F238E27FC236}">
+                <a16:creationId xmlns:a16="http://schemas.microsoft.com/office/drawing/2014/main" id="{4586286E-55D0-455A-BE6F-0C054D5302DE}"/>
               </a:ext>
             </a:extLst>
           </p:cNvPr>
@@ -6499,7 +6691,7 @@
     </p:spTree>
     <p:extLst>
       <p:ext uri="{BB962C8B-B14F-4D97-AF65-F5344CB8AC3E}">
-        <p14:creationId xmlns:p14="http://schemas.microsoft.com/office/powerpoint/2010/main" val="575446349"/>
+        <p14:creationId xmlns:p14="http://schemas.microsoft.com/office/powerpoint/2010/main" val="1395464210"/>
       </p:ext>
     </p:extLst>
   </p:cSld>
@@ -6530,7 +6722,7 @@
           <p:cNvPr id="1" name="s8-rule">
             <a:extLst xmlns:a="http://schemas.openxmlformats.org/drawingml/2006/main">
               <a:ext uri="{FF2B5EF4-FFF2-40B4-BE49-F238E27FC236}">
-                <a16:creationId xmlns:a16="http://schemas.microsoft.com/office/drawing/2014/main" id="{CC654B0C-29BC-4D6C-81C0-59809FBBA83D}"/>
+                <a16:creationId xmlns:a16="http://schemas.microsoft.com/office/drawing/2014/main" id="{3E9F0FFD-88BF-4CC2-A288-CD40DFFAD26F}"/>
               </a:ext>
             </a:extLst>
           </p:cNvPr>
@@ -6563,7 +6755,7 @@
           <p:cNvPr id="2" name="s8-eyebrow">
             <a:extLst xmlns:a="http://schemas.openxmlformats.org/drawingml/2006/main">
               <a:ext uri="{FF2B5EF4-FFF2-40B4-BE49-F238E27FC236}">
-                <a16:creationId xmlns:a16="http://schemas.microsoft.com/office/drawing/2014/main" id="{514BDFC4-1233-4ADB-9395-B46AD6014ED7}"/>
+                <a16:creationId xmlns:a16="http://schemas.microsoft.com/office/drawing/2014/main" id="{957EC1B7-E9A2-4137-A29D-63809FF82F4D}"/>
               </a:ext>
             </a:extLst>
           </p:cNvPr>
@@ -6621,7 +6813,7 @@
           <p:cNvPr id="3" name="s8-title">
             <a:extLst xmlns:a="http://schemas.openxmlformats.org/drawingml/2006/main">
               <a:ext uri="{FF2B5EF4-FFF2-40B4-BE49-F238E27FC236}">
-                <a16:creationId xmlns:a16="http://schemas.microsoft.com/office/drawing/2014/main" id="{F2B786A7-8527-46B4-987C-2D2B5C44DBD0}"/>
+                <a16:creationId xmlns:a16="http://schemas.microsoft.com/office/drawing/2014/main" id="{C7DB9D7B-1AFC-4285-8CED-145CFADA5617}"/>
               </a:ext>
             </a:extLst>
           </p:cNvPr>
@@ -6669,7 +6861,7 @@
                 <a:ea typeface="PingFang SC"/>
                 <a:cs typeface="PingFang SC"/>
               </a:rPr>
-              <a:t>把方法落实为可验证的行动</a:t>
+              <a:t>DeepSeek 与开源生态：一次可验收练习</a:t>
             </a:r>
           </a:p>
         </p:txBody>
@@ -6679,7 +6871,7 @@
           <p:cNvPr id="4" name="s8-footer">
             <a:extLst xmlns:a="http://schemas.openxmlformats.org/drawingml/2006/main">
               <a:ext uri="{FF2B5EF4-FFF2-40B4-BE49-F238E27FC236}">
-                <a16:creationId xmlns:a16="http://schemas.microsoft.com/office/drawing/2014/main" id="{2D4343A3-4338-4226-85AB-0D4DE2BA31D1}"/>
+                <a16:creationId xmlns:a16="http://schemas.microsoft.com/office/drawing/2014/main" id="{1AE69E4F-B8E2-42DF-9408-4D099F822CAE}"/>
               </a:ext>
             </a:extLst>
           </p:cNvPr>
@@ -6710,7 +6902,7 @@
           <p:cNvPr id="5" name="s8-identity">
             <a:extLst xmlns:a="http://schemas.openxmlformats.org/drawingml/2006/main">
               <a:ext uri="{FF2B5EF4-FFF2-40B4-BE49-F238E27FC236}">
-                <a16:creationId xmlns:a16="http://schemas.microsoft.com/office/drawing/2014/main" id="{B4729E7A-E77B-4894-B96D-AACEA0A019E0}"/>
+                <a16:creationId xmlns:a16="http://schemas.microsoft.com/office/drawing/2014/main" id="{0524A468-8230-4B23-8046-6618AE3802FC}"/>
               </a:ext>
             </a:extLst>
           </p:cNvPr>
@@ -6768,7 +6960,7 @@
           <p:cNvPr id="6" name="practice-circle-0">
             <a:extLst xmlns:a="http://schemas.openxmlformats.org/drawingml/2006/main">
               <a:ext uri="{FF2B5EF4-FFF2-40B4-BE49-F238E27FC236}">
-                <a16:creationId xmlns:a16="http://schemas.microsoft.com/office/drawing/2014/main" id="{6A2F0DB8-AEA8-4E1F-9112-D3ABAB7DF4D2}"/>
+                <a16:creationId xmlns:a16="http://schemas.microsoft.com/office/drawing/2014/main" id="{25A2A47A-4F03-41E5-A9F1-C6BEA8FD30EC}"/>
               </a:ext>
             </a:extLst>
           </p:cNvPr>
@@ -6801,7 +6993,7 @@
           <p:cNvPr id="7" name="practice-number-0">
             <a:extLst xmlns:a="http://schemas.openxmlformats.org/drawingml/2006/main">
               <a:ext uri="{FF2B5EF4-FFF2-40B4-BE49-F238E27FC236}">
-                <a16:creationId xmlns:a16="http://schemas.microsoft.com/office/drawing/2014/main" id="{8D9113D9-453A-4677-8BFD-5BB917D05AD6}"/>
+                <a16:creationId xmlns:a16="http://schemas.microsoft.com/office/drawing/2014/main" id="{0D49C364-4424-4A85-8717-4B765F64AE63}"/>
               </a:ext>
             </a:extLst>
           </p:cNvPr>
@@ -6859,7 +7051,7 @@
           <p:cNvPr id="8" name="practice-item-0">
             <a:extLst xmlns:a="http://schemas.openxmlformats.org/drawingml/2006/main">
               <a:ext uri="{FF2B5EF4-FFF2-40B4-BE49-F238E27FC236}">
-                <a16:creationId xmlns:a16="http://schemas.microsoft.com/office/drawing/2014/main" id="{38AC9ADE-0B78-461C-AC47-7D046D9E3E1C}"/>
+                <a16:creationId xmlns:a16="http://schemas.microsoft.com/office/drawing/2014/main" id="{3CB6BF70-F28C-428B-88C6-EDF9B6C2605E}"/>
               </a:ext>
             </a:extLst>
           </p:cNvPr>
@@ -6923,7 +7115,7 @@
           <p:cNvPr id="9" name="practice-connector-0">
             <a:extLst xmlns:a="http://schemas.openxmlformats.org/drawingml/2006/main">
               <a:ext uri="{FF2B5EF4-FFF2-40B4-BE49-F238E27FC236}">
-                <a16:creationId xmlns:a16="http://schemas.microsoft.com/office/drawing/2014/main" id="{25CE4666-1FCD-4D0C-81A1-E81D41F71CA8}"/>
+                <a16:creationId xmlns:a16="http://schemas.microsoft.com/office/drawing/2014/main" id="{9D77B05F-AA0B-4622-86F5-A00D4EF27016}"/>
               </a:ext>
             </a:extLst>
           </p:cNvPr>
@@ -6943,7 +7135,7 @@
           <a:noFill xmlns:a="http://schemas.openxmlformats.org/drawingml/2006/main"/>
           <a:ln xmlns:a="http://schemas.openxmlformats.org/drawingml/2006/main" w="28575">
             <a:solidFill>
-              <a:srgbClr val="D6A33A"/>
+              <a:srgbClr val="8A5A00"/>
             </a:solidFill>
             <a:prstDash val="solid"/>
           </a:ln>
@@ -6954,7 +7146,7 @@
           <p:cNvPr id="10" name="practice-circle-1">
             <a:extLst xmlns:a="http://schemas.openxmlformats.org/drawingml/2006/main">
               <a:ext uri="{FF2B5EF4-FFF2-40B4-BE49-F238E27FC236}">
-                <a16:creationId xmlns:a16="http://schemas.microsoft.com/office/drawing/2014/main" id="{299B2004-650B-4CA9-9CB4-879F6F7DFD81}"/>
+                <a16:creationId xmlns:a16="http://schemas.microsoft.com/office/drawing/2014/main" id="{616C796C-7689-49EB-9C71-6C9A676ED05C}"/>
               </a:ext>
             </a:extLst>
           </p:cNvPr>
@@ -6987,7 +7179,7 @@
           <p:cNvPr id="11" name="practice-number-1">
             <a:extLst xmlns:a="http://schemas.openxmlformats.org/drawingml/2006/main">
               <a:ext uri="{FF2B5EF4-FFF2-40B4-BE49-F238E27FC236}">
-                <a16:creationId xmlns:a16="http://schemas.microsoft.com/office/drawing/2014/main" id="{0C0A607C-39F0-4310-95B4-D44F5F4AD6BD}"/>
+                <a16:creationId xmlns:a16="http://schemas.microsoft.com/office/drawing/2014/main" id="{C2327FA2-37A6-4F8A-82B5-B742EB05DD06}"/>
               </a:ext>
             </a:extLst>
           </p:cNvPr>
@@ -7045,7 +7237,7 @@
           <p:cNvPr id="12" name="practice-item-1">
             <a:extLst xmlns:a="http://schemas.openxmlformats.org/drawingml/2006/main">
               <a:ext uri="{FF2B5EF4-FFF2-40B4-BE49-F238E27FC236}">
-                <a16:creationId xmlns:a16="http://schemas.microsoft.com/office/drawing/2014/main" id="{FCEFF3C8-A338-48C1-947D-6D815EE356B8}"/>
+                <a16:creationId xmlns:a16="http://schemas.microsoft.com/office/drawing/2014/main" id="{39F4887B-D775-4262-A6C8-029F485E7F6B}"/>
               </a:ext>
             </a:extLst>
           </p:cNvPr>
@@ -7109,7 +7301,7 @@
           <p:cNvPr id="13" name="practice-connector-1">
             <a:extLst xmlns:a="http://schemas.openxmlformats.org/drawingml/2006/main">
               <a:ext uri="{FF2B5EF4-FFF2-40B4-BE49-F238E27FC236}">
-                <a16:creationId xmlns:a16="http://schemas.microsoft.com/office/drawing/2014/main" id="{71F3AF6F-8882-4EE5-9D5C-075669865ABE}"/>
+                <a16:creationId xmlns:a16="http://schemas.microsoft.com/office/drawing/2014/main" id="{597DE0C5-19BE-4255-89B7-B6C0D34271AA}"/>
               </a:ext>
             </a:extLst>
           </p:cNvPr>
@@ -7129,7 +7321,7 @@
           <a:noFill xmlns:a="http://schemas.openxmlformats.org/drawingml/2006/main"/>
           <a:ln xmlns:a="http://schemas.openxmlformats.org/drawingml/2006/main" w="28575">
             <a:solidFill>
-              <a:srgbClr val="D6A33A"/>
+              <a:srgbClr val="8A5A00"/>
             </a:solidFill>
             <a:prstDash val="solid"/>
           </a:ln>
@@ -7140,7 +7332,7 @@
           <p:cNvPr id="14" name="practice-circle-2">
             <a:extLst xmlns:a="http://schemas.openxmlformats.org/drawingml/2006/main">
               <a:ext uri="{FF2B5EF4-FFF2-40B4-BE49-F238E27FC236}">
-                <a16:creationId xmlns:a16="http://schemas.microsoft.com/office/drawing/2014/main" id="{9E6ABF51-68F2-4EB7-A8A2-E646D35A6F0A}"/>
+                <a16:creationId xmlns:a16="http://schemas.microsoft.com/office/drawing/2014/main" id="{D1BC3429-A118-410C-86B4-F3A660425917}"/>
               </a:ext>
             </a:extLst>
           </p:cNvPr>
@@ -7158,7 +7350,7 @@
             <a:avLst/>
           </a:prstGeom>
           <a:solidFill xmlns:a="http://schemas.openxmlformats.org/drawingml/2006/main">
-            <a:srgbClr val="D6A33A"/>
+            <a:srgbClr val="8A5A00"/>
           </a:solidFill>
           <a:ln xmlns:a="http://schemas.openxmlformats.org/drawingml/2006/main" w="28575">
             <a:solidFill>
@@ -7173,7 +7365,7 @@
           <p:cNvPr id="15" name="practice-number-2">
             <a:extLst xmlns:a="http://schemas.openxmlformats.org/drawingml/2006/main">
               <a:ext uri="{FF2B5EF4-FFF2-40B4-BE49-F238E27FC236}">
-                <a16:creationId xmlns:a16="http://schemas.microsoft.com/office/drawing/2014/main" id="{D73CFB5F-1376-4E29-AA56-29442535A349}"/>
+                <a16:creationId xmlns:a16="http://schemas.microsoft.com/office/drawing/2014/main" id="{FB84973C-DA4E-4F2E-A370-9650231DE1EF}"/>
               </a:ext>
             </a:extLst>
           </p:cNvPr>
@@ -7231,7 +7423,7 @@
           <p:cNvPr id="16" name="practice-item-2">
             <a:extLst xmlns:a="http://schemas.openxmlformats.org/drawingml/2006/main">
               <a:ext uri="{FF2B5EF4-FFF2-40B4-BE49-F238E27FC236}">
-                <a16:creationId xmlns:a16="http://schemas.microsoft.com/office/drawing/2014/main" id="{4697F61F-2A50-4AE3-94FD-1858F6FE7447}"/>
+                <a16:creationId xmlns:a16="http://schemas.microsoft.com/office/drawing/2014/main" id="{513C3AF3-FAC3-4DF0-8A2E-746C8BC7174E}"/>
               </a:ext>
             </a:extLst>
           </p:cNvPr>
@@ -7255,7 +7447,7 @@
           </a:solidFill>
           <a:ln xmlns:a="http://schemas.openxmlformats.org/drawingml/2006/main" w="19050">
             <a:solidFill>
-              <a:srgbClr val="D6A33A"/>
+              <a:srgbClr val="8A5A00"/>
             </a:solidFill>
             <a:prstDash val="solid"/>
           </a:ln>
@@ -7293,7 +7485,7 @@
     </p:spTree>
     <p:extLst>
       <p:ext uri="{BB962C8B-B14F-4D97-AF65-F5344CB8AC3E}">
-        <p14:creationId xmlns:p14="http://schemas.microsoft.com/office/powerpoint/2010/main" val="2050267890"/>
+        <p14:creationId xmlns:p14="http://schemas.microsoft.com/office/powerpoint/2010/main" val="1851192018"/>
       </p:ext>
     </p:extLst>
   </p:cSld>
@@ -7324,7 +7516,7 @@
           <p:cNvPr id="1" name="s9-rule">
             <a:extLst xmlns:a="http://schemas.openxmlformats.org/drawingml/2006/main">
               <a:ext uri="{FF2B5EF4-FFF2-40B4-BE49-F238E27FC236}">
-                <a16:creationId xmlns:a16="http://schemas.microsoft.com/office/drawing/2014/main" id="{83196DA2-62EB-4682-A0AD-DF419C69516A}"/>
+                <a16:creationId xmlns:a16="http://schemas.microsoft.com/office/drawing/2014/main" id="{724482B9-1C6E-4CE0-8CC3-FD838D30F0D3}"/>
               </a:ext>
             </a:extLst>
           </p:cNvPr>
@@ -7357,7 +7549,7 @@
           <p:cNvPr id="2" name="s9-eyebrow">
             <a:extLst xmlns:a="http://schemas.openxmlformats.org/drawingml/2006/main">
               <a:ext uri="{FF2B5EF4-FFF2-40B4-BE49-F238E27FC236}">
-                <a16:creationId xmlns:a16="http://schemas.microsoft.com/office/drawing/2014/main" id="{DEE4597A-7788-441A-A13E-619BE7F0F858}"/>
+                <a16:creationId xmlns:a16="http://schemas.microsoft.com/office/drawing/2014/main" id="{8969CA11-D264-44EE-9D5D-19000A20FAB1}"/>
               </a:ext>
             </a:extLst>
           </p:cNvPr>
@@ -7415,7 +7607,7 @@
           <p:cNvPr id="3" name="s9-title">
             <a:extLst xmlns:a="http://schemas.openxmlformats.org/drawingml/2006/main">
               <a:ext uri="{FF2B5EF4-FFF2-40B4-BE49-F238E27FC236}">
-                <a16:creationId xmlns:a16="http://schemas.microsoft.com/office/drawing/2014/main" id="{869D8216-4471-42F7-BC0B-628A01EBD6F0}"/>
+                <a16:creationId xmlns:a16="http://schemas.microsoft.com/office/drawing/2014/main" id="{53730B20-FF6D-496A-8FE5-D25CC1E9144E}"/>
               </a:ext>
             </a:extLst>
           </p:cNvPr>
@@ -7463,7 +7655,7 @@
                 <a:ea typeface="PingFang SC"/>
                 <a:cs typeface="PingFang SC"/>
               </a:rPr>
-              <a:t>带走三条可复用的判断原则</a:t>
+              <a:t>DeepSeek 与开源生态：判断时先抓住三点</a:t>
             </a:r>
           </a:p>
         </p:txBody>
@@ -7473,7 +7665,7 @@
           <p:cNvPr id="4" name="s9-footer">
             <a:extLst xmlns:a="http://schemas.openxmlformats.org/drawingml/2006/main">
               <a:ext uri="{FF2B5EF4-FFF2-40B4-BE49-F238E27FC236}">
-                <a16:creationId xmlns:a16="http://schemas.microsoft.com/office/drawing/2014/main" id="{E0851F19-A998-44A9-906C-F80BE58DD65D}"/>
+                <a16:creationId xmlns:a16="http://schemas.microsoft.com/office/drawing/2014/main" id="{A6B24DC2-6690-440F-8E82-063A71426899}"/>
               </a:ext>
             </a:extLst>
           </p:cNvPr>
@@ -7504,7 +7696,7 @@
           <p:cNvPr id="5" name="s9-identity">
             <a:extLst xmlns:a="http://schemas.openxmlformats.org/drawingml/2006/main">
               <a:ext uri="{FF2B5EF4-FFF2-40B4-BE49-F238E27FC236}">
-                <a16:creationId xmlns:a16="http://schemas.microsoft.com/office/drawing/2014/main" id="{D894A927-44FF-4ECC-9238-640C93764F5D}"/>
+                <a16:creationId xmlns:a16="http://schemas.microsoft.com/office/drawing/2014/main" id="{113F5B24-7BF0-4ED0-9F72-794F7DDCC955}"/>
               </a:ext>
             </a:extLst>
           </p:cNvPr>
@@ -7562,7 +7754,7 @@
           <p:cNvPr id="6" name="recap-circle-0">
             <a:extLst xmlns:a="http://schemas.openxmlformats.org/drawingml/2006/main">
               <a:ext uri="{FF2B5EF4-FFF2-40B4-BE49-F238E27FC236}">
-                <a16:creationId xmlns:a16="http://schemas.microsoft.com/office/drawing/2014/main" id="{3CF4D85F-BF75-4044-A53B-B0D591CE7EC9}"/>
+                <a16:creationId xmlns:a16="http://schemas.microsoft.com/office/drawing/2014/main" id="{3473E831-E918-453C-A1D5-FC502E5C1E18}"/>
               </a:ext>
             </a:extLst>
           </p:cNvPr>
@@ -7595,7 +7787,7 @@
           <p:cNvPr id="7" name="recap-number-0">
             <a:extLst xmlns:a="http://schemas.openxmlformats.org/drawingml/2006/main">
               <a:ext uri="{FF2B5EF4-FFF2-40B4-BE49-F238E27FC236}">
-                <a16:creationId xmlns:a16="http://schemas.microsoft.com/office/drawing/2014/main" id="{4671563F-A281-4079-9B86-4B4E3CCEF420}"/>
+                <a16:creationId xmlns:a16="http://schemas.microsoft.com/office/drawing/2014/main" id="{A8C33982-204B-4519-BC37-C9A891BCA033}"/>
               </a:ext>
             </a:extLst>
           </p:cNvPr>
@@ -7653,7 +7845,7 @@
           <p:cNvPr id="8" name="recap-item-0">
             <a:extLst xmlns:a="http://schemas.openxmlformats.org/drawingml/2006/main">
               <a:ext uri="{FF2B5EF4-FFF2-40B4-BE49-F238E27FC236}">
-                <a16:creationId xmlns:a16="http://schemas.microsoft.com/office/drawing/2014/main" id="{CDE09BFB-3C94-4B13-84E8-444E42A85EB3}"/>
+                <a16:creationId xmlns:a16="http://schemas.microsoft.com/office/drawing/2014/main" id="{EC8C7AF0-C1B6-4E1F-BA06-376FFBA0BF6D}"/>
               </a:ext>
             </a:extLst>
           </p:cNvPr>
@@ -7717,7 +7909,7 @@
           <p:cNvPr id="9" name="recap-connector-0">
             <a:extLst xmlns:a="http://schemas.openxmlformats.org/drawingml/2006/main">
               <a:ext uri="{FF2B5EF4-FFF2-40B4-BE49-F238E27FC236}">
-                <a16:creationId xmlns:a16="http://schemas.microsoft.com/office/drawing/2014/main" id="{6C48088B-DA1D-42F5-A475-64BAB53AC10B}"/>
+                <a16:creationId xmlns:a16="http://schemas.microsoft.com/office/drawing/2014/main" id="{4B66B44A-A263-4A90-A473-990BEB5A66B1}"/>
               </a:ext>
             </a:extLst>
           </p:cNvPr>
@@ -7737,7 +7929,7 @@
           <a:noFill xmlns:a="http://schemas.openxmlformats.org/drawingml/2006/main"/>
           <a:ln xmlns:a="http://schemas.openxmlformats.org/drawingml/2006/main" w="28575">
             <a:solidFill>
-              <a:srgbClr val="D6A33A"/>
+              <a:srgbClr val="8A5A00"/>
             </a:solidFill>
             <a:prstDash val="solid"/>
           </a:ln>
@@ -7748,7 +7940,7 @@
           <p:cNvPr id="10" name="recap-circle-1">
             <a:extLst xmlns:a="http://schemas.openxmlformats.org/drawingml/2006/main">
               <a:ext uri="{FF2B5EF4-FFF2-40B4-BE49-F238E27FC236}">
-                <a16:creationId xmlns:a16="http://schemas.microsoft.com/office/drawing/2014/main" id="{8E0B3C78-855A-4B39-AA88-8F44B2A438FC}"/>
+                <a16:creationId xmlns:a16="http://schemas.microsoft.com/office/drawing/2014/main" id="{2382A64E-AB41-4F8D-BF13-3625F20366D4}"/>
               </a:ext>
             </a:extLst>
           </p:cNvPr>
@@ -7781,7 +7973,7 @@
           <p:cNvPr id="11" name="recap-number-1">
             <a:extLst xmlns:a="http://schemas.openxmlformats.org/drawingml/2006/main">
               <a:ext uri="{FF2B5EF4-FFF2-40B4-BE49-F238E27FC236}">
-                <a16:creationId xmlns:a16="http://schemas.microsoft.com/office/drawing/2014/main" id="{A8F3A406-DC82-4484-B2AB-4CF286FC1EEC}"/>
+                <a16:creationId xmlns:a16="http://schemas.microsoft.com/office/drawing/2014/main" id="{95AECD59-1248-4C67-A238-C10B9D019601}"/>
               </a:ext>
             </a:extLst>
           </p:cNvPr>
@@ -7839,7 +8031,7 @@
           <p:cNvPr id="12" name="recap-item-1">
             <a:extLst xmlns:a="http://schemas.openxmlformats.org/drawingml/2006/main">
               <a:ext uri="{FF2B5EF4-FFF2-40B4-BE49-F238E27FC236}">
-                <a16:creationId xmlns:a16="http://schemas.microsoft.com/office/drawing/2014/main" id="{E503B071-7351-408D-AF36-BC1B6A719F41}"/>
+                <a16:creationId xmlns:a16="http://schemas.microsoft.com/office/drawing/2014/main" id="{72CBBDBC-FFC8-4A94-A7E2-D6C6EAB82A4C}"/>
               </a:ext>
             </a:extLst>
           </p:cNvPr>
@@ -7903,7 +8095,7 @@
           <p:cNvPr id="13" name="recap-connector-1">
             <a:extLst xmlns:a="http://schemas.openxmlformats.org/drawingml/2006/main">
               <a:ext uri="{FF2B5EF4-FFF2-40B4-BE49-F238E27FC236}">
-                <a16:creationId xmlns:a16="http://schemas.microsoft.com/office/drawing/2014/main" id="{69123195-AFE6-4458-9145-FA053F808CAE}"/>
+                <a16:creationId xmlns:a16="http://schemas.microsoft.com/office/drawing/2014/main" id="{EAEE6A9F-A358-406B-A1F1-D3C15E188237}"/>
               </a:ext>
             </a:extLst>
           </p:cNvPr>
@@ -7923,7 +8115,7 @@
           <a:noFill xmlns:a="http://schemas.openxmlformats.org/drawingml/2006/main"/>
           <a:ln xmlns:a="http://schemas.openxmlformats.org/drawingml/2006/main" w="28575">
             <a:solidFill>
-              <a:srgbClr val="D6A33A"/>
+              <a:srgbClr val="8A5A00"/>
             </a:solidFill>
             <a:prstDash val="solid"/>
           </a:ln>
@@ -7934,7 +8126,7 @@
           <p:cNvPr id="14" name="recap-circle-2">
             <a:extLst xmlns:a="http://schemas.openxmlformats.org/drawingml/2006/main">
               <a:ext uri="{FF2B5EF4-FFF2-40B4-BE49-F238E27FC236}">
-                <a16:creationId xmlns:a16="http://schemas.microsoft.com/office/drawing/2014/main" id="{754578D3-A889-4086-B8E4-58DEA1D0CF5F}"/>
+                <a16:creationId xmlns:a16="http://schemas.microsoft.com/office/drawing/2014/main" id="{17AC50FF-9E75-48B8-9DA6-65B0D8368767}"/>
               </a:ext>
             </a:extLst>
           </p:cNvPr>
@@ -7952,7 +8144,7 @@
             <a:avLst/>
           </a:prstGeom>
           <a:solidFill xmlns:a="http://schemas.openxmlformats.org/drawingml/2006/main">
-            <a:srgbClr val="D6A33A"/>
+            <a:srgbClr val="8A5A00"/>
           </a:solidFill>
           <a:ln xmlns:a="http://schemas.openxmlformats.org/drawingml/2006/main" w="28575">
             <a:solidFill>
@@ -7967,7 +8159,7 @@
           <p:cNvPr id="15" name="recap-number-2">
             <a:extLst xmlns:a="http://schemas.openxmlformats.org/drawingml/2006/main">
               <a:ext uri="{FF2B5EF4-FFF2-40B4-BE49-F238E27FC236}">
-                <a16:creationId xmlns:a16="http://schemas.microsoft.com/office/drawing/2014/main" id="{FBB534E6-9743-4954-82E3-B494BFA85374}"/>
+                <a16:creationId xmlns:a16="http://schemas.microsoft.com/office/drawing/2014/main" id="{4B73D364-6FA7-432C-98BE-432BF6B95F2F}"/>
               </a:ext>
             </a:extLst>
           </p:cNvPr>
@@ -8025,7 +8217,7 @@
           <p:cNvPr id="16" name="recap-item-2">
             <a:extLst xmlns:a="http://schemas.openxmlformats.org/drawingml/2006/main">
               <a:ext uri="{FF2B5EF4-FFF2-40B4-BE49-F238E27FC236}">
-                <a16:creationId xmlns:a16="http://schemas.microsoft.com/office/drawing/2014/main" id="{77277F2A-8A0B-4BCC-8476-72B1E990836F}"/>
+                <a16:creationId xmlns:a16="http://schemas.microsoft.com/office/drawing/2014/main" id="{385E6060-25C8-4E52-B848-26FE04447A16}"/>
               </a:ext>
             </a:extLst>
           </p:cNvPr>
@@ -8049,7 +8241,7 @@
           </a:solidFill>
           <a:ln xmlns:a="http://schemas.openxmlformats.org/drawingml/2006/main" w="19050">
             <a:solidFill>
-              <a:srgbClr val="D6A33A"/>
+              <a:srgbClr val="8A5A00"/>
             </a:solidFill>
             <a:prstDash val="solid"/>
           </a:ln>
@@ -8079,7 +8271,7 @@
                 <a:ea typeface="PingFang SC"/>
                 <a:cs typeface="PingFang SC"/>
               </a:rPr>
-              <a:t>公开榜单适合形成候选列表，最终选择应使用自己的代表性任务集</a:t>
+              <a:t>榜单只能筛选候选，真实任务才能决定选型</a:t>
             </a:r>
           </a:p>
         </p:txBody>
@@ -8087,7 +8279,7 @@
     </p:spTree>
     <p:extLst>
       <p:ext uri="{BB962C8B-B14F-4D97-AF65-F5344CB8AC3E}">
-        <p14:creationId xmlns:p14="http://schemas.microsoft.com/office/powerpoint/2010/main" val="858503993"/>
+        <p14:creationId xmlns:p14="http://schemas.microsoft.com/office/powerpoint/2010/main" val="910634053"/>
       </p:ext>
     </p:extLst>
   </p:cSld>

--- a/docs/public/course-assets/course-pptx/ov-005.pptx
+++ b/docs/public/course-assets/course-pptx/ov-005.pptx
@@ -2,22 +2,22 @@
 <file path=ppt/presentation.xml><?xml version="1.0" encoding="utf-8"?>
 <p:presentation xmlns:p="http://schemas.openxmlformats.org/presentationml/2006/main">
   <p:sldMasterIdLst>
-    <p:sldMasterId xmlns:r="http://schemas.openxmlformats.org/officeDocument/2006/relationships" id="2147483648" r:id="Rdb0ebb7c50c04d01"/>
+    <p:sldMasterId xmlns:r="http://schemas.openxmlformats.org/officeDocument/2006/relationships" id="2147483648" r:id="R0226e68ed053418a"/>
   </p:sldMasterIdLst>
   <p:notesMasterIdLst>
-    <p:notesMasterId xmlns:r="http://schemas.openxmlformats.org/officeDocument/2006/relationships" r:id="R679ab679fd8b4bc9"/>
+    <p:notesMasterId xmlns:r="http://schemas.openxmlformats.org/officeDocument/2006/relationships" r:id="Ra148da1f42974698"/>
   </p:notesMasterIdLst>
   <p:sldIdLst>
-    <p:sldId xmlns:r="http://schemas.openxmlformats.org/officeDocument/2006/relationships" id="256" r:id="R3b83a80c7cec4678"/>
-    <p:sldId xmlns:r="http://schemas.openxmlformats.org/officeDocument/2006/relationships" id="257" r:id="Rfbe14e3897a7438e"/>
-    <p:sldId xmlns:r="http://schemas.openxmlformats.org/officeDocument/2006/relationships" id="258" r:id="R1ebc7b175add4356"/>
-    <p:sldId xmlns:r="http://schemas.openxmlformats.org/officeDocument/2006/relationships" id="259" r:id="R3befd4962dda49a4"/>
-    <p:sldId xmlns:r="http://schemas.openxmlformats.org/officeDocument/2006/relationships" id="260" r:id="R6f92e3c159044d96"/>
-    <p:sldId xmlns:r="http://schemas.openxmlformats.org/officeDocument/2006/relationships" id="261" r:id="R72bc0b76cfa14910"/>
-    <p:sldId xmlns:r="http://schemas.openxmlformats.org/officeDocument/2006/relationships" id="262" r:id="R9875ae40dea14063"/>
-    <p:sldId xmlns:r="http://schemas.openxmlformats.org/officeDocument/2006/relationships" id="263" r:id="R3edf2a5c1aa04915"/>
-    <p:sldId xmlns:r="http://schemas.openxmlformats.org/officeDocument/2006/relationships" id="264" r:id="R3aa95de2e9d44f99"/>
-    <p:sldId xmlns:r="http://schemas.openxmlformats.org/officeDocument/2006/relationships" id="265" r:id="Raecbc5944c7f4e6a"/>
+    <p:sldId xmlns:r="http://schemas.openxmlformats.org/officeDocument/2006/relationships" id="256" r:id="Rf2e79468e76840c2"/>
+    <p:sldId xmlns:r="http://schemas.openxmlformats.org/officeDocument/2006/relationships" id="257" r:id="Ra8918ea5c59a4485"/>
+    <p:sldId xmlns:r="http://schemas.openxmlformats.org/officeDocument/2006/relationships" id="258" r:id="Rc988cf61c8404c73"/>
+    <p:sldId xmlns:r="http://schemas.openxmlformats.org/officeDocument/2006/relationships" id="259" r:id="R0e30dfa8c5704ba7"/>
+    <p:sldId xmlns:r="http://schemas.openxmlformats.org/officeDocument/2006/relationships" id="260" r:id="R8127cc3b61db48d8"/>
+    <p:sldId xmlns:r="http://schemas.openxmlformats.org/officeDocument/2006/relationships" id="261" r:id="Ra228c109793e4062"/>
+    <p:sldId xmlns:r="http://schemas.openxmlformats.org/officeDocument/2006/relationships" id="262" r:id="Rc44b00d302604e68"/>
+    <p:sldId xmlns:r="http://schemas.openxmlformats.org/officeDocument/2006/relationships" id="263" r:id="R01749f8ddde647d7"/>
+    <p:sldId xmlns:r="http://schemas.openxmlformats.org/officeDocument/2006/relationships" id="264" r:id="Rcddbf98646c94b4c"/>
+    <p:sldId xmlns:r="http://schemas.openxmlformats.org/officeDocument/2006/relationships" id="265" r:id="R203dd84219c94b58"/>
   </p:sldIdLst>
   <p:sldSz cx="12192000" cy="6858000"/>
   <p:notesSz cx="6858000" cy="9144000"/>
@@ -1204,7 +1204,7 @@
   </p:cSld>
   <p:clrMap bg1="lt1" tx1="dk1" bg2="lt2" tx2="dk2" accent1="accent1" accent2="accent2" accent3="accent3" accent4="accent4" accent5="accent5" accent6="accent6" hlink="hlink" folHlink="folHlink"/>
   <p:sldLayoutIdLst>
-    <p:sldLayoutId xmlns:r="http://schemas.openxmlformats.org/officeDocument/2006/relationships" id="2147483649" r:id="Rdc4fb9a9f6d2407e"/>
+    <p:sldLayoutId xmlns:r="http://schemas.openxmlformats.org/officeDocument/2006/relationships" id="2147483649" r:id="R254872adb017463f"/>
   </p:sldLayoutIdLst>
   <p:txStyles>
     <p:titleStyle>
@@ -1755,7 +1755,7 @@
           <p:cNvPr id="1" name="cover-rule">
             <a:extLst xmlns:a="http://schemas.openxmlformats.org/drawingml/2006/main">
               <a:ext uri="{FF2B5EF4-FFF2-40B4-BE49-F238E27FC236}">
-                <a16:creationId xmlns:a16="http://schemas.microsoft.com/office/drawing/2014/main" id="{3EFF60D9-313F-4313-AAAB-965A4AA3CF48}"/>
+                <a16:creationId xmlns:a16="http://schemas.microsoft.com/office/drawing/2014/main" id="{59DF30F4-DD3E-478F-82D0-5350D34E5742}"/>
               </a:ext>
             </a:extLst>
           </p:cNvPr>
@@ -1788,7 +1788,7 @@
           <p:cNvPr id="2" name="cover-ring-1">
             <a:extLst xmlns:a="http://schemas.openxmlformats.org/drawingml/2006/main">
               <a:ext uri="{FF2B5EF4-FFF2-40B4-BE49-F238E27FC236}">
-                <a16:creationId xmlns:a16="http://schemas.microsoft.com/office/drawing/2014/main" id="{C269DC27-2AA6-418A-B5AF-B89FF4E0F31C}"/>
+                <a16:creationId xmlns:a16="http://schemas.microsoft.com/office/drawing/2014/main" id="{E91B81FE-2436-4F80-8FFC-CA6C6CBD6533}"/>
               </a:ext>
             </a:extLst>
           </p:cNvPr>
@@ -1819,7 +1819,7 @@
           <p:cNvPr id="3" name="cover-ring-2">
             <a:extLst xmlns:a="http://schemas.openxmlformats.org/drawingml/2006/main">
               <a:ext uri="{FF2B5EF4-FFF2-40B4-BE49-F238E27FC236}">
-                <a16:creationId xmlns:a16="http://schemas.microsoft.com/office/drawing/2014/main" id="{317ACDDA-21B3-4ABA-8803-B3CED8C34288}"/>
+                <a16:creationId xmlns:a16="http://schemas.microsoft.com/office/drawing/2014/main" id="{04EC1060-14BB-47BA-B9E3-57AA00AB8981}"/>
               </a:ext>
             </a:extLst>
           </p:cNvPr>
@@ -1850,7 +1850,7 @@
           <p:cNvPr id="4" name="cover-core">
             <a:extLst xmlns:a="http://schemas.openxmlformats.org/drawingml/2006/main">
               <a:ext uri="{FF2B5EF4-FFF2-40B4-BE49-F238E27FC236}">
-                <a16:creationId xmlns:a16="http://schemas.microsoft.com/office/drawing/2014/main" id="{F23C004D-954F-4086-B594-C9A4EE15066F}"/>
+                <a16:creationId xmlns:a16="http://schemas.microsoft.com/office/drawing/2014/main" id="{517F52D7-9B17-45AE-9930-224208C149E5}"/>
               </a:ext>
             </a:extLst>
           </p:cNvPr>
@@ -1883,7 +1883,7 @@
           <p:cNvPr id="5" name="cover-line-1">
             <a:extLst xmlns:a="http://schemas.openxmlformats.org/drawingml/2006/main">
               <a:ext uri="{FF2B5EF4-FFF2-40B4-BE49-F238E27FC236}">
-                <a16:creationId xmlns:a16="http://schemas.microsoft.com/office/drawing/2014/main" id="{B7B6DF42-BC48-4DA8-84D4-29E28035D77F}"/>
+                <a16:creationId xmlns:a16="http://schemas.microsoft.com/office/drawing/2014/main" id="{6B3A3565-BBB1-4C13-B216-EF568C75919A}"/>
               </a:ext>
             </a:extLst>
           </p:cNvPr>
@@ -1914,7 +1914,7 @@
           <p:cNvPr id="6" name="cover-line-2">
             <a:extLst xmlns:a="http://schemas.openxmlformats.org/drawingml/2006/main">
               <a:ext uri="{FF2B5EF4-FFF2-40B4-BE49-F238E27FC236}">
-                <a16:creationId xmlns:a16="http://schemas.microsoft.com/office/drawing/2014/main" id="{1900D918-22B7-4193-A4D9-94425EC03544}"/>
+                <a16:creationId xmlns:a16="http://schemas.microsoft.com/office/drawing/2014/main" id="{2CC3DA2C-9748-4985-9E06-C80354BD8C71}"/>
               </a:ext>
             </a:extLst>
           </p:cNvPr>
@@ -1945,7 +1945,7 @@
           <p:cNvPr id="7" name="cover-eyebrow">
             <a:extLst xmlns:a="http://schemas.openxmlformats.org/drawingml/2006/main">
               <a:ext uri="{FF2B5EF4-FFF2-40B4-BE49-F238E27FC236}">
-                <a16:creationId xmlns:a16="http://schemas.microsoft.com/office/drawing/2014/main" id="{9656CBCC-7366-47D6-81D8-BA261F68A0C8}"/>
+                <a16:creationId xmlns:a16="http://schemas.microsoft.com/office/drawing/2014/main" id="{3FB34B5F-37F6-492C-AA7C-DAC0502FC482}"/>
               </a:ext>
             </a:extLst>
           </p:cNvPr>
@@ -2003,7 +2003,7 @@
           <p:cNvPr id="8" name="cover-title">
             <a:extLst xmlns:a="http://schemas.openxmlformats.org/drawingml/2006/main">
               <a:ext uri="{FF2B5EF4-FFF2-40B4-BE49-F238E27FC236}">
-                <a16:creationId xmlns:a16="http://schemas.microsoft.com/office/drawing/2014/main" id="{B474BE09-0524-4532-A02A-CED78B0FB029}"/>
+                <a16:creationId xmlns:a16="http://schemas.microsoft.com/office/drawing/2014/main" id="{0E72360F-CE37-484D-B2CB-9D22B3EA8A0C}"/>
               </a:ext>
             </a:extLst>
           </p:cNvPr>
@@ -2061,7 +2061,7 @@
           <p:cNvPr id="9" name="cover-subtitle">
             <a:extLst xmlns:a="http://schemas.openxmlformats.org/drawingml/2006/main">
               <a:ext uri="{FF2B5EF4-FFF2-40B4-BE49-F238E27FC236}">
-                <a16:creationId xmlns:a16="http://schemas.microsoft.com/office/drawing/2014/main" id="{14B25B0A-760C-4708-815E-7DC1F20496D0}"/>
+                <a16:creationId xmlns:a16="http://schemas.microsoft.com/office/drawing/2014/main" id="{244636AA-4E4A-455B-9E42-E71EADEFD935}"/>
               </a:ext>
             </a:extLst>
           </p:cNvPr>
@@ -2123,7 +2123,7 @@
           <p:cNvPr id="10" name="cover-lead">
             <a:extLst xmlns:a="http://schemas.openxmlformats.org/drawingml/2006/main">
               <a:ext uri="{FF2B5EF4-FFF2-40B4-BE49-F238E27FC236}">
-                <a16:creationId xmlns:a16="http://schemas.microsoft.com/office/drawing/2014/main" id="{7298D9B1-5EBF-4062-B017-E53E719EB9ED}"/>
+                <a16:creationId xmlns:a16="http://schemas.microsoft.com/office/drawing/2014/main" id="{F072B896-2286-45FB-BE25-216F4E7134C3}"/>
               </a:ext>
             </a:extLst>
           </p:cNvPr>
@@ -2181,7 +2181,7 @@
           <p:cNvPr id="11" name="cover-course">
             <a:extLst xmlns:a="http://schemas.openxmlformats.org/drawingml/2006/main">
               <a:ext uri="{FF2B5EF4-FFF2-40B4-BE49-F238E27FC236}">
-                <a16:creationId xmlns:a16="http://schemas.microsoft.com/office/drawing/2014/main" id="{12B10425-FAD5-4DC5-91F1-EE899D56B9E2}"/>
+                <a16:creationId xmlns:a16="http://schemas.microsoft.com/office/drawing/2014/main" id="{C35B5480-8A17-47A0-A99B-7FBA2539621D}"/>
               </a:ext>
             </a:extLst>
           </p:cNvPr>
@@ -2239,7 +2239,7 @@
           <p:cNvPr id="12" name="cover-id">
             <a:extLst xmlns:a="http://schemas.openxmlformats.org/drawingml/2006/main">
               <a:ext uri="{FF2B5EF4-FFF2-40B4-BE49-F238E27FC236}">
-                <a16:creationId xmlns:a16="http://schemas.microsoft.com/office/drawing/2014/main" id="{19D477C3-0897-4900-BE5F-0E2E88627AC3}"/>
+                <a16:creationId xmlns:a16="http://schemas.microsoft.com/office/drawing/2014/main" id="{0B344DB8-9C71-4708-AB60-E51F20D3243D}"/>
               </a:ext>
             </a:extLst>
           </p:cNvPr>
@@ -2295,7 +2295,7 @@
     </p:spTree>
     <p:extLst>
       <p:ext uri="{BB962C8B-B14F-4D97-AF65-F5344CB8AC3E}">
-        <p14:creationId xmlns:p14="http://schemas.microsoft.com/office/powerpoint/2010/main" val="1307546392"/>
+        <p14:creationId xmlns:p14="http://schemas.microsoft.com/office/powerpoint/2010/main" val="1976111161"/>
       </p:ext>
     </p:extLst>
   </p:cSld>
@@ -2326,7 +2326,7 @@
           <p:cNvPr id="1" name="s10-rule">
             <a:extLst xmlns:a="http://schemas.openxmlformats.org/drawingml/2006/main">
               <a:ext uri="{FF2B5EF4-FFF2-40B4-BE49-F238E27FC236}">
-                <a16:creationId xmlns:a16="http://schemas.microsoft.com/office/drawing/2014/main" id="{0D59885C-5E74-4267-8E83-70AECC58C2A1}"/>
+                <a16:creationId xmlns:a16="http://schemas.microsoft.com/office/drawing/2014/main" id="{DE572ED0-BA15-483F-B1AA-E826A4C41E66}"/>
               </a:ext>
             </a:extLst>
           </p:cNvPr>
@@ -2359,7 +2359,7 @@
           <p:cNvPr id="2" name="s10-eyebrow">
             <a:extLst xmlns:a="http://schemas.openxmlformats.org/drawingml/2006/main">
               <a:ext uri="{FF2B5EF4-FFF2-40B4-BE49-F238E27FC236}">
-                <a16:creationId xmlns:a16="http://schemas.microsoft.com/office/drawing/2014/main" id="{F3D730D6-DD29-4EC8-BF70-D7BA7074745F}"/>
+                <a16:creationId xmlns:a16="http://schemas.microsoft.com/office/drawing/2014/main" id="{CC86C537-7214-4E8B-AD6F-87E09E297252}"/>
               </a:ext>
             </a:extLst>
           </p:cNvPr>
@@ -2417,7 +2417,7 @@
           <p:cNvPr id="3" name="s10-title">
             <a:extLst xmlns:a="http://schemas.openxmlformats.org/drawingml/2006/main">
               <a:ext uri="{FF2B5EF4-FFF2-40B4-BE49-F238E27FC236}">
-                <a16:creationId xmlns:a16="http://schemas.microsoft.com/office/drawing/2014/main" id="{3958D85E-B444-4887-B1C6-EB3EC30DBA8D}"/>
+                <a16:creationId xmlns:a16="http://schemas.microsoft.com/office/drawing/2014/main" id="{1F7475CF-AF52-4AE8-B958-72145ED032C5}"/>
               </a:ext>
             </a:extLst>
           </p:cNvPr>
@@ -2475,7 +2475,7 @@
           <p:cNvPr id="4" name="s10-footer">
             <a:extLst xmlns:a="http://schemas.openxmlformats.org/drawingml/2006/main">
               <a:ext uri="{FF2B5EF4-FFF2-40B4-BE49-F238E27FC236}">
-                <a16:creationId xmlns:a16="http://schemas.microsoft.com/office/drawing/2014/main" id="{D242F366-6404-4DBD-9249-4B4155255830}"/>
+                <a16:creationId xmlns:a16="http://schemas.microsoft.com/office/drawing/2014/main" id="{1E92CAB4-D739-4B5F-B0B3-37EABA0B46D3}"/>
               </a:ext>
             </a:extLst>
           </p:cNvPr>
@@ -2506,7 +2506,7 @@
           <p:cNvPr id="5" name="s10-identity">
             <a:extLst xmlns:a="http://schemas.openxmlformats.org/drawingml/2006/main">
               <a:ext uri="{FF2B5EF4-FFF2-40B4-BE49-F238E27FC236}">
-                <a16:creationId xmlns:a16="http://schemas.microsoft.com/office/drawing/2014/main" id="{812E8C02-FB10-4EF1-8F2A-3DDB3D193AA0}"/>
+                <a16:creationId xmlns:a16="http://schemas.microsoft.com/office/drawing/2014/main" id="{CCD2FE53-D521-44C7-AEA9-F026352F12A3}"/>
               </a:ext>
             </a:extLst>
           </p:cNvPr>
@@ -2564,7 +2564,7 @@
           <p:cNvPr id="6" name="source-0">
             <a:extLst xmlns:a="http://schemas.openxmlformats.org/drawingml/2006/main">
               <a:ext uri="{FF2B5EF4-FFF2-40B4-BE49-F238E27FC236}">
-                <a16:creationId xmlns:a16="http://schemas.microsoft.com/office/drawing/2014/main" id="{7660D0CB-EB20-4831-AC87-43F143963F4A}"/>
+                <a16:creationId xmlns:a16="http://schemas.microsoft.com/office/drawing/2014/main" id="{DFF4A0D7-3A96-4E4B-A857-6A645F62BB8A}"/>
               </a:ext>
             </a:extLst>
           </p:cNvPr>
@@ -2628,7 +2628,7 @@
           <p:cNvPr id="7" name="source-1">
             <a:extLst xmlns:a="http://schemas.openxmlformats.org/drawingml/2006/main">
               <a:ext uri="{FF2B5EF4-FFF2-40B4-BE49-F238E27FC236}">
-                <a16:creationId xmlns:a16="http://schemas.microsoft.com/office/drawing/2014/main" id="{6793C831-1079-4E3B-90E4-1C3816D7173B}"/>
+                <a16:creationId xmlns:a16="http://schemas.microsoft.com/office/drawing/2014/main" id="{7406C126-4828-4F6F-A5C1-E60DEFEED685}"/>
               </a:ext>
             </a:extLst>
           </p:cNvPr>
@@ -2692,7 +2692,7 @@
           <p:cNvPr id="8" name="s10-takeaway-rule">
             <a:extLst xmlns:a="http://schemas.openxmlformats.org/drawingml/2006/main">
               <a:ext uri="{FF2B5EF4-FFF2-40B4-BE49-F238E27FC236}">
-                <a16:creationId xmlns:a16="http://schemas.microsoft.com/office/drawing/2014/main" id="{A298A5F0-C077-4B86-82E8-635A29063289}"/>
+                <a16:creationId xmlns:a16="http://schemas.microsoft.com/office/drawing/2014/main" id="{FF8C14C0-F372-4E92-97F5-941AF9D1F958}"/>
               </a:ext>
             </a:extLst>
           </p:cNvPr>
@@ -2725,7 +2725,7 @@
           <p:cNvPr id="9" name="s10-takeaway">
             <a:extLst xmlns:a="http://schemas.openxmlformats.org/drawingml/2006/main">
               <a:ext uri="{FF2B5EF4-FFF2-40B4-BE49-F238E27FC236}">
-                <a16:creationId xmlns:a16="http://schemas.microsoft.com/office/drawing/2014/main" id="{616B7B9F-491B-415C-A94B-ABDD2B50DAB4}"/>
+                <a16:creationId xmlns:a16="http://schemas.microsoft.com/office/drawing/2014/main" id="{7AEF5221-77CE-416B-B4B0-595EE8623F88}"/>
               </a:ext>
             </a:extLst>
           </p:cNvPr>
@@ -2750,7 +2750,7 @@
         </p:spPr>
         <p:txBody>
           <a:bodyPr xmlns:a="http://schemas.openxmlformats.org/drawingml/2006/main" lIns="0" tIns="0" rIns="0" bIns="0" anchor="ctr">
-            <a:normAutofit fontScale="100000"/>
+            <a:normAutofit fontScale="95911"/>
           </a:bodyPr>
           <a:lstStyle xmlns:a="http://schemas.openxmlformats.org/drawingml/2006/main"/>
           <a:p xmlns:a="http://schemas.openxmlformats.org/drawingml/2006/main">
@@ -2773,7 +2773,7 @@
                 <a:ea typeface="PingFang SC"/>
                 <a:cs typeface="PingFang SC"/>
               </a:rPr>
-              <a:t>公开幻灯片只使用课程原创文字与原生图形；完整论证、链接和事实边界请见本节讲义。</a:t>
+              <a:t>课程精编页用于讲授主线；播放器中的“原课件”模式保留团队 PowerPoint 精选页、真实图片和可播放视频。</a:t>
             </a:r>
           </a:p>
         </p:txBody>
@@ -2781,7 +2781,7 @@
     </p:spTree>
     <p:extLst>
       <p:ext uri="{BB962C8B-B14F-4D97-AF65-F5344CB8AC3E}">
-        <p14:creationId xmlns:p14="http://schemas.microsoft.com/office/powerpoint/2010/main" val="594213958"/>
+        <p14:creationId xmlns:p14="http://schemas.microsoft.com/office/powerpoint/2010/main" val="436149782"/>
       </p:ext>
     </p:extLst>
   </p:cSld>
@@ -2812,7 +2812,7 @@
           <p:cNvPr id="1" name="s2-rule">
             <a:extLst xmlns:a="http://schemas.openxmlformats.org/drawingml/2006/main">
               <a:ext uri="{FF2B5EF4-FFF2-40B4-BE49-F238E27FC236}">
-                <a16:creationId xmlns:a16="http://schemas.microsoft.com/office/drawing/2014/main" id="{64D572A8-D114-4691-A84B-D73415773A66}"/>
+                <a16:creationId xmlns:a16="http://schemas.microsoft.com/office/drawing/2014/main" id="{1963C9F5-E575-41E0-AE52-6A774A685B2E}"/>
               </a:ext>
             </a:extLst>
           </p:cNvPr>
@@ -2845,7 +2845,7 @@
           <p:cNvPr id="2" name="s2-eyebrow">
             <a:extLst xmlns:a="http://schemas.openxmlformats.org/drawingml/2006/main">
               <a:ext uri="{FF2B5EF4-FFF2-40B4-BE49-F238E27FC236}">
-                <a16:creationId xmlns:a16="http://schemas.microsoft.com/office/drawing/2014/main" id="{1A110534-0659-4D23-9470-0F629BD27155}"/>
+                <a16:creationId xmlns:a16="http://schemas.microsoft.com/office/drawing/2014/main" id="{2AFF8EC7-FFF3-4FE7-9652-D3B833FF5124}"/>
               </a:ext>
             </a:extLst>
           </p:cNvPr>
@@ -2903,7 +2903,7 @@
           <p:cNvPr id="3" name="s2-title">
             <a:extLst xmlns:a="http://schemas.openxmlformats.org/drawingml/2006/main">
               <a:ext uri="{FF2B5EF4-FFF2-40B4-BE49-F238E27FC236}">
-                <a16:creationId xmlns:a16="http://schemas.microsoft.com/office/drawing/2014/main" id="{A5C7D88F-8DFD-4304-9FF5-35292B9B0102}"/>
+                <a16:creationId xmlns:a16="http://schemas.microsoft.com/office/drawing/2014/main" id="{C95A0449-200C-41D4-88DF-46043FECCC1F}"/>
               </a:ext>
             </a:extLst>
           </p:cNvPr>
@@ -2961,7 +2961,7 @@
           <p:cNvPr id="4" name="s2-footer">
             <a:extLst xmlns:a="http://schemas.openxmlformats.org/drawingml/2006/main">
               <a:ext uri="{FF2B5EF4-FFF2-40B4-BE49-F238E27FC236}">
-                <a16:creationId xmlns:a16="http://schemas.microsoft.com/office/drawing/2014/main" id="{570EAE40-538D-4B7D-B924-22EF652FD1C2}"/>
+                <a16:creationId xmlns:a16="http://schemas.microsoft.com/office/drawing/2014/main" id="{09933517-AFDE-4349-BDF4-6F31931CB96A}"/>
               </a:ext>
             </a:extLst>
           </p:cNvPr>
@@ -2992,7 +2992,7 @@
           <p:cNvPr id="5" name="s2-identity">
             <a:extLst xmlns:a="http://schemas.openxmlformats.org/drawingml/2006/main">
               <a:ext uri="{FF2B5EF4-FFF2-40B4-BE49-F238E27FC236}">
-                <a16:creationId xmlns:a16="http://schemas.microsoft.com/office/drawing/2014/main" id="{540E6AB7-CE46-457E-8F0A-D350A19AC3E6}"/>
+                <a16:creationId xmlns:a16="http://schemas.microsoft.com/office/drawing/2014/main" id="{996CB4D6-80A8-4E86-9101-A5138B2EF990}"/>
               </a:ext>
             </a:extLst>
           </p:cNvPr>
@@ -3050,7 +3050,7 @@
           <p:cNvPr id="6" name="objective-1">
             <a:extLst xmlns:a="http://schemas.openxmlformats.org/drawingml/2006/main">
               <a:ext uri="{FF2B5EF4-FFF2-40B4-BE49-F238E27FC236}">
-                <a16:creationId xmlns:a16="http://schemas.microsoft.com/office/drawing/2014/main" id="{39FA36E5-79EE-4662-BEB1-DDD4D17DFAC8}"/>
+                <a16:creationId xmlns:a16="http://schemas.microsoft.com/office/drawing/2014/main" id="{3A629D7B-E9DE-4DFB-8661-D2E0BAB7F7BE}"/>
               </a:ext>
             </a:extLst>
           </p:cNvPr>
@@ -3137,7 +3137,7 @@
           <p:cNvPr id="7" name="objective-2">
             <a:extLst xmlns:a="http://schemas.openxmlformats.org/drawingml/2006/main">
               <a:ext uri="{FF2B5EF4-FFF2-40B4-BE49-F238E27FC236}">
-                <a16:creationId xmlns:a16="http://schemas.microsoft.com/office/drawing/2014/main" id="{B1DA4268-51BF-479F-AFD7-58909AC15161}"/>
+                <a16:creationId xmlns:a16="http://schemas.microsoft.com/office/drawing/2014/main" id="{2D60F3F5-07F2-44A1-AED8-64BDE36055E4}"/>
               </a:ext>
             </a:extLst>
           </p:cNvPr>
@@ -3224,7 +3224,7 @@
           <p:cNvPr id="8" name="objective-3">
             <a:extLst xmlns:a="http://schemas.openxmlformats.org/drawingml/2006/main">
               <a:ext uri="{FF2B5EF4-FFF2-40B4-BE49-F238E27FC236}">
-                <a16:creationId xmlns:a16="http://schemas.microsoft.com/office/drawing/2014/main" id="{D5911979-C088-4774-8C86-217A41E8EE0A}"/>
+                <a16:creationId xmlns:a16="http://schemas.microsoft.com/office/drawing/2014/main" id="{B63CC51B-6C25-400A-A70B-CE76D80DDCA8}"/>
               </a:ext>
             </a:extLst>
           </p:cNvPr>
@@ -3309,7 +3309,7 @@
     </p:spTree>
     <p:extLst>
       <p:ext uri="{BB962C8B-B14F-4D97-AF65-F5344CB8AC3E}">
-        <p14:creationId xmlns:p14="http://schemas.microsoft.com/office/powerpoint/2010/main" val="1130368631"/>
+        <p14:creationId xmlns:p14="http://schemas.microsoft.com/office/powerpoint/2010/main" val="200861715"/>
       </p:ext>
     </p:extLst>
   </p:cSld>
@@ -3340,7 +3340,7 @@
           <p:cNvPr id="1" name="s3-rule">
             <a:extLst xmlns:a="http://schemas.openxmlformats.org/drawingml/2006/main">
               <a:ext uri="{FF2B5EF4-FFF2-40B4-BE49-F238E27FC236}">
-                <a16:creationId xmlns:a16="http://schemas.microsoft.com/office/drawing/2014/main" id="{A3CCCA59-611E-4BED-855F-42973CB44B23}"/>
+                <a16:creationId xmlns:a16="http://schemas.microsoft.com/office/drawing/2014/main" id="{BF556FFA-3BD2-43C8-B565-E5D1F02B846B}"/>
               </a:ext>
             </a:extLst>
           </p:cNvPr>
@@ -3373,7 +3373,7 @@
           <p:cNvPr id="2" name="s3-eyebrow">
             <a:extLst xmlns:a="http://schemas.openxmlformats.org/drawingml/2006/main">
               <a:ext uri="{FF2B5EF4-FFF2-40B4-BE49-F238E27FC236}">
-                <a16:creationId xmlns:a16="http://schemas.microsoft.com/office/drawing/2014/main" id="{5F3A92B2-245C-46AB-AB02-6551E0085A2B}"/>
+                <a16:creationId xmlns:a16="http://schemas.microsoft.com/office/drawing/2014/main" id="{6F9AD101-D92D-4A66-AB48-48AD69C40631}"/>
               </a:ext>
             </a:extLst>
           </p:cNvPr>
@@ -3431,7 +3431,7 @@
           <p:cNvPr id="3" name="s3-title">
             <a:extLst xmlns:a="http://schemas.openxmlformats.org/drawingml/2006/main">
               <a:ext uri="{FF2B5EF4-FFF2-40B4-BE49-F238E27FC236}">
-                <a16:creationId xmlns:a16="http://schemas.microsoft.com/office/drawing/2014/main" id="{B833D68B-FF67-4FFD-84A5-C4EA1E1A48A9}"/>
+                <a16:creationId xmlns:a16="http://schemas.microsoft.com/office/drawing/2014/main" id="{A3FAFE09-3B65-4830-AE2D-B18D2378A5AD}"/>
               </a:ext>
             </a:extLst>
           </p:cNvPr>
@@ -3489,7 +3489,7 @@
           <p:cNvPr id="4" name="s3-footer">
             <a:extLst xmlns:a="http://schemas.openxmlformats.org/drawingml/2006/main">
               <a:ext uri="{FF2B5EF4-FFF2-40B4-BE49-F238E27FC236}">
-                <a16:creationId xmlns:a16="http://schemas.microsoft.com/office/drawing/2014/main" id="{4D9D0CD4-4E58-4B78-8273-C27685B73903}"/>
+                <a16:creationId xmlns:a16="http://schemas.microsoft.com/office/drawing/2014/main" id="{4AE4369E-9D70-4714-867D-8FB613EBB765}"/>
               </a:ext>
             </a:extLst>
           </p:cNvPr>
@@ -3520,7 +3520,7 @@
           <p:cNvPr id="5" name="s3-identity">
             <a:extLst xmlns:a="http://schemas.openxmlformats.org/drawingml/2006/main">
               <a:ext uri="{FF2B5EF4-FFF2-40B4-BE49-F238E27FC236}">
-                <a16:creationId xmlns:a16="http://schemas.microsoft.com/office/drawing/2014/main" id="{ED13A467-C9AC-410B-8383-9A65EC4CDD8E}"/>
+                <a16:creationId xmlns:a16="http://schemas.microsoft.com/office/drawing/2014/main" id="{4F2B565F-B38A-4DAE-AD2B-CA8DBD5A7775}"/>
               </a:ext>
             </a:extLst>
           </p:cNvPr>
@@ -3578,7 +3578,7 @@
           <p:cNvPr id="6" name="core-no-0">
             <a:extLst xmlns:a="http://schemas.openxmlformats.org/drawingml/2006/main">
               <a:ext uri="{FF2B5EF4-FFF2-40B4-BE49-F238E27FC236}">
-                <a16:creationId xmlns:a16="http://schemas.microsoft.com/office/drawing/2014/main" id="{E9731A21-45FA-4E18-BF94-BCC43E312554}"/>
+                <a16:creationId xmlns:a16="http://schemas.microsoft.com/office/drawing/2014/main" id="{41D25089-F051-44B8-9C27-C6354D20F7F4}"/>
               </a:ext>
             </a:extLst>
           </p:cNvPr>
@@ -3636,7 +3636,7 @@
           <p:cNvPr id="7" name="core-label-0">
             <a:extLst xmlns:a="http://schemas.openxmlformats.org/drawingml/2006/main">
               <a:ext uri="{FF2B5EF4-FFF2-40B4-BE49-F238E27FC236}">
-                <a16:creationId xmlns:a16="http://schemas.microsoft.com/office/drawing/2014/main" id="{07F9B896-6A45-4D79-93A3-FAFEF295B964}"/>
+                <a16:creationId xmlns:a16="http://schemas.microsoft.com/office/drawing/2014/main" id="{DC6D108F-8944-4359-A0CE-E51BD10871FD}"/>
               </a:ext>
             </a:extLst>
           </p:cNvPr>
@@ -3694,7 +3694,7 @@
           <p:cNvPr id="8" name="core-body-0">
             <a:extLst xmlns:a="http://schemas.openxmlformats.org/drawingml/2006/main">
               <a:ext uri="{FF2B5EF4-FFF2-40B4-BE49-F238E27FC236}">
-                <a16:creationId xmlns:a16="http://schemas.microsoft.com/office/drawing/2014/main" id="{B8286EBE-14F8-4B05-B378-A5E9D97E2D8A}"/>
+                <a16:creationId xmlns:a16="http://schemas.microsoft.com/office/drawing/2014/main" id="{453AB9D2-ECD7-415E-9FFB-1769BBD13DE6}"/>
               </a:ext>
             </a:extLst>
           </p:cNvPr>
@@ -3758,7 +3758,7 @@
           <p:cNvPr id="9" name="core-no-1">
             <a:extLst xmlns:a="http://schemas.openxmlformats.org/drawingml/2006/main">
               <a:ext uri="{FF2B5EF4-FFF2-40B4-BE49-F238E27FC236}">
-                <a16:creationId xmlns:a16="http://schemas.microsoft.com/office/drawing/2014/main" id="{009D2BCB-C3B5-4421-B228-9E9AD1634365}"/>
+                <a16:creationId xmlns:a16="http://schemas.microsoft.com/office/drawing/2014/main" id="{311D099F-7330-4622-94B4-0DCE47CBC95E}"/>
               </a:ext>
             </a:extLst>
           </p:cNvPr>
@@ -3816,7 +3816,7 @@
           <p:cNvPr id="10" name="core-body-1">
             <a:extLst xmlns:a="http://schemas.openxmlformats.org/drawingml/2006/main">
               <a:ext uri="{FF2B5EF4-FFF2-40B4-BE49-F238E27FC236}">
-                <a16:creationId xmlns:a16="http://schemas.microsoft.com/office/drawing/2014/main" id="{384FF6AD-C6FC-49ED-9BD8-AFBC65336D3D}"/>
+                <a16:creationId xmlns:a16="http://schemas.microsoft.com/office/drawing/2014/main" id="{3EECA4D0-40C2-4358-9975-871F86543BCC}"/>
               </a:ext>
             </a:extLst>
           </p:cNvPr>
@@ -3880,7 +3880,7 @@
           <p:cNvPr id="11" name="s3-takeaway-rule">
             <a:extLst xmlns:a="http://schemas.openxmlformats.org/drawingml/2006/main">
               <a:ext uri="{FF2B5EF4-FFF2-40B4-BE49-F238E27FC236}">
-                <a16:creationId xmlns:a16="http://schemas.microsoft.com/office/drawing/2014/main" id="{46393432-E86F-4695-8496-A810AD57A2BB}"/>
+                <a16:creationId xmlns:a16="http://schemas.microsoft.com/office/drawing/2014/main" id="{AFFC04B0-D39C-4F4B-A6F3-826B9A19C125}"/>
               </a:ext>
             </a:extLst>
           </p:cNvPr>
@@ -3913,7 +3913,7 @@
           <p:cNvPr id="12" name="s3-takeaway">
             <a:extLst xmlns:a="http://schemas.openxmlformats.org/drawingml/2006/main">
               <a:ext uri="{FF2B5EF4-FFF2-40B4-BE49-F238E27FC236}">
-                <a16:creationId xmlns:a16="http://schemas.microsoft.com/office/drawing/2014/main" id="{C8B1B495-B50E-4274-A6AD-CB5CC5AED033}"/>
+                <a16:creationId xmlns:a16="http://schemas.microsoft.com/office/drawing/2014/main" id="{36735FD9-AB80-4298-BD92-25BD08F8F824}"/>
               </a:ext>
             </a:extLst>
           </p:cNvPr>
@@ -3969,7 +3969,7 @@
     </p:spTree>
     <p:extLst>
       <p:ext uri="{BB962C8B-B14F-4D97-AF65-F5344CB8AC3E}">
-        <p14:creationId xmlns:p14="http://schemas.microsoft.com/office/powerpoint/2010/main" val="701314792"/>
+        <p14:creationId xmlns:p14="http://schemas.microsoft.com/office/powerpoint/2010/main" val="2059501542"/>
       </p:ext>
     </p:extLst>
   </p:cSld>
@@ -4000,7 +4000,7 @@
           <p:cNvPr id="1" name="s4-rule">
             <a:extLst xmlns:a="http://schemas.openxmlformats.org/drawingml/2006/main">
               <a:ext uri="{FF2B5EF4-FFF2-40B4-BE49-F238E27FC236}">
-                <a16:creationId xmlns:a16="http://schemas.microsoft.com/office/drawing/2014/main" id="{BCE7B328-B9BD-44EF-834E-1AE29259B99A}"/>
+                <a16:creationId xmlns:a16="http://schemas.microsoft.com/office/drawing/2014/main" id="{49043978-AC96-4CE2-AD67-4B2403A90C93}"/>
               </a:ext>
             </a:extLst>
           </p:cNvPr>
@@ -4033,7 +4033,7 @@
           <p:cNvPr id="2" name="s4-eyebrow">
             <a:extLst xmlns:a="http://schemas.openxmlformats.org/drawingml/2006/main">
               <a:ext uri="{FF2B5EF4-FFF2-40B4-BE49-F238E27FC236}">
-                <a16:creationId xmlns:a16="http://schemas.microsoft.com/office/drawing/2014/main" id="{38F78770-ED33-40CB-84B5-8D613CDF50F9}"/>
+                <a16:creationId xmlns:a16="http://schemas.microsoft.com/office/drawing/2014/main" id="{946BDA44-5FEB-4419-B27B-9CFEA958A7F2}"/>
               </a:ext>
             </a:extLst>
           </p:cNvPr>
@@ -4091,7 +4091,7 @@
           <p:cNvPr id="3" name="s4-title">
             <a:extLst xmlns:a="http://schemas.openxmlformats.org/drawingml/2006/main">
               <a:ext uri="{FF2B5EF4-FFF2-40B4-BE49-F238E27FC236}">
-                <a16:creationId xmlns:a16="http://schemas.microsoft.com/office/drawing/2014/main" id="{813A2F99-55E3-47CD-A96E-958B3036BD86}"/>
+                <a16:creationId xmlns:a16="http://schemas.microsoft.com/office/drawing/2014/main" id="{7970500D-29D8-440D-84FB-76AF5049E16D}"/>
               </a:ext>
             </a:extLst>
           </p:cNvPr>
@@ -4149,7 +4149,7 @@
           <p:cNvPr id="4" name="s4-footer">
             <a:extLst xmlns:a="http://schemas.openxmlformats.org/drawingml/2006/main">
               <a:ext uri="{FF2B5EF4-FFF2-40B4-BE49-F238E27FC236}">
-                <a16:creationId xmlns:a16="http://schemas.microsoft.com/office/drawing/2014/main" id="{773A50B7-CE0B-4167-B6CA-FD78ED861C0D}"/>
+                <a16:creationId xmlns:a16="http://schemas.microsoft.com/office/drawing/2014/main" id="{420D80FF-06E3-4909-A5F1-18BE816210EB}"/>
               </a:ext>
             </a:extLst>
           </p:cNvPr>
@@ -4180,7 +4180,7 @@
           <p:cNvPr id="5" name="s4-identity">
             <a:extLst xmlns:a="http://schemas.openxmlformats.org/drawingml/2006/main">
               <a:ext uri="{FF2B5EF4-FFF2-40B4-BE49-F238E27FC236}">
-                <a16:creationId xmlns:a16="http://schemas.microsoft.com/office/drawing/2014/main" id="{EAED8AF6-74E3-4C47-825A-405B1B32A05A}"/>
+                <a16:creationId xmlns:a16="http://schemas.microsoft.com/office/drawing/2014/main" id="{58EB5FC4-2CC4-48D3-B5F4-AC39E5EB8ED8}"/>
               </a:ext>
             </a:extLst>
           </p:cNvPr>
@@ -4238,7 +4238,7 @@
           <p:cNvPr id="6" name="core-no-0">
             <a:extLst xmlns:a="http://schemas.openxmlformats.org/drawingml/2006/main">
               <a:ext uri="{FF2B5EF4-FFF2-40B4-BE49-F238E27FC236}">
-                <a16:creationId xmlns:a16="http://schemas.microsoft.com/office/drawing/2014/main" id="{253F9094-0721-4B93-B354-CD2103B61799}"/>
+                <a16:creationId xmlns:a16="http://schemas.microsoft.com/office/drawing/2014/main" id="{0F8DB095-173D-42F3-9A1F-22613EED33E2}"/>
               </a:ext>
             </a:extLst>
           </p:cNvPr>
@@ -4296,7 +4296,7 @@
           <p:cNvPr id="7" name="core-label-0">
             <a:extLst xmlns:a="http://schemas.openxmlformats.org/drawingml/2006/main">
               <a:ext uri="{FF2B5EF4-FFF2-40B4-BE49-F238E27FC236}">
-                <a16:creationId xmlns:a16="http://schemas.microsoft.com/office/drawing/2014/main" id="{52A7CF29-31AF-4954-BD94-99D8E46A1544}"/>
+                <a16:creationId xmlns:a16="http://schemas.microsoft.com/office/drawing/2014/main" id="{6B3B7C67-68CC-43AA-9430-7BF7CC945499}"/>
               </a:ext>
             </a:extLst>
           </p:cNvPr>
@@ -4354,7 +4354,7 @@
           <p:cNvPr id="8" name="core-body-0">
             <a:extLst xmlns:a="http://schemas.openxmlformats.org/drawingml/2006/main">
               <a:ext uri="{FF2B5EF4-FFF2-40B4-BE49-F238E27FC236}">
-                <a16:creationId xmlns:a16="http://schemas.microsoft.com/office/drawing/2014/main" id="{44E7F871-CBD0-49E3-9249-390B0737757A}"/>
+                <a16:creationId xmlns:a16="http://schemas.microsoft.com/office/drawing/2014/main" id="{11519109-B214-4DC9-BB69-BE9353BEE4B9}"/>
               </a:ext>
             </a:extLst>
           </p:cNvPr>
@@ -4418,7 +4418,7 @@
           <p:cNvPr id="9" name="core-no-1">
             <a:extLst xmlns:a="http://schemas.openxmlformats.org/drawingml/2006/main">
               <a:ext uri="{FF2B5EF4-FFF2-40B4-BE49-F238E27FC236}">
-                <a16:creationId xmlns:a16="http://schemas.microsoft.com/office/drawing/2014/main" id="{EF4E837B-6AEA-4828-AFCF-BD62893EC5A1}"/>
+                <a16:creationId xmlns:a16="http://schemas.microsoft.com/office/drawing/2014/main" id="{05333452-2C6E-4262-A6ED-90050C03F5F8}"/>
               </a:ext>
             </a:extLst>
           </p:cNvPr>
@@ -4476,7 +4476,7 @@
           <p:cNvPr id="10" name="core-body-1">
             <a:extLst xmlns:a="http://schemas.openxmlformats.org/drawingml/2006/main">
               <a:ext uri="{FF2B5EF4-FFF2-40B4-BE49-F238E27FC236}">
-                <a16:creationId xmlns:a16="http://schemas.microsoft.com/office/drawing/2014/main" id="{F5C62A39-44FB-4802-A8CB-BCF5ED3851E4}"/>
+                <a16:creationId xmlns:a16="http://schemas.microsoft.com/office/drawing/2014/main" id="{EA295483-D708-4C65-A068-4D02228952A3}"/>
               </a:ext>
             </a:extLst>
           </p:cNvPr>
@@ -4540,7 +4540,7 @@
           <p:cNvPr id="11" name="s4-takeaway-rule">
             <a:extLst xmlns:a="http://schemas.openxmlformats.org/drawingml/2006/main">
               <a:ext uri="{FF2B5EF4-FFF2-40B4-BE49-F238E27FC236}">
-                <a16:creationId xmlns:a16="http://schemas.microsoft.com/office/drawing/2014/main" id="{305711F3-8AFA-4FB1-8F0A-E1D8B2EB6621}"/>
+                <a16:creationId xmlns:a16="http://schemas.microsoft.com/office/drawing/2014/main" id="{E561E88E-225D-4C10-812B-22D219A08A11}"/>
               </a:ext>
             </a:extLst>
           </p:cNvPr>
@@ -4573,7 +4573,7 @@
           <p:cNvPr id="12" name="s4-takeaway">
             <a:extLst xmlns:a="http://schemas.openxmlformats.org/drawingml/2006/main">
               <a:ext uri="{FF2B5EF4-FFF2-40B4-BE49-F238E27FC236}">
-                <a16:creationId xmlns:a16="http://schemas.microsoft.com/office/drawing/2014/main" id="{E866FA39-9602-494B-A4BC-E600A6970C21}"/>
+                <a16:creationId xmlns:a16="http://schemas.microsoft.com/office/drawing/2014/main" id="{F9163974-5B41-4A07-B282-8E607EFDC17B}"/>
               </a:ext>
             </a:extLst>
           </p:cNvPr>
@@ -4629,7 +4629,7 @@
     </p:spTree>
     <p:extLst>
       <p:ext uri="{BB962C8B-B14F-4D97-AF65-F5344CB8AC3E}">
-        <p14:creationId xmlns:p14="http://schemas.microsoft.com/office/powerpoint/2010/main" val="915914654"/>
+        <p14:creationId xmlns:p14="http://schemas.microsoft.com/office/powerpoint/2010/main" val="955837532"/>
       </p:ext>
     </p:extLst>
   </p:cSld>
@@ -4660,7 +4660,7 @@
           <p:cNvPr id="1" name="s5-rule">
             <a:extLst xmlns:a="http://schemas.openxmlformats.org/drawingml/2006/main">
               <a:ext uri="{FF2B5EF4-FFF2-40B4-BE49-F238E27FC236}">
-                <a16:creationId xmlns:a16="http://schemas.microsoft.com/office/drawing/2014/main" id="{50635D53-B660-45CC-BB6A-1B42F3DF1879}"/>
+                <a16:creationId xmlns:a16="http://schemas.microsoft.com/office/drawing/2014/main" id="{7D1AD665-1691-4850-BBBA-E3F5AD1CEFED}"/>
               </a:ext>
             </a:extLst>
           </p:cNvPr>
@@ -4693,7 +4693,7 @@
           <p:cNvPr id="2" name="s5-eyebrow">
             <a:extLst xmlns:a="http://schemas.openxmlformats.org/drawingml/2006/main">
               <a:ext uri="{FF2B5EF4-FFF2-40B4-BE49-F238E27FC236}">
-                <a16:creationId xmlns:a16="http://schemas.microsoft.com/office/drawing/2014/main" id="{BFC2CBF8-59C6-498A-845C-F9BED59ECC4A}"/>
+                <a16:creationId xmlns:a16="http://schemas.microsoft.com/office/drawing/2014/main" id="{5C15BA61-F050-4157-BE82-D00E039F7893}"/>
               </a:ext>
             </a:extLst>
           </p:cNvPr>
@@ -4751,7 +4751,7 @@
           <p:cNvPr id="3" name="s5-title">
             <a:extLst xmlns:a="http://schemas.openxmlformats.org/drawingml/2006/main">
               <a:ext uri="{FF2B5EF4-FFF2-40B4-BE49-F238E27FC236}">
-                <a16:creationId xmlns:a16="http://schemas.microsoft.com/office/drawing/2014/main" id="{B278C1E7-C4E2-4EB1-ADC5-D109113BB449}"/>
+                <a16:creationId xmlns:a16="http://schemas.microsoft.com/office/drawing/2014/main" id="{67B08AC2-761D-4713-92AF-6F28D234439A}"/>
               </a:ext>
             </a:extLst>
           </p:cNvPr>
@@ -4809,7 +4809,7 @@
           <p:cNvPr id="4" name="s5-footer">
             <a:extLst xmlns:a="http://schemas.openxmlformats.org/drawingml/2006/main">
               <a:ext uri="{FF2B5EF4-FFF2-40B4-BE49-F238E27FC236}">
-                <a16:creationId xmlns:a16="http://schemas.microsoft.com/office/drawing/2014/main" id="{7BFD3EDF-5793-4788-A9F2-FADCBCC4CBF2}"/>
+                <a16:creationId xmlns:a16="http://schemas.microsoft.com/office/drawing/2014/main" id="{8A1B4F93-7BB8-43E9-9BE0-CBD52BD63F79}"/>
               </a:ext>
             </a:extLst>
           </p:cNvPr>
@@ -4840,7 +4840,7 @@
           <p:cNvPr id="5" name="s5-identity">
             <a:extLst xmlns:a="http://schemas.openxmlformats.org/drawingml/2006/main">
               <a:ext uri="{FF2B5EF4-FFF2-40B4-BE49-F238E27FC236}">
-                <a16:creationId xmlns:a16="http://schemas.microsoft.com/office/drawing/2014/main" id="{A3AF971F-24C7-4419-9117-E246B61C6044}"/>
+                <a16:creationId xmlns:a16="http://schemas.microsoft.com/office/drawing/2014/main" id="{338F112B-7E22-4D30-8209-C83AD2568C81}"/>
               </a:ext>
             </a:extLst>
           </p:cNvPr>
@@ -4898,7 +4898,7 @@
           <p:cNvPr id="6" name="core-no-0">
             <a:extLst xmlns:a="http://schemas.openxmlformats.org/drawingml/2006/main">
               <a:ext uri="{FF2B5EF4-FFF2-40B4-BE49-F238E27FC236}">
-                <a16:creationId xmlns:a16="http://schemas.microsoft.com/office/drawing/2014/main" id="{F053EA85-C6D3-4B2D-B81E-9EE9F662BE89}"/>
+                <a16:creationId xmlns:a16="http://schemas.microsoft.com/office/drawing/2014/main" id="{A69C48FD-DADC-421A-A43F-D794E2AFA63D}"/>
               </a:ext>
             </a:extLst>
           </p:cNvPr>
@@ -4956,7 +4956,7 @@
           <p:cNvPr id="7" name="core-label-0">
             <a:extLst xmlns:a="http://schemas.openxmlformats.org/drawingml/2006/main">
               <a:ext uri="{FF2B5EF4-FFF2-40B4-BE49-F238E27FC236}">
-                <a16:creationId xmlns:a16="http://schemas.microsoft.com/office/drawing/2014/main" id="{DDE6CEB3-4AF8-43D7-A563-47C3A1AF1DEA}"/>
+                <a16:creationId xmlns:a16="http://schemas.microsoft.com/office/drawing/2014/main" id="{DD2A738E-1D99-4FDE-9936-4D080DC6149C}"/>
               </a:ext>
             </a:extLst>
           </p:cNvPr>
@@ -5014,7 +5014,7 @@
           <p:cNvPr id="8" name="core-body-0">
             <a:extLst xmlns:a="http://schemas.openxmlformats.org/drawingml/2006/main">
               <a:ext uri="{FF2B5EF4-FFF2-40B4-BE49-F238E27FC236}">
-                <a16:creationId xmlns:a16="http://schemas.microsoft.com/office/drawing/2014/main" id="{1B740346-3AE8-4C16-9FDF-71C0799ED10B}"/>
+                <a16:creationId xmlns:a16="http://schemas.microsoft.com/office/drawing/2014/main" id="{D76109B5-F74E-4387-B8F7-5F200CE12D72}"/>
               </a:ext>
             </a:extLst>
           </p:cNvPr>
@@ -5078,7 +5078,7 @@
           <p:cNvPr id="9" name="core-no-1">
             <a:extLst xmlns:a="http://schemas.openxmlformats.org/drawingml/2006/main">
               <a:ext uri="{FF2B5EF4-FFF2-40B4-BE49-F238E27FC236}">
-                <a16:creationId xmlns:a16="http://schemas.microsoft.com/office/drawing/2014/main" id="{358DEEE5-FB30-4D22-B086-3D1FC2951D84}"/>
+                <a16:creationId xmlns:a16="http://schemas.microsoft.com/office/drawing/2014/main" id="{4ECAE927-5AEA-46F6-90D2-7846E0191970}"/>
               </a:ext>
             </a:extLst>
           </p:cNvPr>
@@ -5136,7 +5136,7 @@
           <p:cNvPr id="10" name="core-body-1">
             <a:extLst xmlns:a="http://schemas.openxmlformats.org/drawingml/2006/main">
               <a:ext uri="{FF2B5EF4-FFF2-40B4-BE49-F238E27FC236}">
-                <a16:creationId xmlns:a16="http://schemas.microsoft.com/office/drawing/2014/main" id="{8AFFC6EB-440C-4B77-B666-860299DD5984}"/>
+                <a16:creationId xmlns:a16="http://schemas.microsoft.com/office/drawing/2014/main" id="{243700F6-6708-43EA-836E-4950DE2BB21F}"/>
               </a:ext>
             </a:extLst>
           </p:cNvPr>
@@ -5200,7 +5200,7 @@
           <p:cNvPr id="11" name="s5-takeaway-rule">
             <a:extLst xmlns:a="http://schemas.openxmlformats.org/drawingml/2006/main">
               <a:ext uri="{FF2B5EF4-FFF2-40B4-BE49-F238E27FC236}">
-                <a16:creationId xmlns:a16="http://schemas.microsoft.com/office/drawing/2014/main" id="{8E1AD9F2-BC69-49E5-B6E2-C8877A18EA8F}"/>
+                <a16:creationId xmlns:a16="http://schemas.microsoft.com/office/drawing/2014/main" id="{2BA8832D-80E0-4B40-A6F3-DC3D93732631}"/>
               </a:ext>
             </a:extLst>
           </p:cNvPr>
@@ -5233,7 +5233,7 @@
           <p:cNvPr id="12" name="s5-takeaway">
             <a:extLst xmlns:a="http://schemas.openxmlformats.org/drawingml/2006/main">
               <a:ext uri="{FF2B5EF4-FFF2-40B4-BE49-F238E27FC236}">
-                <a16:creationId xmlns:a16="http://schemas.microsoft.com/office/drawing/2014/main" id="{59D8DD3F-9F9E-4555-ADF0-850C00288970}"/>
+                <a16:creationId xmlns:a16="http://schemas.microsoft.com/office/drawing/2014/main" id="{522AC130-97E0-4834-A0AA-D89C4D07B8E0}"/>
               </a:ext>
             </a:extLst>
           </p:cNvPr>
@@ -5289,7 +5289,7 @@
     </p:spTree>
     <p:extLst>
       <p:ext uri="{BB962C8B-B14F-4D97-AF65-F5344CB8AC3E}">
-        <p14:creationId xmlns:p14="http://schemas.microsoft.com/office/powerpoint/2010/main" val="1346267046"/>
+        <p14:creationId xmlns:p14="http://schemas.microsoft.com/office/powerpoint/2010/main" val="615046702"/>
       </p:ext>
     </p:extLst>
   </p:cSld>
@@ -5320,7 +5320,7 @@
           <p:cNvPr id="1" name="s6-rule">
             <a:extLst xmlns:a="http://schemas.openxmlformats.org/drawingml/2006/main">
               <a:ext uri="{FF2B5EF4-FFF2-40B4-BE49-F238E27FC236}">
-                <a16:creationId xmlns:a16="http://schemas.microsoft.com/office/drawing/2014/main" id="{34C1C0F0-396D-42F9-B1B0-81DE3B8FCDBA}"/>
+                <a16:creationId xmlns:a16="http://schemas.microsoft.com/office/drawing/2014/main" id="{E80878F7-4494-4A2D-8B1A-AB88C3DC31AD}"/>
               </a:ext>
             </a:extLst>
           </p:cNvPr>
@@ -5353,7 +5353,7 @@
           <p:cNvPr id="2" name="s6-eyebrow">
             <a:extLst xmlns:a="http://schemas.openxmlformats.org/drawingml/2006/main">
               <a:ext uri="{FF2B5EF4-FFF2-40B4-BE49-F238E27FC236}">
-                <a16:creationId xmlns:a16="http://schemas.microsoft.com/office/drawing/2014/main" id="{6818DF42-E816-4A42-A2A6-9AE5090AB58B}"/>
+                <a16:creationId xmlns:a16="http://schemas.microsoft.com/office/drawing/2014/main" id="{9406011E-69CA-402E-9ABE-F1AD3AD1D6FF}"/>
               </a:ext>
             </a:extLst>
           </p:cNvPr>
@@ -5411,7 +5411,7 @@
           <p:cNvPr id="3" name="s6-title">
             <a:extLst xmlns:a="http://schemas.openxmlformats.org/drawingml/2006/main">
               <a:ext uri="{FF2B5EF4-FFF2-40B4-BE49-F238E27FC236}">
-                <a16:creationId xmlns:a16="http://schemas.microsoft.com/office/drawing/2014/main" id="{BFC4D2A6-0447-481F-AFBC-0B715D073704}"/>
+                <a16:creationId xmlns:a16="http://schemas.microsoft.com/office/drawing/2014/main" id="{A30809BF-5B9B-44F8-81C7-05A0E5D76331}"/>
               </a:ext>
             </a:extLst>
           </p:cNvPr>
@@ -5469,7 +5469,7 @@
           <p:cNvPr id="4" name="s6-footer">
             <a:extLst xmlns:a="http://schemas.openxmlformats.org/drawingml/2006/main">
               <a:ext uri="{FF2B5EF4-FFF2-40B4-BE49-F238E27FC236}">
-                <a16:creationId xmlns:a16="http://schemas.microsoft.com/office/drawing/2014/main" id="{471C1B6A-C643-4B51-9617-531386B6712B}"/>
+                <a16:creationId xmlns:a16="http://schemas.microsoft.com/office/drawing/2014/main" id="{3D247B62-A605-4D7D-BC26-C008CD40D542}"/>
               </a:ext>
             </a:extLst>
           </p:cNvPr>
@@ -5500,7 +5500,7 @@
           <p:cNvPr id="5" name="s6-identity">
             <a:extLst xmlns:a="http://schemas.openxmlformats.org/drawingml/2006/main">
               <a:ext uri="{FF2B5EF4-FFF2-40B4-BE49-F238E27FC236}">
-                <a16:creationId xmlns:a16="http://schemas.microsoft.com/office/drawing/2014/main" id="{0A426B7D-B509-47E7-BD3E-75D70663EA5F}"/>
+                <a16:creationId xmlns:a16="http://schemas.microsoft.com/office/drawing/2014/main" id="{E9293088-AA28-4CA8-92D1-FCE985DB52C1}"/>
               </a:ext>
             </a:extLst>
           </p:cNvPr>
@@ -5558,7 +5558,7 @@
           <p:cNvPr id="6" name="core-no-0">
             <a:extLst xmlns:a="http://schemas.openxmlformats.org/drawingml/2006/main">
               <a:ext uri="{FF2B5EF4-FFF2-40B4-BE49-F238E27FC236}">
-                <a16:creationId xmlns:a16="http://schemas.microsoft.com/office/drawing/2014/main" id="{A6CA5C63-D82D-43EF-A0B1-39A8850E7129}"/>
+                <a16:creationId xmlns:a16="http://schemas.microsoft.com/office/drawing/2014/main" id="{BA960CAB-2BA0-4739-9F2A-ECD224D4CFB0}"/>
               </a:ext>
             </a:extLst>
           </p:cNvPr>
@@ -5616,7 +5616,7 @@
           <p:cNvPr id="7" name="core-label-0">
             <a:extLst xmlns:a="http://schemas.openxmlformats.org/drawingml/2006/main">
               <a:ext uri="{FF2B5EF4-FFF2-40B4-BE49-F238E27FC236}">
-                <a16:creationId xmlns:a16="http://schemas.microsoft.com/office/drawing/2014/main" id="{EC9B1671-6D73-4045-8F7E-A6538576C07E}"/>
+                <a16:creationId xmlns:a16="http://schemas.microsoft.com/office/drawing/2014/main" id="{7F5ACD04-4AD7-4835-8E1F-1D88158676F4}"/>
               </a:ext>
             </a:extLst>
           </p:cNvPr>
@@ -5674,7 +5674,7 @@
           <p:cNvPr id="8" name="core-body-0">
             <a:extLst xmlns:a="http://schemas.openxmlformats.org/drawingml/2006/main">
               <a:ext uri="{FF2B5EF4-FFF2-40B4-BE49-F238E27FC236}">
-                <a16:creationId xmlns:a16="http://schemas.microsoft.com/office/drawing/2014/main" id="{438953F7-CD6C-4185-BDE3-A4CF30DB38C4}"/>
+                <a16:creationId xmlns:a16="http://schemas.microsoft.com/office/drawing/2014/main" id="{A145ADA4-C400-4BE8-BC5D-0963D5E7FC7E}"/>
               </a:ext>
             </a:extLst>
           </p:cNvPr>
@@ -5738,7 +5738,7 @@
           <p:cNvPr id="9" name="core-no-1">
             <a:extLst xmlns:a="http://schemas.openxmlformats.org/drawingml/2006/main">
               <a:ext uri="{FF2B5EF4-FFF2-40B4-BE49-F238E27FC236}">
-                <a16:creationId xmlns:a16="http://schemas.microsoft.com/office/drawing/2014/main" id="{209743B6-F4F8-4EA8-B489-1DCCE2CA2AA8}"/>
+                <a16:creationId xmlns:a16="http://schemas.microsoft.com/office/drawing/2014/main" id="{30F01555-C2E1-4ED8-A095-90E4F0B7F760}"/>
               </a:ext>
             </a:extLst>
           </p:cNvPr>
@@ -5796,7 +5796,7 @@
           <p:cNvPr id="10" name="core-body-1">
             <a:extLst xmlns:a="http://schemas.openxmlformats.org/drawingml/2006/main">
               <a:ext uri="{FF2B5EF4-FFF2-40B4-BE49-F238E27FC236}">
-                <a16:creationId xmlns:a16="http://schemas.microsoft.com/office/drawing/2014/main" id="{324A3F23-AF19-472C-9DC5-7924FCA8D820}"/>
+                <a16:creationId xmlns:a16="http://schemas.microsoft.com/office/drawing/2014/main" id="{40386EE1-A2C1-4D3A-9B04-98B5F50A5753}"/>
               </a:ext>
             </a:extLst>
           </p:cNvPr>
@@ -5860,7 +5860,7 @@
           <p:cNvPr id="11" name="s6-takeaway-rule">
             <a:extLst xmlns:a="http://schemas.openxmlformats.org/drawingml/2006/main">
               <a:ext uri="{FF2B5EF4-FFF2-40B4-BE49-F238E27FC236}">
-                <a16:creationId xmlns:a16="http://schemas.microsoft.com/office/drawing/2014/main" id="{42D440A2-440F-4ED9-A64E-993E825691C1}"/>
+                <a16:creationId xmlns:a16="http://schemas.microsoft.com/office/drawing/2014/main" id="{FA0DB614-E025-41BD-ADA6-F723E22BCD51}"/>
               </a:ext>
             </a:extLst>
           </p:cNvPr>
@@ -5893,7 +5893,7 @@
           <p:cNvPr id="12" name="s6-takeaway">
             <a:extLst xmlns:a="http://schemas.openxmlformats.org/drawingml/2006/main">
               <a:ext uri="{FF2B5EF4-FFF2-40B4-BE49-F238E27FC236}">
-                <a16:creationId xmlns:a16="http://schemas.microsoft.com/office/drawing/2014/main" id="{0C7144C8-E684-44C3-9C0D-15F0602A46DB}"/>
+                <a16:creationId xmlns:a16="http://schemas.microsoft.com/office/drawing/2014/main" id="{56A52A8A-3C58-4EE9-B74F-CCC7B484ABD0}"/>
               </a:ext>
             </a:extLst>
           </p:cNvPr>
@@ -5949,7 +5949,7 @@
     </p:spTree>
     <p:extLst>
       <p:ext uri="{BB962C8B-B14F-4D97-AF65-F5344CB8AC3E}">
-        <p14:creationId xmlns:p14="http://schemas.microsoft.com/office/powerpoint/2010/main" val="183621213"/>
+        <p14:creationId xmlns:p14="http://schemas.microsoft.com/office/powerpoint/2010/main" val="1495733274"/>
       </p:ext>
     </p:extLst>
   </p:cSld>
@@ -5980,7 +5980,7 @@
           <p:cNvPr id="1" name="s7-rule">
             <a:extLst xmlns:a="http://schemas.openxmlformats.org/drawingml/2006/main">
               <a:ext uri="{FF2B5EF4-FFF2-40B4-BE49-F238E27FC236}">
-                <a16:creationId xmlns:a16="http://schemas.microsoft.com/office/drawing/2014/main" id="{07FFFB71-C71C-4A2C-B427-980CDA68749D}"/>
+                <a16:creationId xmlns:a16="http://schemas.microsoft.com/office/drawing/2014/main" id="{87E38799-3A87-46DC-ACD6-2299BD7B07CB}"/>
               </a:ext>
             </a:extLst>
           </p:cNvPr>
@@ -6013,7 +6013,7 @@
           <p:cNvPr id="2" name="s7-eyebrow">
             <a:extLst xmlns:a="http://schemas.openxmlformats.org/drawingml/2006/main">
               <a:ext uri="{FF2B5EF4-FFF2-40B4-BE49-F238E27FC236}">
-                <a16:creationId xmlns:a16="http://schemas.microsoft.com/office/drawing/2014/main" id="{04C4AEE2-C47C-42D5-A349-098656948879}"/>
+                <a16:creationId xmlns:a16="http://schemas.microsoft.com/office/drawing/2014/main" id="{D02837EE-5A1A-4BA2-9499-2A2C051C7A94}"/>
               </a:ext>
             </a:extLst>
           </p:cNvPr>
@@ -6071,7 +6071,7 @@
           <p:cNvPr id="3" name="s7-title">
             <a:extLst xmlns:a="http://schemas.openxmlformats.org/drawingml/2006/main">
               <a:ext uri="{FF2B5EF4-FFF2-40B4-BE49-F238E27FC236}">
-                <a16:creationId xmlns:a16="http://schemas.microsoft.com/office/drawing/2014/main" id="{36244F98-0C2B-4C58-8410-408E97668824}"/>
+                <a16:creationId xmlns:a16="http://schemas.microsoft.com/office/drawing/2014/main" id="{5A8CC1A9-B434-40EF-81B7-3B752DC64A8A}"/>
               </a:ext>
             </a:extLst>
           </p:cNvPr>
@@ -6129,7 +6129,7 @@
           <p:cNvPr id="4" name="s7-footer">
             <a:extLst xmlns:a="http://schemas.openxmlformats.org/drawingml/2006/main">
               <a:ext uri="{FF2B5EF4-FFF2-40B4-BE49-F238E27FC236}">
-                <a16:creationId xmlns:a16="http://schemas.microsoft.com/office/drawing/2014/main" id="{24723CF0-EB65-4336-A4F7-AEF0FB2E1DD0}"/>
+                <a16:creationId xmlns:a16="http://schemas.microsoft.com/office/drawing/2014/main" id="{51A54B18-972A-4ADF-A35A-85B12AE679D1}"/>
               </a:ext>
             </a:extLst>
           </p:cNvPr>
@@ -6160,7 +6160,7 @@
           <p:cNvPr id="5" name="s7-identity">
             <a:extLst xmlns:a="http://schemas.openxmlformats.org/drawingml/2006/main">
               <a:ext uri="{FF2B5EF4-FFF2-40B4-BE49-F238E27FC236}">
-                <a16:creationId xmlns:a16="http://schemas.microsoft.com/office/drawing/2014/main" id="{6914A4F1-A8DB-4356-8F24-3A0C7CD73151}"/>
+                <a16:creationId xmlns:a16="http://schemas.microsoft.com/office/drawing/2014/main" id="{5BE1ECE8-75EE-408E-9017-6E58D6F49607}"/>
               </a:ext>
             </a:extLst>
           </p:cNvPr>
@@ -6218,7 +6218,7 @@
           <p:cNvPr id="6" name="case-title">
             <a:extLst xmlns:a="http://schemas.openxmlformats.org/drawingml/2006/main">
               <a:ext uri="{FF2B5EF4-FFF2-40B4-BE49-F238E27FC236}">
-                <a16:creationId xmlns:a16="http://schemas.microsoft.com/office/drawing/2014/main" id="{23AE1741-8459-4F35-A743-083E6CD3E095}"/>
+                <a16:creationId xmlns:a16="http://schemas.microsoft.com/office/drawing/2014/main" id="{1DF61BFA-8705-43B7-A9F4-42BC2235F96F}"/>
               </a:ext>
             </a:extLst>
           </p:cNvPr>
@@ -6282,7 +6282,7 @@
           <p:cNvPr id="7" name="case-row-0">
             <a:extLst xmlns:a="http://schemas.openxmlformats.org/drawingml/2006/main">
               <a:ext uri="{FF2B5EF4-FFF2-40B4-BE49-F238E27FC236}">
-                <a16:creationId xmlns:a16="http://schemas.microsoft.com/office/drawing/2014/main" id="{7A35132D-7734-42E4-ABAA-2035AE4B3C27}"/>
+                <a16:creationId xmlns:a16="http://schemas.microsoft.com/office/drawing/2014/main" id="{FC105D79-0307-4DF1-B94A-D5C449B7473E}"/>
               </a:ext>
             </a:extLst>
           </p:cNvPr>
@@ -6346,7 +6346,7 @@
           <p:cNvPr id="8" name="case-row-1">
             <a:extLst xmlns:a="http://schemas.openxmlformats.org/drawingml/2006/main">
               <a:ext uri="{FF2B5EF4-FFF2-40B4-BE49-F238E27FC236}">
-                <a16:creationId xmlns:a16="http://schemas.microsoft.com/office/drawing/2014/main" id="{AAFA1BC8-B181-40D1-A721-29D83AB3992C}"/>
+                <a16:creationId xmlns:a16="http://schemas.microsoft.com/office/drawing/2014/main" id="{9213B641-5540-4538-92FA-747AD9C79547}"/>
               </a:ext>
             </a:extLst>
           </p:cNvPr>
@@ -6410,7 +6410,7 @@
           <p:cNvPr id="9" name="case-row-2">
             <a:extLst xmlns:a="http://schemas.openxmlformats.org/drawingml/2006/main">
               <a:ext uri="{FF2B5EF4-FFF2-40B4-BE49-F238E27FC236}">
-                <a16:creationId xmlns:a16="http://schemas.microsoft.com/office/drawing/2014/main" id="{E62D2073-6C64-418B-9035-20C15B8A8DF9}"/>
+                <a16:creationId xmlns:a16="http://schemas.microsoft.com/office/drawing/2014/main" id="{96D4BA3C-96BD-4946-A9BA-A8F697645A9D}"/>
               </a:ext>
             </a:extLst>
           </p:cNvPr>
@@ -6474,7 +6474,7 @@
           <p:cNvPr id="10" name="case-row-3">
             <a:extLst xmlns:a="http://schemas.openxmlformats.org/drawingml/2006/main">
               <a:ext uri="{FF2B5EF4-FFF2-40B4-BE49-F238E27FC236}">
-                <a16:creationId xmlns:a16="http://schemas.microsoft.com/office/drawing/2014/main" id="{56EB6C8A-802E-482E-A3EF-9FE4EA7ACEC8}"/>
+                <a16:creationId xmlns:a16="http://schemas.microsoft.com/office/drawing/2014/main" id="{6DAB74BA-2386-4A6F-9BAE-618C96FD5DB2}"/>
               </a:ext>
             </a:extLst>
           </p:cNvPr>
@@ -6538,7 +6538,7 @@
           <p:cNvPr id="11" name="case-row-4">
             <a:extLst xmlns:a="http://schemas.openxmlformats.org/drawingml/2006/main">
               <a:ext uri="{FF2B5EF4-FFF2-40B4-BE49-F238E27FC236}">
-                <a16:creationId xmlns:a16="http://schemas.microsoft.com/office/drawing/2014/main" id="{B49F582E-58C8-467B-8891-2BFC41246012}"/>
+                <a16:creationId xmlns:a16="http://schemas.microsoft.com/office/drawing/2014/main" id="{88C88A4C-869F-4880-A872-147CFAF7DCCC}"/>
               </a:ext>
             </a:extLst>
           </p:cNvPr>
@@ -6602,7 +6602,7 @@
           <p:cNvPr id="12" name="s7-takeaway-rule">
             <a:extLst xmlns:a="http://schemas.openxmlformats.org/drawingml/2006/main">
               <a:ext uri="{FF2B5EF4-FFF2-40B4-BE49-F238E27FC236}">
-                <a16:creationId xmlns:a16="http://schemas.microsoft.com/office/drawing/2014/main" id="{725C2918-AE48-4B8B-BE01-B38E1FECBE21}"/>
+                <a16:creationId xmlns:a16="http://schemas.microsoft.com/office/drawing/2014/main" id="{E87612DA-BFD1-45BC-AAB6-27EA42EDCBCB}"/>
               </a:ext>
             </a:extLst>
           </p:cNvPr>
@@ -6635,7 +6635,7 @@
           <p:cNvPr id="13" name="s7-takeaway">
             <a:extLst xmlns:a="http://schemas.openxmlformats.org/drawingml/2006/main">
               <a:ext uri="{FF2B5EF4-FFF2-40B4-BE49-F238E27FC236}">
-                <a16:creationId xmlns:a16="http://schemas.microsoft.com/office/drawing/2014/main" id="{4586286E-55D0-455A-BE6F-0C054D5302DE}"/>
+                <a16:creationId xmlns:a16="http://schemas.microsoft.com/office/drawing/2014/main" id="{00401140-2DC5-40D3-8901-93BB336EB6F9}"/>
               </a:ext>
             </a:extLst>
           </p:cNvPr>
@@ -6691,7 +6691,7 @@
     </p:spTree>
     <p:extLst>
       <p:ext uri="{BB962C8B-B14F-4D97-AF65-F5344CB8AC3E}">
-        <p14:creationId xmlns:p14="http://schemas.microsoft.com/office/powerpoint/2010/main" val="1395464210"/>
+        <p14:creationId xmlns:p14="http://schemas.microsoft.com/office/powerpoint/2010/main" val="1953020542"/>
       </p:ext>
     </p:extLst>
   </p:cSld>
@@ -6722,7 +6722,7 @@
           <p:cNvPr id="1" name="s8-rule">
             <a:extLst xmlns:a="http://schemas.openxmlformats.org/drawingml/2006/main">
               <a:ext uri="{FF2B5EF4-FFF2-40B4-BE49-F238E27FC236}">
-                <a16:creationId xmlns:a16="http://schemas.microsoft.com/office/drawing/2014/main" id="{3E9F0FFD-88BF-4CC2-A288-CD40DFFAD26F}"/>
+                <a16:creationId xmlns:a16="http://schemas.microsoft.com/office/drawing/2014/main" id="{1F19C2D9-3873-43FD-AE9C-B186937218F6}"/>
               </a:ext>
             </a:extLst>
           </p:cNvPr>
@@ -6755,7 +6755,7 @@
           <p:cNvPr id="2" name="s8-eyebrow">
             <a:extLst xmlns:a="http://schemas.openxmlformats.org/drawingml/2006/main">
               <a:ext uri="{FF2B5EF4-FFF2-40B4-BE49-F238E27FC236}">
-                <a16:creationId xmlns:a16="http://schemas.microsoft.com/office/drawing/2014/main" id="{957EC1B7-E9A2-4137-A29D-63809FF82F4D}"/>
+                <a16:creationId xmlns:a16="http://schemas.microsoft.com/office/drawing/2014/main" id="{DCFB76B1-BF39-4771-BEDB-C71826912A23}"/>
               </a:ext>
             </a:extLst>
           </p:cNvPr>
@@ -6813,7 +6813,7 @@
           <p:cNvPr id="3" name="s8-title">
             <a:extLst xmlns:a="http://schemas.openxmlformats.org/drawingml/2006/main">
               <a:ext uri="{FF2B5EF4-FFF2-40B4-BE49-F238E27FC236}">
-                <a16:creationId xmlns:a16="http://schemas.microsoft.com/office/drawing/2014/main" id="{C7DB9D7B-1AFC-4285-8CED-145CFADA5617}"/>
+                <a16:creationId xmlns:a16="http://schemas.microsoft.com/office/drawing/2014/main" id="{1A3187AF-8870-40C9-8270-3617E0E492D0}"/>
               </a:ext>
             </a:extLst>
           </p:cNvPr>
@@ -6871,7 +6871,7 @@
           <p:cNvPr id="4" name="s8-footer">
             <a:extLst xmlns:a="http://schemas.openxmlformats.org/drawingml/2006/main">
               <a:ext uri="{FF2B5EF4-FFF2-40B4-BE49-F238E27FC236}">
-                <a16:creationId xmlns:a16="http://schemas.microsoft.com/office/drawing/2014/main" id="{1AE69E4F-B8E2-42DF-9408-4D099F822CAE}"/>
+                <a16:creationId xmlns:a16="http://schemas.microsoft.com/office/drawing/2014/main" id="{F6E77CD2-77BD-4A6B-8265-424FF736D904}"/>
               </a:ext>
             </a:extLst>
           </p:cNvPr>
@@ -6902,7 +6902,7 @@
           <p:cNvPr id="5" name="s8-identity">
             <a:extLst xmlns:a="http://schemas.openxmlformats.org/drawingml/2006/main">
               <a:ext uri="{FF2B5EF4-FFF2-40B4-BE49-F238E27FC236}">
-                <a16:creationId xmlns:a16="http://schemas.microsoft.com/office/drawing/2014/main" id="{0524A468-8230-4B23-8046-6618AE3802FC}"/>
+                <a16:creationId xmlns:a16="http://schemas.microsoft.com/office/drawing/2014/main" id="{61F8E414-3BCD-4D0F-A263-391016CD27BC}"/>
               </a:ext>
             </a:extLst>
           </p:cNvPr>
@@ -6960,7 +6960,7 @@
           <p:cNvPr id="6" name="practice-circle-0">
             <a:extLst xmlns:a="http://schemas.openxmlformats.org/drawingml/2006/main">
               <a:ext uri="{FF2B5EF4-FFF2-40B4-BE49-F238E27FC236}">
-                <a16:creationId xmlns:a16="http://schemas.microsoft.com/office/drawing/2014/main" id="{25A2A47A-4F03-41E5-A9F1-C6BEA8FD30EC}"/>
+                <a16:creationId xmlns:a16="http://schemas.microsoft.com/office/drawing/2014/main" id="{828EE643-F63C-4C94-8451-A5C97BF17E4D}"/>
               </a:ext>
             </a:extLst>
           </p:cNvPr>
@@ -6993,7 +6993,7 @@
           <p:cNvPr id="7" name="practice-number-0">
             <a:extLst xmlns:a="http://schemas.openxmlformats.org/drawingml/2006/main">
               <a:ext uri="{FF2B5EF4-FFF2-40B4-BE49-F238E27FC236}">
-                <a16:creationId xmlns:a16="http://schemas.microsoft.com/office/drawing/2014/main" id="{0D49C364-4424-4A85-8717-4B765F64AE63}"/>
+                <a16:creationId xmlns:a16="http://schemas.microsoft.com/office/drawing/2014/main" id="{6D88699D-67AA-4D74-9B2C-A6F6138110D7}"/>
               </a:ext>
             </a:extLst>
           </p:cNvPr>
@@ -7051,7 +7051,7 @@
           <p:cNvPr id="8" name="practice-item-0">
             <a:extLst xmlns:a="http://schemas.openxmlformats.org/drawingml/2006/main">
               <a:ext uri="{FF2B5EF4-FFF2-40B4-BE49-F238E27FC236}">
-                <a16:creationId xmlns:a16="http://schemas.microsoft.com/office/drawing/2014/main" id="{3CB6BF70-F28C-428B-88C6-EDF9B6C2605E}"/>
+                <a16:creationId xmlns:a16="http://schemas.microsoft.com/office/drawing/2014/main" id="{C0F3CE74-DE85-4120-89B5-FCF218AEC763}"/>
               </a:ext>
             </a:extLst>
           </p:cNvPr>
@@ -7115,7 +7115,7 @@
           <p:cNvPr id="9" name="practice-connector-0">
             <a:extLst xmlns:a="http://schemas.openxmlformats.org/drawingml/2006/main">
               <a:ext uri="{FF2B5EF4-FFF2-40B4-BE49-F238E27FC236}">
-                <a16:creationId xmlns:a16="http://schemas.microsoft.com/office/drawing/2014/main" id="{9D77B05F-AA0B-4622-86F5-A00D4EF27016}"/>
+                <a16:creationId xmlns:a16="http://schemas.microsoft.com/office/drawing/2014/main" id="{DCF0C082-04D6-43C2-BF64-FF478ADA2563}"/>
               </a:ext>
             </a:extLst>
           </p:cNvPr>
@@ -7146,7 +7146,7 @@
           <p:cNvPr id="10" name="practice-circle-1">
             <a:extLst xmlns:a="http://schemas.openxmlformats.org/drawingml/2006/main">
               <a:ext uri="{FF2B5EF4-FFF2-40B4-BE49-F238E27FC236}">
-                <a16:creationId xmlns:a16="http://schemas.microsoft.com/office/drawing/2014/main" id="{616C796C-7689-49EB-9C71-6C9A676ED05C}"/>
+                <a16:creationId xmlns:a16="http://schemas.microsoft.com/office/drawing/2014/main" id="{E77778EE-614C-49D8-9CC9-B3F03E8DA16A}"/>
               </a:ext>
             </a:extLst>
           </p:cNvPr>
@@ -7179,7 +7179,7 @@
           <p:cNvPr id="11" name="practice-number-1">
             <a:extLst xmlns:a="http://schemas.openxmlformats.org/drawingml/2006/main">
               <a:ext uri="{FF2B5EF4-FFF2-40B4-BE49-F238E27FC236}">
-                <a16:creationId xmlns:a16="http://schemas.microsoft.com/office/drawing/2014/main" id="{C2327FA2-37A6-4F8A-82B5-B742EB05DD06}"/>
+                <a16:creationId xmlns:a16="http://schemas.microsoft.com/office/drawing/2014/main" id="{F956B02E-37B0-485C-BC4E-B7119D20CF8E}"/>
               </a:ext>
             </a:extLst>
           </p:cNvPr>
@@ -7237,7 +7237,7 @@
           <p:cNvPr id="12" name="practice-item-1">
             <a:extLst xmlns:a="http://schemas.openxmlformats.org/drawingml/2006/main">
               <a:ext uri="{FF2B5EF4-FFF2-40B4-BE49-F238E27FC236}">
-                <a16:creationId xmlns:a16="http://schemas.microsoft.com/office/drawing/2014/main" id="{39F4887B-D775-4262-A6C8-029F485E7F6B}"/>
+                <a16:creationId xmlns:a16="http://schemas.microsoft.com/office/drawing/2014/main" id="{253621A3-B84D-4AA0-AEF3-D486EA2B58CF}"/>
               </a:ext>
             </a:extLst>
           </p:cNvPr>
@@ -7301,7 +7301,7 @@
           <p:cNvPr id="13" name="practice-connector-1">
             <a:extLst xmlns:a="http://schemas.openxmlformats.org/drawingml/2006/main">
               <a:ext uri="{FF2B5EF4-FFF2-40B4-BE49-F238E27FC236}">
-                <a16:creationId xmlns:a16="http://schemas.microsoft.com/office/drawing/2014/main" id="{597DE0C5-19BE-4255-89B7-B6C0D34271AA}"/>
+                <a16:creationId xmlns:a16="http://schemas.microsoft.com/office/drawing/2014/main" id="{66564A83-F7D2-4FE0-BBA0-935FCFFDE8CD}"/>
               </a:ext>
             </a:extLst>
           </p:cNvPr>
@@ -7332,7 +7332,7 @@
           <p:cNvPr id="14" name="practice-circle-2">
             <a:extLst xmlns:a="http://schemas.openxmlformats.org/drawingml/2006/main">
               <a:ext uri="{FF2B5EF4-FFF2-40B4-BE49-F238E27FC236}">
-                <a16:creationId xmlns:a16="http://schemas.microsoft.com/office/drawing/2014/main" id="{D1BC3429-A118-410C-86B4-F3A660425917}"/>
+                <a16:creationId xmlns:a16="http://schemas.microsoft.com/office/drawing/2014/main" id="{57DCEA82-365F-409A-B45E-6AACF5B29136}"/>
               </a:ext>
             </a:extLst>
           </p:cNvPr>
@@ -7365,7 +7365,7 @@
           <p:cNvPr id="15" name="practice-number-2">
             <a:extLst xmlns:a="http://schemas.openxmlformats.org/drawingml/2006/main">
               <a:ext uri="{FF2B5EF4-FFF2-40B4-BE49-F238E27FC236}">
-                <a16:creationId xmlns:a16="http://schemas.microsoft.com/office/drawing/2014/main" id="{FB84973C-DA4E-4F2E-A370-9650231DE1EF}"/>
+                <a16:creationId xmlns:a16="http://schemas.microsoft.com/office/drawing/2014/main" id="{58715AFA-9CC3-45F8-A00A-FECD80D0268B}"/>
               </a:ext>
             </a:extLst>
           </p:cNvPr>
@@ -7423,7 +7423,7 @@
           <p:cNvPr id="16" name="practice-item-2">
             <a:extLst xmlns:a="http://schemas.openxmlformats.org/drawingml/2006/main">
               <a:ext uri="{FF2B5EF4-FFF2-40B4-BE49-F238E27FC236}">
-                <a16:creationId xmlns:a16="http://schemas.microsoft.com/office/drawing/2014/main" id="{513C3AF3-FAC3-4DF0-8A2E-746C8BC7174E}"/>
+                <a16:creationId xmlns:a16="http://schemas.microsoft.com/office/drawing/2014/main" id="{BEC2DFB0-D76E-40C3-A516-F43399F0DF84}"/>
               </a:ext>
             </a:extLst>
           </p:cNvPr>
@@ -7485,7 +7485,7 @@
     </p:spTree>
     <p:extLst>
       <p:ext uri="{BB962C8B-B14F-4D97-AF65-F5344CB8AC3E}">
-        <p14:creationId xmlns:p14="http://schemas.microsoft.com/office/powerpoint/2010/main" val="1851192018"/>
+        <p14:creationId xmlns:p14="http://schemas.microsoft.com/office/powerpoint/2010/main" val="494647819"/>
       </p:ext>
     </p:extLst>
   </p:cSld>
@@ -7516,7 +7516,7 @@
           <p:cNvPr id="1" name="s9-rule">
             <a:extLst xmlns:a="http://schemas.openxmlformats.org/drawingml/2006/main">
               <a:ext uri="{FF2B5EF4-FFF2-40B4-BE49-F238E27FC236}">
-                <a16:creationId xmlns:a16="http://schemas.microsoft.com/office/drawing/2014/main" id="{724482B9-1C6E-4CE0-8CC3-FD838D30F0D3}"/>
+                <a16:creationId xmlns:a16="http://schemas.microsoft.com/office/drawing/2014/main" id="{A4476B15-C4D2-431D-AD15-4FCA5E2F6162}"/>
               </a:ext>
             </a:extLst>
           </p:cNvPr>
@@ -7549,7 +7549,7 @@
           <p:cNvPr id="2" name="s9-eyebrow">
             <a:extLst xmlns:a="http://schemas.openxmlformats.org/drawingml/2006/main">
               <a:ext uri="{FF2B5EF4-FFF2-40B4-BE49-F238E27FC236}">
-                <a16:creationId xmlns:a16="http://schemas.microsoft.com/office/drawing/2014/main" id="{8969CA11-D264-44EE-9D5D-19000A20FAB1}"/>
+                <a16:creationId xmlns:a16="http://schemas.microsoft.com/office/drawing/2014/main" id="{71B4B8FA-DE1A-4060-8989-4D37E64714D4}"/>
               </a:ext>
             </a:extLst>
           </p:cNvPr>
@@ -7607,7 +7607,7 @@
           <p:cNvPr id="3" name="s9-title">
             <a:extLst xmlns:a="http://schemas.openxmlformats.org/drawingml/2006/main">
               <a:ext uri="{FF2B5EF4-FFF2-40B4-BE49-F238E27FC236}">
-                <a16:creationId xmlns:a16="http://schemas.microsoft.com/office/drawing/2014/main" id="{53730B20-FF6D-496A-8FE5-D25CC1E9144E}"/>
+                <a16:creationId xmlns:a16="http://schemas.microsoft.com/office/drawing/2014/main" id="{9CC1A77F-BB89-4AFF-BBD4-28F38E0AD18F}"/>
               </a:ext>
             </a:extLst>
           </p:cNvPr>
@@ -7665,7 +7665,7 @@
           <p:cNvPr id="4" name="s9-footer">
             <a:extLst xmlns:a="http://schemas.openxmlformats.org/drawingml/2006/main">
               <a:ext uri="{FF2B5EF4-FFF2-40B4-BE49-F238E27FC236}">
-                <a16:creationId xmlns:a16="http://schemas.microsoft.com/office/drawing/2014/main" id="{A6B24DC2-6690-440F-8E82-063A71426899}"/>
+                <a16:creationId xmlns:a16="http://schemas.microsoft.com/office/drawing/2014/main" id="{2C0C1BCA-C5F0-4812-8CF8-8F57B8137D21}"/>
               </a:ext>
             </a:extLst>
           </p:cNvPr>
@@ -7696,7 +7696,7 @@
           <p:cNvPr id="5" name="s9-identity">
             <a:extLst xmlns:a="http://schemas.openxmlformats.org/drawingml/2006/main">
               <a:ext uri="{FF2B5EF4-FFF2-40B4-BE49-F238E27FC236}">
-                <a16:creationId xmlns:a16="http://schemas.microsoft.com/office/drawing/2014/main" id="{113F5B24-7BF0-4ED0-9F72-794F7DDCC955}"/>
+                <a16:creationId xmlns:a16="http://schemas.microsoft.com/office/drawing/2014/main" id="{F4B479DD-72BA-4D0E-AD36-A42B1EDD3F54}"/>
               </a:ext>
             </a:extLst>
           </p:cNvPr>
@@ -7754,7 +7754,7 @@
           <p:cNvPr id="6" name="recap-circle-0">
             <a:extLst xmlns:a="http://schemas.openxmlformats.org/drawingml/2006/main">
               <a:ext uri="{FF2B5EF4-FFF2-40B4-BE49-F238E27FC236}">
-                <a16:creationId xmlns:a16="http://schemas.microsoft.com/office/drawing/2014/main" id="{3473E831-E918-453C-A1D5-FC502E5C1E18}"/>
+                <a16:creationId xmlns:a16="http://schemas.microsoft.com/office/drawing/2014/main" id="{D6C294E1-AEE0-4915-A44D-5FCCFA7E1E6D}"/>
               </a:ext>
             </a:extLst>
           </p:cNvPr>
@@ -7787,7 +7787,7 @@
           <p:cNvPr id="7" name="recap-number-0">
             <a:extLst xmlns:a="http://schemas.openxmlformats.org/drawingml/2006/main">
               <a:ext uri="{FF2B5EF4-FFF2-40B4-BE49-F238E27FC236}">
-                <a16:creationId xmlns:a16="http://schemas.microsoft.com/office/drawing/2014/main" id="{A8C33982-204B-4519-BC37-C9A891BCA033}"/>
+                <a16:creationId xmlns:a16="http://schemas.microsoft.com/office/drawing/2014/main" id="{4CEB8F23-3731-4CB6-B7BF-E3BE196B8C19}"/>
               </a:ext>
             </a:extLst>
           </p:cNvPr>
@@ -7845,7 +7845,7 @@
           <p:cNvPr id="8" name="recap-item-0">
             <a:extLst xmlns:a="http://schemas.openxmlformats.org/drawingml/2006/main">
               <a:ext uri="{FF2B5EF4-FFF2-40B4-BE49-F238E27FC236}">
-                <a16:creationId xmlns:a16="http://schemas.microsoft.com/office/drawing/2014/main" id="{EC8C7AF0-C1B6-4E1F-BA06-376FFBA0BF6D}"/>
+                <a16:creationId xmlns:a16="http://schemas.microsoft.com/office/drawing/2014/main" id="{4F7384C3-D961-4C53-BAB6-5513FC76C186}"/>
               </a:ext>
             </a:extLst>
           </p:cNvPr>
@@ -7909,7 +7909,7 @@
           <p:cNvPr id="9" name="recap-connector-0">
             <a:extLst xmlns:a="http://schemas.openxmlformats.org/drawingml/2006/main">
               <a:ext uri="{FF2B5EF4-FFF2-40B4-BE49-F238E27FC236}">
-                <a16:creationId xmlns:a16="http://schemas.microsoft.com/office/drawing/2014/main" id="{4B66B44A-A263-4A90-A473-990BEB5A66B1}"/>
+                <a16:creationId xmlns:a16="http://schemas.microsoft.com/office/drawing/2014/main" id="{2B0DE6FE-72A0-4525-92BB-A2D35CD854E2}"/>
               </a:ext>
             </a:extLst>
           </p:cNvPr>
@@ -7940,7 +7940,7 @@
           <p:cNvPr id="10" name="recap-circle-1">
             <a:extLst xmlns:a="http://schemas.openxmlformats.org/drawingml/2006/main">
               <a:ext uri="{FF2B5EF4-FFF2-40B4-BE49-F238E27FC236}">
-                <a16:creationId xmlns:a16="http://schemas.microsoft.com/office/drawing/2014/main" id="{2382A64E-AB41-4F8D-BF13-3625F20366D4}"/>
+                <a16:creationId xmlns:a16="http://schemas.microsoft.com/office/drawing/2014/main" id="{ADA0DCAB-A81C-4201-978D-1BFA3BE62A3A}"/>
               </a:ext>
             </a:extLst>
           </p:cNvPr>
@@ -7973,7 +7973,7 @@
           <p:cNvPr id="11" name="recap-number-1">
             <a:extLst xmlns:a="http://schemas.openxmlformats.org/drawingml/2006/main">
               <a:ext uri="{FF2B5EF4-FFF2-40B4-BE49-F238E27FC236}">
-                <a16:creationId xmlns:a16="http://schemas.microsoft.com/office/drawing/2014/main" id="{95AECD59-1248-4C67-A238-C10B9D019601}"/>
+                <a16:creationId xmlns:a16="http://schemas.microsoft.com/office/drawing/2014/main" id="{4E6025FF-6433-42F6-BD29-F578B75642F3}"/>
               </a:ext>
             </a:extLst>
           </p:cNvPr>
@@ -8031,7 +8031,7 @@
           <p:cNvPr id="12" name="recap-item-1">
             <a:extLst xmlns:a="http://schemas.openxmlformats.org/drawingml/2006/main">
               <a:ext uri="{FF2B5EF4-FFF2-40B4-BE49-F238E27FC236}">
-                <a16:creationId xmlns:a16="http://schemas.microsoft.com/office/drawing/2014/main" id="{72CBBDBC-FFC8-4A94-A7E2-D6C6EAB82A4C}"/>
+                <a16:creationId xmlns:a16="http://schemas.microsoft.com/office/drawing/2014/main" id="{0D5F3804-75C6-427D-9556-5AE738125C88}"/>
               </a:ext>
             </a:extLst>
           </p:cNvPr>
@@ -8095,7 +8095,7 @@
           <p:cNvPr id="13" name="recap-connector-1">
             <a:extLst xmlns:a="http://schemas.openxmlformats.org/drawingml/2006/main">
               <a:ext uri="{FF2B5EF4-FFF2-40B4-BE49-F238E27FC236}">
-                <a16:creationId xmlns:a16="http://schemas.microsoft.com/office/drawing/2014/main" id="{EAEE6A9F-A358-406B-A1F1-D3C15E188237}"/>
+                <a16:creationId xmlns:a16="http://schemas.microsoft.com/office/drawing/2014/main" id="{F766FF13-5532-48C0-BB45-E71A8331E955}"/>
               </a:ext>
             </a:extLst>
           </p:cNvPr>
@@ -8126,7 +8126,7 @@
           <p:cNvPr id="14" name="recap-circle-2">
             <a:extLst xmlns:a="http://schemas.openxmlformats.org/drawingml/2006/main">
               <a:ext uri="{FF2B5EF4-FFF2-40B4-BE49-F238E27FC236}">
-                <a16:creationId xmlns:a16="http://schemas.microsoft.com/office/drawing/2014/main" id="{17AC50FF-9E75-48B8-9DA6-65B0D8368767}"/>
+                <a16:creationId xmlns:a16="http://schemas.microsoft.com/office/drawing/2014/main" id="{6EC75447-256B-4C44-9883-BA51BDE06D0F}"/>
               </a:ext>
             </a:extLst>
           </p:cNvPr>
@@ -8159,7 +8159,7 @@
           <p:cNvPr id="15" name="recap-number-2">
             <a:extLst xmlns:a="http://schemas.openxmlformats.org/drawingml/2006/main">
               <a:ext uri="{FF2B5EF4-FFF2-40B4-BE49-F238E27FC236}">
-                <a16:creationId xmlns:a16="http://schemas.microsoft.com/office/drawing/2014/main" id="{4B73D364-6FA7-432C-98BE-432BF6B95F2F}"/>
+                <a16:creationId xmlns:a16="http://schemas.microsoft.com/office/drawing/2014/main" id="{8E12DFEF-1DC1-439B-8000-629057F76407}"/>
               </a:ext>
             </a:extLst>
           </p:cNvPr>
@@ -8217,7 +8217,7 @@
           <p:cNvPr id="16" name="recap-item-2">
             <a:extLst xmlns:a="http://schemas.openxmlformats.org/drawingml/2006/main">
               <a:ext uri="{FF2B5EF4-FFF2-40B4-BE49-F238E27FC236}">
-                <a16:creationId xmlns:a16="http://schemas.microsoft.com/office/drawing/2014/main" id="{385E6060-25C8-4E52-B848-26FE04447A16}"/>
+                <a16:creationId xmlns:a16="http://schemas.microsoft.com/office/drawing/2014/main" id="{CA135A92-B9DB-492A-B628-D97E67332EB3}"/>
               </a:ext>
             </a:extLst>
           </p:cNvPr>
@@ -8279,7 +8279,7 @@
     </p:spTree>
     <p:extLst>
       <p:ext uri="{BB962C8B-B14F-4D97-AF65-F5344CB8AC3E}">
-        <p14:creationId xmlns:p14="http://schemas.microsoft.com/office/powerpoint/2010/main" val="910634053"/>
+        <p14:creationId xmlns:p14="http://schemas.microsoft.com/office/powerpoint/2010/main" val="724413451"/>
       </p:ext>
     </p:extLst>
   </p:cSld>

--- a/docs/public/course-assets/course-pptx/ov-005.pptx
+++ b/docs/public/course-assets/course-pptx/ov-005.pptx
@@ -2,22 +2,22 @@
 <file path=ppt/presentation.xml><?xml version="1.0" encoding="utf-8"?>
 <p:presentation xmlns:p="http://schemas.openxmlformats.org/presentationml/2006/main">
   <p:sldMasterIdLst>
-    <p:sldMasterId xmlns:r="http://schemas.openxmlformats.org/officeDocument/2006/relationships" id="2147483648" r:id="R0226e68ed053418a"/>
+    <p:sldMasterId xmlns:r="http://schemas.openxmlformats.org/officeDocument/2006/relationships" id="2147483648" r:id="Rb7fd3b795e4e4f10"/>
   </p:sldMasterIdLst>
   <p:notesMasterIdLst>
-    <p:notesMasterId xmlns:r="http://schemas.openxmlformats.org/officeDocument/2006/relationships" r:id="Ra148da1f42974698"/>
+    <p:notesMasterId xmlns:r="http://schemas.openxmlformats.org/officeDocument/2006/relationships" r:id="R699d572a04cb4a35"/>
   </p:notesMasterIdLst>
   <p:sldIdLst>
-    <p:sldId xmlns:r="http://schemas.openxmlformats.org/officeDocument/2006/relationships" id="256" r:id="Rf2e79468e76840c2"/>
-    <p:sldId xmlns:r="http://schemas.openxmlformats.org/officeDocument/2006/relationships" id="257" r:id="Ra8918ea5c59a4485"/>
-    <p:sldId xmlns:r="http://schemas.openxmlformats.org/officeDocument/2006/relationships" id="258" r:id="Rc988cf61c8404c73"/>
-    <p:sldId xmlns:r="http://schemas.openxmlformats.org/officeDocument/2006/relationships" id="259" r:id="R0e30dfa8c5704ba7"/>
-    <p:sldId xmlns:r="http://schemas.openxmlformats.org/officeDocument/2006/relationships" id="260" r:id="R8127cc3b61db48d8"/>
-    <p:sldId xmlns:r="http://schemas.openxmlformats.org/officeDocument/2006/relationships" id="261" r:id="Ra228c109793e4062"/>
-    <p:sldId xmlns:r="http://schemas.openxmlformats.org/officeDocument/2006/relationships" id="262" r:id="Rc44b00d302604e68"/>
-    <p:sldId xmlns:r="http://schemas.openxmlformats.org/officeDocument/2006/relationships" id="263" r:id="R01749f8ddde647d7"/>
-    <p:sldId xmlns:r="http://schemas.openxmlformats.org/officeDocument/2006/relationships" id="264" r:id="Rcddbf98646c94b4c"/>
-    <p:sldId xmlns:r="http://schemas.openxmlformats.org/officeDocument/2006/relationships" id="265" r:id="R203dd84219c94b58"/>
+    <p:sldId xmlns:r="http://schemas.openxmlformats.org/officeDocument/2006/relationships" id="256" r:id="R071ef27f37a24836"/>
+    <p:sldId xmlns:r="http://schemas.openxmlformats.org/officeDocument/2006/relationships" id="257" r:id="Rcaa673243a9649e1"/>
+    <p:sldId xmlns:r="http://schemas.openxmlformats.org/officeDocument/2006/relationships" id="258" r:id="Rced189c7f7014988"/>
+    <p:sldId xmlns:r="http://schemas.openxmlformats.org/officeDocument/2006/relationships" id="259" r:id="R306aeb7fdda0464e"/>
+    <p:sldId xmlns:r="http://schemas.openxmlformats.org/officeDocument/2006/relationships" id="260" r:id="R34b826939043416c"/>
+    <p:sldId xmlns:r="http://schemas.openxmlformats.org/officeDocument/2006/relationships" id="261" r:id="R41735385c51240ca"/>
+    <p:sldId xmlns:r="http://schemas.openxmlformats.org/officeDocument/2006/relationships" id="262" r:id="R498669214d584d39"/>
+    <p:sldId xmlns:r="http://schemas.openxmlformats.org/officeDocument/2006/relationships" id="263" r:id="R3e746f1ab0ad48b4"/>
+    <p:sldId xmlns:r="http://schemas.openxmlformats.org/officeDocument/2006/relationships" id="264" r:id="Ra49cafb3a39148a7"/>
+    <p:sldId xmlns:r="http://schemas.openxmlformats.org/officeDocument/2006/relationships" id="265" r:id="Re15358ccbde34897"/>
   </p:sldIdLst>
   <p:sldSz cx="12192000" cy="6858000"/>
   <p:notesSz cx="6858000" cy="9144000"/>
@@ -1204,7 +1204,7 @@
   </p:cSld>
   <p:clrMap bg1="lt1" tx1="dk1" bg2="lt2" tx2="dk2" accent1="accent1" accent2="accent2" accent3="accent3" accent4="accent4" accent5="accent5" accent6="accent6" hlink="hlink" folHlink="folHlink"/>
   <p:sldLayoutIdLst>
-    <p:sldLayoutId xmlns:r="http://schemas.openxmlformats.org/officeDocument/2006/relationships" id="2147483649" r:id="R254872adb017463f"/>
+    <p:sldLayoutId xmlns:r="http://schemas.openxmlformats.org/officeDocument/2006/relationships" id="2147483649" r:id="R22dfb63dbfbb49cc"/>
   </p:sldLayoutIdLst>
   <p:txStyles>
     <p:titleStyle>
@@ -1755,7 +1755,7 @@
           <p:cNvPr id="1" name="cover-rule">
             <a:extLst xmlns:a="http://schemas.openxmlformats.org/drawingml/2006/main">
               <a:ext uri="{FF2B5EF4-FFF2-40B4-BE49-F238E27FC236}">
-                <a16:creationId xmlns:a16="http://schemas.microsoft.com/office/drawing/2014/main" id="{59DF30F4-DD3E-478F-82D0-5350D34E5742}"/>
+                <a16:creationId xmlns:a16="http://schemas.microsoft.com/office/drawing/2014/main" id="{7AA086BE-A844-4B88-A7D1-2F2BA21935B8}"/>
               </a:ext>
             </a:extLst>
           </p:cNvPr>
@@ -1788,7 +1788,7 @@
           <p:cNvPr id="2" name="cover-ring-1">
             <a:extLst xmlns:a="http://schemas.openxmlformats.org/drawingml/2006/main">
               <a:ext uri="{FF2B5EF4-FFF2-40B4-BE49-F238E27FC236}">
-                <a16:creationId xmlns:a16="http://schemas.microsoft.com/office/drawing/2014/main" id="{E91B81FE-2436-4F80-8FFC-CA6C6CBD6533}"/>
+                <a16:creationId xmlns:a16="http://schemas.microsoft.com/office/drawing/2014/main" id="{76A26573-0792-43AB-9036-04D29047E203}"/>
               </a:ext>
             </a:extLst>
           </p:cNvPr>
@@ -1819,7 +1819,7 @@
           <p:cNvPr id="3" name="cover-ring-2">
             <a:extLst xmlns:a="http://schemas.openxmlformats.org/drawingml/2006/main">
               <a:ext uri="{FF2B5EF4-FFF2-40B4-BE49-F238E27FC236}">
-                <a16:creationId xmlns:a16="http://schemas.microsoft.com/office/drawing/2014/main" id="{04EC1060-14BB-47BA-B9E3-57AA00AB8981}"/>
+                <a16:creationId xmlns:a16="http://schemas.microsoft.com/office/drawing/2014/main" id="{F8A391AA-5C29-4C84-B432-A8FC7D36FD9B}"/>
               </a:ext>
             </a:extLst>
           </p:cNvPr>
@@ -1850,7 +1850,7 @@
           <p:cNvPr id="4" name="cover-core">
             <a:extLst xmlns:a="http://schemas.openxmlformats.org/drawingml/2006/main">
               <a:ext uri="{FF2B5EF4-FFF2-40B4-BE49-F238E27FC236}">
-                <a16:creationId xmlns:a16="http://schemas.microsoft.com/office/drawing/2014/main" id="{517F52D7-9B17-45AE-9930-224208C149E5}"/>
+                <a16:creationId xmlns:a16="http://schemas.microsoft.com/office/drawing/2014/main" id="{39DA0434-9A48-411A-9347-86E7E10DA694}"/>
               </a:ext>
             </a:extLst>
           </p:cNvPr>
@@ -1883,7 +1883,7 @@
           <p:cNvPr id="5" name="cover-line-1">
             <a:extLst xmlns:a="http://schemas.openxmlformats.org/drawingml/2006/main">
               <a:ext uri="{FF2B5EF4-FFF2-40B4-BE49-F238E27FC236}">
-                <a16:creationId xmlns:a16="http://schemas.microsoft.com/office/drawing/2014/main" id="{6B3A3565-BBB1-4C13-B216-EF568C75919A}"/>
+                <a16:creationId xmlns:a16="http://schemas.microsoft.com/office/drawing/2014/main" id="{CE62FC01-840E-451B-90BB-987533E1F620}"/>
               </a:ext>
             </a:extLst>
           </p:cNvPr>
@@ -1914,7 +1914,7 @@
           <p:cNvPr id="6" name="cover-line-2">
             <a:extLst xmlns:a="http://schemas.openxmlformats.org/drawingml/2006/main">
               <a:ext uri="{FF2B5EF4-FFF2-40B4-BE49-F238E27FC236}">
-                <a16:creationId xmlns:a16="http://schemas.microsoft.com/office/drawing/2014/main" id="{2CC3DA2C-9748-4985-9E06-C80354BD8C71}"/>
+                <a16:creationId xmlns:a16="http://schemas.microsoft.com/office/drawing/2014/main" id="{3482D514-6E68-4CA3-BD4F-C01DDB64EC9F}"/>
               </a:ext>
             </a:extLst>
           </p:cNvPr>
@@ -1945,7 +1945,7 @@
           <p:cNvPr id="7" name="cover-eyebrow">
             <a:extLst xmlns:a="http://schemas.openxmlformats.org/drawingml/2006/main">
               <a:ext uri="{FF2B5EF4-FFF2-40B4-BE49-F238E27FC236}">
-                <a16:creationId xmlns:a16="http://schemas.microsoft.com/office/drawing/2014/main" id="{3FB34B5F-37F6-492C-AA7C-DAC0502FC482}"/>
+                <a16:creationId xmlns:a16="http://schemas.microsoft.com/office/drawing/2014/main" id="{5A2E2B1D-C12F-42CE-A15F-91A554227BEF}"/>
               </a:ext>
             </a:extLst>
           </p:cNvPr>
@@ -2003,7 +2003,7 @@
           <p:cNvPr id="8" name="cover-title">
             <a:extLst xmlns:a="http://schemas.openxmlformats.org/drawingml/2006/main">
               <a:ext uri="{FF2B5EF4-FFF2-40B4-BE49-F238E27FC236}">
-                <a16:creationId xmlns:a16="http://schemas.microsoft.com/office/drawing/2014/main" id="{0E72360F-CE37-484D-B2CB-9D22B3EA8A0C}"/>
+                <a16:creationId xmlns:a16="http://schemas.microsoft.com/office/drawing/2014/main" id="{36983517-2091-4342-8379-41A3F7F79E06}"/>
               </a:ext>
             </a:extLst>
           </p:cNvPr>
@@ -2061,7 +2061,7 @@
           <p:cNvPr id="9" name="cover-subtitle">
             <a:extLst xmlns:a="http://schemas.openxmlformats.org/drawingml/2006/main">
               <a:ext uri="{FF2B5EF4-FFF2-40B4-BE49-F238E27FC236}">
-                <a16:creationId xmlns:a16="http://schemas.microsoft.com/office/drawing/2014/main" id="{244636AA-4E4A-455B-9E42-E71EADEFD935}"/>
+                <a16:creationId xmlns:a16="http://schemas.microsoft.com/office/drawing/2014/main" id="{2CEE1091-253C-498F-8761-173405FA2F15}"/>
               </a:ext>
             </a:extLst>
           </p:cNvPr>
@@ -2123,7 +2123,7 @@
           <p:cNvPr id="10" name="cover-lead">
             <a:extLst xmlns:a="http://schemas.openxmlformats.org/drawingml/2006/main">
               <a:ext uri="{FF2B5EF4-FFF2-40B4-BE49-F238E27FC236}">
-                <a16:creationId xmlns:a16="http://schemas.microsoft.com/office/drawing/2014/main" id="{F072B896-2286-45FB-BE25-216F4E7134C3}"/>
+                <a16:creationId xmlns:a16="http://schemas.microsoft.com/office/drawing/2014/main" id="{87C406EA-D516-4AED-B96D-CEDE1C0DFF71}"/>
               </a:ext>
             </a:extLst>
           </p:cNvPr>
@@ -2181,7 +2181,7 @@
           <p:cNvPr id="11" name="cover-course">
             <a:extLst xmlns:a="http://schemas.openxmlformats.org/drawingml/2006/main">
               <a:ext uri="{FF2B5EF4-FFF2-40B4-BE49-F238E27FC236}">
-                <a16:creationId xmlns:a16="http://schemas.microsoft.com/office/drawing/2014/main" id="{C35B5480-8A17-47A0-A99B-7FBA2539621D}"/>
+                <a16:creationId xmlns:a16="http://schemas.microsoft.com/office/drawing/2014/main" id="{4355099C-36D5-4C5F-BEC5-1CF6E8149996}"/>
               </a:ext>
             </a:extLst>
           </p:cNvPr>
@@ -2239,7 +2239,7 @@
           <p:cNvPr id="12" name="cover-id">
             <a:extLst xmlns:a="http://schemas.openxmlformats.org/drawingml/2006/main">
               <a:ext uri="{FF2B5EF4-FFF2-40B4-BE49-F238E27FC236}">
-                <a16:creationId xmlns:a16="http://schemas.microsoft.com/office/drawing/2014/main" id="{0B344DB8-9C71-4708-AB60-E51F20D3243D}"/>
+                <a16:creationId xmlns:a16="http://schemas.microsoft.com/office/drawing/2014/main" id="{A5FEB4F2-687D-47E3-AA36-FEAEC9590535}"/>
               </a:ext>
             </a:extLst>
           </p:cNvPr>
@@ -2295,7 +2295,7 @@
     </p:spTree>
     <p:extLst>
       <p:ext uri="{BB962C8B-B14F-4D97-AF65-F5344CB8AC3E}">
-        <p14:creationId xmlns:p14="http://schemas.microsoft.com/office/powerpoint/2010/main" val="1976111161"/>
+        <p14:creationId xmlns:p14="http://schemas.microsoft.com/office/powerpoint/2010/main" val="1788863553"/>
       </p:ext>
     </p:extLst>
   </p:cSld>
@@ -2326,7 +2326,7 @@
           <p:cNvPr id="1" name="s10-rule">
             <a:extLst xmlns:a="http://schemas.openxmlformats.org/drawingml/2006/main">
               <a:ext uri="{FF2B5EF4-FFF2-40B4-BE49-F238E27FC236}">
-                <a16:creationId xmlns:a16="http://schemas.microsoft.com/office/drawing/2014/main" id="{DE572ED0-BA15-483F-B1AA-E826A4C41E66}"/>
+                <a16:creationId xmlns:a16="http://schemas.microsoft.com/office/drawing/2014/main" id="{780D6348-F4E5-49C3-8910-C2C49A150484}"/>
               </a:ext>
             </a:extLst>
           </p:cNvPr>
@@ -2359,7 +2359,7 @@
           <p:cNvPr id="2" name="s10-eyebrow">
             <a:extLst xmlns:a="http://schemas.openxmlformats.org/drawingml/2006/main">
               <a:ext uri="{FF2B5EF4-FFF2-40B4-BE49-F238E27FC236}">
-                <a16:creationId xmlns:a16="http://schemas.microsoft.com/office/drawing/2014/main" id="{CC86C537-7214-4E8B-AD6F-87E09E297252}"/>
+                <a16:creationId xmlns:a16="http://schemas.microsoft.com/office/drawing/2014/main" id="{FD7B1BC3-4861-435B-A65E-0FE4628B86F9}"/>
               </a:ext>
             </a:extLst>
           </p:cNvPr>
@@ -2417,7 +2417,7 @@
           <p:cNvPr id="3" name="s10-title">
             <a:extLst xmlns:a="http://schemas.openxmlformats.org/drawingml/2006/main">
               <a:ext uri="{FF2B5EF4-FFF2-40B4-BE49-F238E27FC236}">
-                <a16:creationId xmlns:a16="http://schemas.microsoft.com/office/drawing/2014/main" id="{1F7475CF-AF52-4AE8-B958-72145ED032C5}"/>
+                <a16:creationId xmlns:a16="http://schemas.microsoft.com/office/drawing/2014/main" id="{A5A170C1-F613-40C2-8A4B-17B86B65A02E}"/>
               </a:ext>
             </a:extLst>
           </p:cNvPr>
@@ -2475,7 +2475,7 @@
           <p:cNvPr id="4" name="s10-footer">
             <a:extLst xmlns:a="http://schemas.openxmlformats.org/drawingml/2006/main">
               <a:ext uri="{FF2B5EF4-FFF2-40B4-BE49-F238E27FC236}">
-                <a16:creationId xmlns:a16="http://schemas.microsoft.com/office/drawing/2014/main" id="{1E92CAB4-D739-4B5F-B0B3-37EABA0B46D3}"/>
+                <a16:creationId xmlns:a16="http://schemas.microsoft.com/office/drawing/2014/main" id="{C180D526-A8CE-4530-8662-31ACDB504083}"/>
               </a:ext>
             </a:extLst>
           </p:cNvPr>
@@ -2506,7 +2506,7 @@
           <p:cNvPr id="5" name="s10-identity">
             <a:extLst xmlns:a="http://schemas.openxmlformats.org/drawingml/2006/main">
               <a:ext uri="{FF2B5EF4-FFF2-40B4-BE49-F238E27FC236}">
-                <a16:creationId xmlns:a16="http://schemas.microsoft.com/office/drawing/2014/main" id="{CCD2FE53-D521-44C7-AEA9-F026352F12A3}"/>
+                <a16:creationId xmlns:a16="http://schemas.microsoft.com/office/drawing/2014/main" id="{C0A0C344-48F5-46D9-9C6C-772394E7D7B1}"/>
               </a:ext>
             </a:extLst>
           </p:cNvPr>
@@ -2564,7 +2564,7 @@
           <p:cNvPr id="6" name="source-0">
             <a:extLst xmlns:a="http://schemas.openxmlformats.org/drawingml/2006/main">
               <a:ext uri="{FF2B5EF4-FFF2-40B4-BE49-F238E27FC236}">
-                <a16:creationId xmlns:a16="http://schemas.microsoft.com/office/drawing/2014/main" id="{DFF4A0D7-3A96-4E4B-A857-6A645F62BB8A}"/>
+                <a16:creationId xmlns:a16="http://schemas.microsoft.com/office/drawing/2014/main" id="{168D8E3E-19BF-444D-8E1F-28C29C341493}"/>
               </a:ext>
             </a:extLst>
           </p:cNvPr>
@@ -2628,7 +2628,7 @@
           <p:cNvPr id="7" name="source-1">
             <a:extLst xmlns:a="http://schemas.openxmlformats.org/drawingml/2006/main">
               <a:ext uri="{FF2B5EF4-FFF2-40B4-BE49-F238E27FC236}">
-                <a16:creationId xmlns:a16="http://schemas.microsoft.com/office/drawing/2014/main" id="{7406C126-4828-4F6F-A5C1-E60DEFEED685}"/>
+                <a16:creationId xmlns:a16="http://schemas.microsoft.com/office/drawing/2014/main" id="{FDB658D8-1BD0-4187-8B39-FF80C238AC3D}"/>
               </a:ext>
             </a:extLst>
           </p:cNvPr>
@@ -2692,7 +2692,7 @@
           <p:cNvPr id="8" name="s10-takeaway-rule">
             <a:extLst xmlns:a="http://schemas.openxmlformats.org/drawingml/2006/main">
               <a:ext uri="{FF2B5EF4-FFF2-40B4-BE49-F238E27FC236}">
-                <a16:creationId xmlns:a16="http://schemas.microsoft.com/office/drawing/2014/main" id="{FF8C14C0-F372-4E92-97F5-941AF9D1F958}"/>
+                <a16:creationId xmlns:a16="http://schemas.microsoft.com/office/drawing/2014/main" id="{42DCE60E-1BC2-4E16-83EF-9AB9C9880844}"/>
               </a:ext>
             </a:extLst>
           </p:cNvPr>
@@ -2725,7 +2725,7 @@
           <p:cNvPr id="9" name="s10-takeaway">
             <a:extLst xmlns:a="http://schemas.openxmlformats.org/drawingml/2006/main">
               <a:ext uri="{FF2B5EF4-FFF2-40B4-BE49-F238E27FC236}">
-                <a16:creationId xmlns:a16="http://schemas.microsoft.com/office/drawing/2014/main" id="{7AEF5221-77CE-416B-B4B0-595EE8623F88}"/>
+                <a16:creationId xmlns:a16="http://schemas.microsoft.com/office/drawing/2014/main" id="{DF5B8B32-5581-4114-B812-EFA32C9A1A15}"/>
               </a:ext>
             </a:extLst>
           </p:cNvPr>
@@ -2750,7 +2750,7 @@
         </p:spPr>
         <p:txBody>
           <a:bodyPr xmlns:a="http://schemas.openxmlformats.org/drawingml/2006/main" lIns="0" tIns="0" rIns="0" bIns="0" anchor="ctr">
-            <a:normAutofit fontScale="95911"/>
+            <a:normAutofit fontScale="100000"/>
           </a:bodyPr>
           <a:lstStyle xmlns:a="http://schemas.openxmlformats.org/drawingml/2006/main"/>
           <a:p xmlns:a="http://schemas.openxmlformats.org/drawingml/2006/main">
@@ -2773,7 +2773,7 @@
                 <a:ea typeface="PingFang SC"/>
                 <a:cs typeface="PingFang SC"/>
               </a:rPr>
-              <a:t>课程精编页用于讲授主线；播放器中的“原课件”模式保留团队 PowerPoint 精选页、真实图片和可播放视频。</a:t>
+              <a:t>课程正文与幻灯片共享同一知识主线，图片和视频用于帮助理解本节概念与案例。</a:t>
             </a:r>
           </a:p>
         </p:txBody>
@@ -2781,7 +2781,7 @@
     </p:spTree>
     <p:extLst>
       <p:ext uri="{BB962C8B-B14F-4D97-AF65-F5344CB8AC3E}">
-        <p14:creationId xmlns:p14="http://schemas.microsoft.com/office/powerpoint/2010/main" val="436149782"/>
+        <p14:creationId xmlns:p14="http://schemas.microsoft.com/office/powerpoint/2010/main" val="777438562"/>
       </p:ext>
     </p:extLst>
   </p:cSld>
@@ -2812,7 +2812,7 @@
           <p:cNvPr id="1" name="s2-rule">
             <a:extLst xmlns:a="http://schemas.openxmlformats.org/drawingml/2006/main">
               <a:ext uri="{FF2B5EF4-FFF2-40B4-BE49-F238E27FC236}">
-                <a16:creationId xmlns:a16="http://schemas.microsoft.com/office/drawing/2014/main" id="{1963C9F5-E575-41E0-AE52-6A774A685B2E}"/>
+                <a16:creationId xmlns:a16="http://schemas.microsoft.com/office/drawing/2014/main" id="{0A68410C-B0FC-447A-B3E9-E18FB025A398}"/>
               </a:ext>
             </a:extLst>
           </p:cNvPr>
@@ -2845,7 +2845,7 @@
           <p:cNvPr id="2" name="s2-eyebrow">
             <a:extLst xmlns:a="http://schemas.openxmlformats.org/drawingml/2006/main">
               <a:ext uri="{FF2B5EF4-FFF2-40B4-BE49-F238E27FC236}">
-                <a16:creationId xmlns:a16="http://schemas.microsoft.com/office/drawing/2014/main" id="{2AFF8EC7-FFF3-4FE7-9652-D3B833FF5124}"/>
+                <a16:creationId xmlns:a16="http://schemas.microsoft.com/office/drawing/2014/main" id="{298B5C4C-EE3C-4B7D-9C25-5793201B4319}"/>
               </a:ext>
             </a:extLst>
           </p:cNvPr>
@@ -2903,7 +2903,7 @@
           <p:cNvPr id="3" name="s2-title">
             <a:extLst xmlns:a="http://schemas.openxmlformats.org/drawingml/2006/main">
               <a:ext uri="{FF2B5EF4-FFF2-40B4-BE49-F238E27FC236}">
-                <a16:creationId xmlns:a16="http://schemas.microsoft.com/office/drawing/2014/main" id="{C95A0449-200C-41D4-88DF-46043FECCC1F}"/>
+                <a16:creationId xmlns:a16="http://schemas.microsoft.com/office/drawing/2014/main" id="{FC34E21F-F735-437F-8A52-7DC39FD38367}"/>
               </a:ext>
             </a:extLst>
           </p:cNvPr>
@@ -2961,7 +2961,7 @@
           <p:cNvPr id="4" name="s2-footer">
             <a:extLst xmlns:a="http://schemas.openxmlformats.org/drawingml/2006/main">
               <a:ext uri="{FF2B5EF4-FFF2-40B4-BE49-F238E27FC236}">
-                <a16:creationId xmlns:a16="http://schemas.microsoft.com/office/drawing/2014/main" id="{09933517-AFDE-4349-BDF4-6F31931CB96A}"/>
+                <a16:creationId xmlns:a16="http://schemas.microsoft.com/office/drawing/2014/main" id="{1A6C98F5-B6BC-42E9-9ED1-353FE593E946}"/>
               </a:ext>
             </a:extLst>
           </p:cNvPr>
@@ -2992,7 +2992,7 @@
           <p:cNvPr id="5" name="s2-identity">
             <a:extLst xmlns:a="http://schemas.openxmlformats.org/drawingml/2006/main">
               <a:ext uri="{FF2B5EF4-FFF2-40B4-BE49-F238E27FC236}">
-                <a16:creationId xmlns:a16="http://schemas.microsoft.com/office/drawing/2014/main" id="{996CB4D6-80A8-4E86-9101-A5138B2EF990}"/>
+                <a16:creationId xmlns:a16="http://schemas.microsoft.com/office/drawing/2014/main" id="{F8F79C41-97C1-44D1-B78C-321CB9177635}"/>
               </a:ext>
             </a:extLst>
           </p:cNvPr>
@@ -3050,7 +3050,7 @@
           <p:cNvPr id="6" name="objective-1">
             <a:extLst xmlns:a="http://schemas.openxmlformats.org/drawingml/2006/main">
               <a:ext uri="{FF2B5EF4-FFF2-40B4-BE49-F238E27FC236}">
-                <a16:creationId xmlns:a16="http://schemas.microsoft.com/office/drawing/2014/main" id="{3A629D7B-E9DE-4DFB-8661-D2E0BAB7F7BE}"/>
+                <a16:creationId xmlns:a16="http://schemas.microsoft.com/office/drawing/2014/main" id="{F09CBF3B-74B1-4618-92A3-7A6B7C6A5492}"/>
               </a:ext>
             </a:extLst>
           </p:cNvPr>
@@ -3137,7 +3137,7 @@
           <p:cNvPr id="7" name="objective-2">
             <a:extLst xmlns:a="http://schemas.openxmlformats.org/drawingml/2006/main">
               <a:ext uri="{FF2B5EF4-FFF2-40B4-BE49-F238E27FC236}">
-                <a16:creationId xmlns:a16="http://schemas.microsoft.com/office/drawing/2014/main" id="{2D60F3F5-07F2-44A1-AED8-64BDE36055E4}"/>
+                <a16:creationId xmlns:a16="http://schemas.microsoft.com/office/drawing/2014/main" id="{7F41F27C-37DE-401C-8F9D-770BA0A554E8}"/>
               </a:ext>
             </a:extLst>
           </p:cNvPr>
@@ -3224,7 +3224,7 @@
           <p:cNvPr id="8" name="objective-3">
             <a:extLst xmlns:a="http://schemas.openxmlformats.org/drawingml/2006/main">
               <a:ext uri="{FF2B5EF4-FFF2-40B4-BE49-F238E27FC236}">
-                <a16:creationId xmlns:a16="http://schemas.microsoft.com/office/drawing/2014/main" id="{B63CC51B-6C25-400A-A70B-CE76D80DDCA8}"/>
+                <a16:creationId xmlns:a16="http://schemas.microsoft.com/office/drawing/2014/main" id="{02228126-E7E3-448C-A697-84071C5816EF}"/>
               </a:ext>
             </a:extLst>
           </p:cNvPr>
@@ -3309,7 +3309,7 @@
     </p:spTree>
     <p:extLst>
       <p:ext uri="{BB962C8B-B14F-4D97-AF65-F5344CB8AC3E}">
-        <p14:creationId xmlns:p14="http://schemas.microsoft.com/office/powerpoint/2010/main" val="200861715"/>
+        <p14:creationId xmlns:p14="http://schemas.microsoft.com/office/powerpoint/2010/main" val="1967919319"/>
       </p:ext>
     </p:extLst>
   </p:cSld>
@@ -3340,7 +3340,7 @@
           <p:cNvPr id="1" name="s3-rule">
             <a:extLst xmlns:a="http://schemas.openxmlformats.org/drawingml/2006/main">
               <a:ext uri="{FF2B5EF4-FFF2-40B4-BE49-F238E27FC236}">
-                <a16:creationId xmlns:a16="http://schemas.microsoft.com/office/drawing/2014/main" id="{BF556FFA-3BD2-43C8-B565-E5D1F02B846B}"/>
+                <a16:creationId xmlns:a16="http://schemas.microsoft.com/office/drawing/2014/main" id="{0F06A8AC-41A9-4B59-B922-B157783186B8}"/>
               </a:ext>
             </a:extLst>
           </p:cNvPr>
@@ -3373,7 +3373,7 @@
           <p:cNvPr id="2" name="s3-eyebrow">
             <a:extLst xmlns:a="http://schemas.openxmlformats.org/drawingml/2006/main">
               <a:ext uri="{FF2B5EF4-FFF2-40B4-BE49-F238E27FC236}">
-                <a16:creationId xmlns:a16="http://schemas.microsoft.com/office/drawing/2014/main" id="{6F9AD101-D92D-4A66-AB48-48AD69C40631}"/>
+                <a16:creationId xmlns:a16="http://schemas.microsoft.com/office/drawing/2014/main" id="{BE7D06EA-2F60-48BA-8517-948EF36602A9}"/>
               </a:ext>
             </a:extLst>
           </p:cNvPr>
@@ -3431,7 +3431,7 @@
           <p:cNvPr id="3" name="s3-title">
             <a:extLst xmlns:a="http://schemas.openxmlformats.org/drawingml/2006/main">
               <a:ext uri="{FF2B5EF4-FFF2-40B4-BE49-F238E27FC236}">
-                <a16:creationId xmlns:a16="http://schemas.microsoft.com/office/drawing/2014/main" id="{A3FAFE09-3B65-4830-AE2D-B18D2378A5AD}"/>
+                <a16:creationId xmlns:a16="http://schemas.microsoft.com/office/drawing/2014/main" id="{CAD72FC9-E93E-49F3-96EB-E1E960A67710}"/>
               </a:ext>
             </a:extLst>
           </p:cNvPr>
@@ -3489,7 +3489,7 @@
           <p:cNvPr id="4" name="s3-footer">
             <a:extLst xmlns:a="http://schemas.openxmlformats.org/drawingml/2006/main">
               <a:ext uri="{FF2B5EF4-FFF2-40B4-BE49-F238E27FC236}">
-                <a16:creationId xmlns:a16="http://schemas.microsoft.com/office/drawing/2014/main" id="{4AE4369E-9D70-4714-867D-8FB613EBB765}"/>
+                <a16:creationId xmlns:a16="http://schemas.microsoft.com/office/drawing/2014/main" id="{B074E9A5-065F-4F89-9EBF-5E2DD3EBA5F0}"/>
               </a:ext>
             </a:extLst>
           </p:cNvPr>
@@ -3520,7 +3520,7 @@
           <p:cNvPr id="5" name="s3-identity">
             <a:extLst xmlns:a="http://schemas.openxmlformats.org/drawingml/2006/main">
               <a:ext uri="{FF2B5EF4-FFF2-40B4-BE49-F238E27FC236}">
-                <a16:creationId xmlns:a16="http://schemas.microsoft.com/office/drawing/2014/main" id="{4F2B565F-B38A-4DAE-AD2B-CA8DBD5A7775}"/>
+                <a16:creationId xmlns:a16="http://schemas.microsoft.com/office/drawing/2014/main" id="{D0506B53-2EB2-4729-99A0-0A14A9A38EF6}"/>
               </a:ext>
             </a:extLst>
           </p:cNvPr>
@@ -3578,7 +3578,7 @@
           <p:cNvPr id="6" name="core-no-0">
             <a:extLst xmlns:a="http://schemas.openxmlformats.org/drawingml/2006/main">
               <a:ext uri="{FF2B5EF4-FFF2-40B4-BE49-F238E27FC236}">
-                <a16:creationId xmlns:a16="http://schemas.microsoft.com/office/drawing/2014/main" id="{41D25089-F051-44B8-9C27-C6354D20F7F4}"/>
+                <a16:creationId xmlns:a16="http://schemas.microsoft.com/office/drawing/2014/main" id="{87B43475-F0BD-4EB9-9CC3-77058C903234}"/>
               </a:ext>
             </a:extLst>
           </p:cNvPr>
@@ -3636,7 +3636,7 @@
           <p:cNvPr id="7" name="core-label-0">
             <a:extLst xmlns:a="http://schemas.openxmlformats.org/drawingml/2006/main">
               <a:ext uri="{FF2B5EF4-FFF2-40B4-BE49-F238E27FC236}">
-                <a16:creationId xmlns:a16="http://schemas.microsoft.com/office/drawing/2014/main" id="{DC6D108F-8944-4359-A0CE-E51BD10871FD}"/>
+                <a16:creationId xmlns:a16="http://schemas.microsoft.com/office/drawing/2014/main" id="{99237E4C-1C5A-4358-86FA-40B38AF04FA0}"/>
               </a:ext>
             </a:extLst>
           </p:cNvPr>
@@ -3694,7 +3694,7 @@
           <p:cNvPr id="8" name="core-body-0">
             <a:extLst xmlns:a="http://schemas.openxmlformats.org/drawingml/2006/main">
               <a:ext uri="{FF2B5EF4-FFF2-40B4-BE49-F238E27FC236}">
-                <a16:creationId xmlns:a16="http://schemas.microsoft.com/office/drawing/2014/main" id="{453AB9D2-ECD7-415E-9FFB-1769BBD13DE6}"/>
+                <a16:creationId xmlns:a16="http://schemas.microsoft.com/office/drawing/2014/main" id="{ACF99C04-CE33-49D7-8596-B8B88EA324D8}"/>
               </a:ext>
             </a:extLst>
           </p:cNvPr>
@@ -3758,7 +3758,7 @@
           <p:cNvPr id="9" name="core-no-1">
             <a:extLst xmlns:a="http://schemas.openxmlformats.org/drawingml/2006/main">
               <a:ext uri="{FF2B5EF4-FFF2-40B4-BE49-F238E27FC236}">
-                <a16:creationId xmlns:a16="http://schemas.microsoft.com/office/drawing/2014/main" id="{311D099F-7330-4622-94B4-0DCE47CBC95E}"/>
+                <a16:creationId xmlns:a16="http://schemas.microsoft.com/office/drawing/2014/main" id="{31CF2549-EA8E-4297-B188-F1066B638490}"/>
               </a:ext>
             </a:extLst>
           </p:cNvPr>
@@ -3816,7 +3816,7 @@
           <p:cNvPr id="10" name="core-body-1">
             <a:extLst xmlns:a="http://schemas.openxmlformats.org/drawingml/2006/main">
               <a:ext uri="{FF2B5EF4-FFF2-40B4-BE49-F238E27FC236}">
-                <a16:creationId xmlns:a16="http://schemas.microsoft.com/office/drawing/2014/main" id="{3EECA4D0-40C2-4358-9975-871F86543BCC}"/>
+                <a16:creationId xmlns:a16="http://schemas.microsoft.com/office/drawing/2014/main" id="{0B826CB3-905B-4F4B-847C-6E1D9B6A34CB}"/>
               </a:ext>
             </a:extLst>
           </p:cNvPr>
@@ -3880,7 +3880,7 @@
           <p:cNvPr id="11" name="s3-takeaway-rule">
             <a:extLst xmlns:a="http://schemas.openxmlformats.org/drawingml/2006/main">
               <a:ext uri="{FF2B5EF4-FFF2-40B4-BE49-F238E27FC236}">
-                <a16:creationId xmlns:a16="http://schemas.microsoft.com/office/drawing/2014/main" id="{AFFC04B0-D39C-4F4B-A6F3-826B9A19C125}"/>
+                <a16:creationId xmlns:a16="http://schemas.microsoft.com/office/drawing/2014/main" id="{E7FDC5C4-3FE7-4A74-8F58-6067115DBA68}"/>
               </a:ext>
             </a:extLst>
           </p:cNvPr>
@@ -3913,7 +3913,7 @@
           <p:cNvPr id="12" name="s3-takeaway">
             <a:extLst xmlns:a="http://schemas.openxmlformats.org/drawingml/2006/main">
               <a:ext uri="{FF2B5EF4-FFF2-40B4-BE49-F238E27FC236}">
-                <a16:creationId xmlns:a16="http://schemas.microsoft.com/office/drawing/2014/main" id="{36735FD9-AB80-4298-BD92-25BD08F8F824}"/>
+                <a16:creationId xmlns:a16="http://schemas.microsoft.com/office/drawing/2014/main" id="{258039F6-1F2C-4D4A-9676-65A357DF4777}"/>
               </a:ext>
             </a:extLst>
           </p:cNvPr>
@@ -3969,7 +3969,7 @@
     </p:spTree>
     <p:extLst>
       <p:ext uri="{BB962C8B-B14F-4D97-AF65-F5344CB8AC3E}">
-        <p14:creationId xmlns:p14="http://schemas.microsoft.com/office/powerpoint/2010/main" val="2059501542"/>
+        <p14:creationId xmlns:p14="http://schemas.microsoft.com/office/powerpoint/2010/main" val="1478423972"/>
       </p:ext>
     </p:extLst>
   </p:cSld>
@@ -4000,7 +4000,7 @@
           <p:cNvPr id="1" name="s4-rule">
             <a:extLst xmlns:a="http://schemas.openxmlformats.org/drawingml/2006/main">
               <a:ext uri="{FF2B5EF4-FFF2-40B4-BE49-F238E27FC236}">
-                <a16:creationId xmlns:a16="http://schemas.microsoft.com/office/drawing/2014/main" id="{49043978-AC96-4CE2-AD67-4B2403A90C93}"/>
+                <a16:creationId xmlns:a16="http://schemas.microsoft.com/office/drawing/2014/main" id="{DE119595-28A1-40DC-9973-E4C97D20105F}"/>
               </a:ext>
             </a:extLst>
           </p:cNvPr>
@@ -4033,7 +4033,7 @@
           <p:cNvPr id="2" name="s4-eyebrow">
             <a:extLst xmlns:a="http://schemas.openxmlformats.org/drawingml/2006/main">
               <a:ext uri="{FF2B5EF4-FFF2-40B4-BE49-F238E27FC236}">
-                <a16:creationId xmlns:a16="http://schemas.microsoft.com/office/drawing/2014/main" id="{946BDA44-5FEB-4419-B27B-9CFEA958A7F2}"/>
+                <a16:creationId xmlns:a16="http://schemas.microsoft.com/office/drawing/2014/main" id="{294A5FBE-F2BB-4647-9016-CBD34C625732}"/>
               </a:ext>
             </a:extLst>
           </p:cNvPr>
@@ -4091,7 +4091,7 @@
           <p:cNvPr id="3" name="s4-title">
             <a:extLst xmlns:a="http://schemas.openxmlformats.org/drawingml/2006/main">
               <a:ext uri="{FF2B5EF4-FFF2-40B4-BE49-F238E27FC236}">
-                <a16:creationId xmlns:a16="http://schemas.microsoft.com/office/drawing/2014/main" id="{7970500D-29D8-440D-84FB-76AF5049E16D}"/>
+                <a16:creationId xmlns:a16="http://schemas.microsoft.com/office/drawing/2014/main" id="{E4C4AFC7-40EC-4038-AEBA-23532B052630}"/>
               </a:ext>
             </a:extLst>
           </p:cNvPr>
@@ -4149,7 +4149,7 @@
           <p:cNvPr id="4" name="s4-footer">
             <a:extLst xmlns:a="http://schemas.openxmlformats.org/drawingml/2006/main">
               <a:ext uri="{FF2B5EF4-FFF2-40B4-BE49-F238E27FC236}">
-                <a16:creationId xmlns:a16="http://schemas.microsoft.com/office/drawing/2014/main" id="{420D80FF-06E3-4909-A5F1-18BE816210EB}"/>
+                <a16:creationId xmlns:a16="http://schemas.microsoft.com/office/drawing/2014/main" id="{802CA3F7-D396-4FD5-9819-73E154E37307}"/>
               </a:ext>
             </a:extLst>
           </p:cNvPr>
@@ -4180,7 +4180,7 @@
           <p:cNvPr id="5" name="s4-identity">
             <a:extLst xmlns:a="http://schemas.openxmlformats.org/drawingml/2006/main">
               <a:ext uri="{FF2B5EF4-FFF2-40B4-BE49-F238E27FC236}">
-                <a16:creationId xmlns:a16="http://schemas.microsoft.com/office/drawing/2014/main" id="{58EB5FC4-2CC4-48D3-B5F4-AC39E5EB8ED8}"/>
+                <a16:creationId xmlns:a16="http://schemas.microsoft.com/office/drawing/2014/main" id="{2AB8672F-75FC-4F4B-B2E0-3630F5DD898C}"/>
               </a:ext>
             </a:extLst>
           </p:cNvPr>
@@ -4238,7 +4238,7 @@
           <p:cNvPr id="6" name="core-no-0">
             <a:extLst xmlns:a="http://schemas.openxmlformats.org/drawingml/2006/main">
               <a:ext uri="{FF2B5EF4-FFF2-40B4-BE49-F238E27FC236}">
-                <a16:creationId xmlns:a16="http://schemas.microsoft.com/office/drawing/2014/main" id="{0F8DB095-173D-42F3-9A1F-22613EED33E2}"/>
+                <a16:creationId xmlns:a16="http://schemas.microsoft.com/office/drawing/2014/main" id="{668A9930-C8AD-4E54-B07E-19CB23C463DB}"/>
               </a:ext>
             </a:extLst>
           </p:cNvPr>
@@ -4296,7 +4296,7 @@
           <p:cNvPr id="7" name="core-label-0">
             <a:extLst xmlns:a="http://schemas.openxmlformats.org/drawingml/2006/main">
               <a:ext uri="{FF2B5EF4-FFF2-40B4-BE49-F238E27FC236}">
-                <a16:creationId xmlns:a16="http://schemas.microsoft.com/office/drawing/2014/main" id="{6B3B7C67-68CC-43AA-9430-7BF7CC945499}"/>
+                <a16:creationId xmlns:a16="http://schemas.microsoft.com/office/drawing/2014/main" id="{EEE245ED-71AF-4006-B201-3D7D7A4E96C2}"/>
               </a:ext>
             </a:extLst>
           </p:cNvPr>
@@ -4354,7 +4354,7 @@
           <p:cNvPr id="8" name="core-body-0">
             <a:extLst xmlns:a="http://schemas.openxmlformats.org/drawingml/2006/main">
               <a:ext uri="{FF2B5EF4-FFF2-40B4-BE49-F238E27FC236}">
-                <a16:creationId xmlns:a16="http://schemas.microsoft.com/office/drawing/2014/main" id="{11519109-B214-4DC9-BB69-BE9353BEE4B9}"/>
+                <a16:creationId xmlns:a16="http://schemas.microsoft.com/office/drawing/2014/main" id="{FB41E1B1-8EDD-4C33-B407-7E2923099318}"/>
               </a:ext>
             </a:extLst>
           </p:cNvPr>
@@ -4418,7 +4418,7 @@
           <p:cNvPr id="9" name="core-no-1">
             <a:extLst xmlns:a="http://schemas.openxmlformats.org/drawingml/2006/main">
               <a:ext uri="{FF2B5EF4-FFF2-40B4-BE49-F238E27FC236}">
-                <a16:creationId xmlns:a16="http://schemas.microsoft.com/office/drawing/2014/main" id="{05333452-2C6E-4262-A6ED-90050C03F5F8}"/>
+                <a16:creationId xmlns:a16="http://schemas.microsoft.com/office/drawing/2014/main" id="{E408BAA6-DBCC-42A2-B531-708EA95A1400}"/>
               </a:ext>
             </a:extLst>
           </p:cNvPr>
@@ -4476,7 +4476,7 @@
           <p:cNvPr id="10" name="core-body-1">
             <a:extLst xmlns:a="http://schemas.openxmlformats.org/drawingml/2006/main">
               <a:ext uri="{FF2B5EF4-FFF2-40B4-BE49-F238E27FC236}">
-                <a16:creationId xmlns:a16="http://schemas.microsoft.com/office/drawing/2014/main" id="{EA295483-D708-4C65-A068-4D02228952A3}"/>
+                <a16:creationId xmlns:a16="http://schemas.microsoft.com/office/drawing/2014/main" id="{AC1219C2-1541-468C-A95C-49A0C1BE6A0A}"/>
               </a:ext>
             </a:extLst>
           </p:cNvPr>
@@ -4540,7 +4540,7 @@
           <p:cNvPr id="11" name="s4-takeaway-rule">
             <a:extLst xmlns:a="http://schemas.openxmlformats.org/drawingml/2006/main">
               <a:ext uri="{FF2B5EF4-FFF2-40B4-BE49-F238E27FC236}">
-                <a16:creationId xmlns:a16="http://schemas.microsoft.com/office/drawing/2014/main" id="{E561E88E-225D-4C10-812B-22D219A08A11}"/>
+                <a16:creationId xmlns:a16="http://schemas.microsoft.com/office/drawing/2014/main" id="{A5683776-02F8-4DDD-AA5B-E3B463E88554}"/>
               </a:ext>
             </a:extLst>
           </p:cNvPr>
@@ -4573,7 +4573,7 @@
           <p:cNvPr id="12" name="s4-takeaway">
             <a:extLst xmlns:a="http://schemas.openxmlformats.org/drawingml/2006/main">
               <a:ext uri="{FF2B5EF4-FFF2-40B4-BE49-F238E27FC236}">
-                <a16:creationId xmlns:a16="http://schemas.microsoft.com/office/drawing/2014/main" id="{F9163974-5B41-4A07-B282-8E607EFDC17B}"/>
+                <a16:creationId xmlns:a16="http://schemas.microsoft.com/office/drawing/2014/main" id="{C9D91FA9-4CD9-4C3A-811F-4843EAFDD73A}"/>
               </a:ext>
             </a:extLst>
           </p:cNvPr>
@@ -4629,7 +4629,7 @@
     </p:spTree>
     <p:extLst>
       <p:ext uri="{BB962C8B-B14F-4D97-AF65-F5344CB8AC3E}">
-        <p14:creationId xmlns:p14="http://schemas.microsoft.com/office/powerpoint/2010/main" val="955837532"/>
+        <p14:creationId xmlns:p14="http://schemas.microsoft.com/office/powerpoint/2010/main" val="1622464004"/>
       </p:ext>
     </p:extLst>
   </p:cSld>
@@ -4660,7 +4660,7 @@
           <p:cNvPr id="1" name="s5-rule">
             <a:extLst xmlns:a="http://schemas.openxmlformats.org/drawingml/2006/main">
               <a:ext uri="{FF2B5EF4-FFF2-40B4-BE49-F238E27FC236}">
-                <a16:creationId xmlns:a16="http://schemas.microsoft.com/office/drawing/2014/main" id="{7D1AD665-1691-4850-BBBA-E3F5AD1CEFED}"/>
+                <a16:creationId xmlns:a16="http://schemas.microsoft.com/office/drawing/2014/main" id="{A7E989F6-E3F1-4770-87C3-477D673E0497}"/>
               </a:ext>
             </a:extLst>
           </p:cNvPr>
@@ -4693,7 +4693,7 @@
           <p:cNvPr id="2" name="s5-eyebrow">
             <a:extLst xmlns:a="http://schemas.openxmlformats.org/drawingml/2006/main">
               <a:ext uri="{FF2B5EF4-FFF2-40B4-BE49-F238E27FC236}">
-                <a16:creationId xmlns:a16="http://schemas.microsoft.com/office/drawing/2014/main" id="{5C15BA61-F050-4157-BE82-D00E039F7893}"/>
+                <a16:creationId xmlns:a16="http://schemas.microsoft.com/office/drawing/2014/main" id="{8A6F6D2D-FAA6-490E-A7A8-A00F92EAA971}"/>
               </a:ext>
             </a:extLst>
           </p:cNvPr>
@@ -4751,7 +4751,7 @@
           <p:cNvPr id="3" name="s5-title">
             <a:extLst xmlns:a="http://schemas.openxmlformats.org/drawingml/2006/main">
               <a:ext uri="{FF2B5EF4-FFF2-40B4-BE49-F238E27FC236}">
-                <a16:creationId xmlns:a16="http://schemas.microsoft.com/office/drawing/2014/main" id="{67B08AC2-761D-4713-92AF-6F28D234439A}"/>
+                <a16:creationId xmlns:a16="http://schemas.microsoft.com/office/drawing/2014/main" id="{14938824-181D-4240-8BB2-90000C81B0C0}"/>
               </a:ext>
             </a:extLst>
           </p:cNvPr>
@@ -4809,7 +4809,7 @@
           <p:cNvPr id="4" name="s5-footer">
             <a:extLst xmlns:a="http://schemas.openxmlformats.org/drawingml/2006/main">
               <a:ext uri="{FF2B5EF4-FFF2-40B4-BE49-F238E27FC236}">
-                <a16:creationId xmlns:a16="http://schemas.microsoft.com/office/drawing/2014/main" id="{8A1B4F93-7BB8-43E9-9BE0-CBD52BD63F79}"/>
+                <a16:creationId xmlns:a16="http://schemas.microsoft.com/office/drawing/2014/main" id="{A8DAD351-4474-4338-8610-41D1F80D1156}"/>
               </a:ext>
             </a:extLst>
           </p:cNvPr>
@@ -4840,7 +4840,7 @@
           <p:cNvPr id="5" name="s5-identity">
             <a:extLst xmlns:a="http://schemas.openxmlformats.org/drawingml/2006/main">
               <a:ext uri="{FF2B5EF4-FFF2-40B4-BE49-F238E27FC236}">
-                <a16:creationId xmlns:a16="http://schemas.microsoft.com/office/drawing/2014/main" id="{338F112B-7E22-4D30-8209-C83AD2568C81}"/>
+                <a16:creationId xmlns:a16="http://schemas.microsoft.com/office/drawing/2014/main" id="{0EFFF8C5-13FF-4BC3-9792-880F6CC7DE2C}"/>
               </a:ext>
             </a:extLst>
           </p:cNvPr>
@@ -4898,7 +4898,7 @@
           <p:cNvPr id="6" name="core-no-0">
             <a:extLst xmlns:a="http://schemas.openxmlformats.org/drawingml/2006/main">
               <a:ext uri="{FF2B5EF4-FFF2-40B4-BE49-F238E27FC236}">
-                <a16:creationId xmlns:a16="http://schemas.microsoft.com/office/drawing/2014/main" id="{A69C48FD-DADC-421A-A43F-D794E2AFA63D}"/>
+                <a16:creationId xmlns:a16="http://schemas.microsoft.com/office/drawing/2014/main" id="{05407037-0A3C-4866-87CD-3894753EFDCA}"/>
               </a:ext>
             </a:extLst>
           </p:cNvPr>
@@ -4956,7 +4956,7 @@
           <p:cNvPr id="7" name="core-label-0">
             <a:extLst xmlns:a="http://schemas.openxmlformats.org/drawingml/2006/main">
               <a:ext uri="{FF2B5EF4-FFF2-40B4-BE49-F238E27FC236}">
-                <a16:creationId xmlns:a16="http://schemas.microsoft.com/office/drawing/2014/main" id="{DD2A738E-1D99-4FDE-9936-4D080DC6149C}"/>
+                <a16:creationId xmlns:a16="http://schemas.microsoft.com/office/drawing/2014/main" id="{372C1C8F-5B2D-46FA-A1A6-032B7AB00B00}"/>
               </a:ext>
             </a:extLst>
           </p:cNvPr>
@@ -5014,7 +5014,7 @@
           <p:cNvPr id="8" name="core-body-0">
             <a:extLst xmlns:a="http://schemas.openxmlformats.org/drawingml/2006/main">
               <a:ext uri="{FF2B5EF4-FFF2-40B4-BE49-F238E27FC236}">
-                <a16:creationId xmlns:a16="http://schemas.microsoft.com/office/drawing/2014/main" id="{D76109B5-F74E-4387-B8F7-5F200CE12D72}"/>
+                <a16:creationId xmlns:a16="http://schemas.microsoft.com/office/drawing/2014/main" id="{BDE687DA-5B00-4959-A0A9-77CA3212C0E4}"/>
               </a:ext>
             </a:extLst>
           </p:cNvPr>
@@ -5078,7 +5078,7 @@
           <p:cNvPr id="9" name="core-no-1">
             <a:extLst xmlns:a="http://schemas.openxmlformats.org/drawingml/2006/main">
               <a:ext uri="{FF2B5EF4-FFF2-40B4-BE49-F238E27FC236}">
-                <a16:creationId xmlns:a16="http://schemas.microsoft.com/office/drawing/2014/main" id="{4ECAE927-5AEA-46F6-90D2-7846E0191970}"/>
+                <a16:creationId xmlns:a16="http://schemas.microsoft.com/office/drawing/2014/main" id="{07B26AA5-5BCD-493E-8B02-5921519B18DE}"/>
               </a:ext>
             </a:extLst>
           </p:cNvPr>
@@ -5136,7 +5136,7 @@
           <p:cNvPr id="10" name="core-body-1">
             <a:extLst xmlns:a="http://schemas.openxmlformats.org/drawingml/2006/main">
               <a:ext uri="{FF2B5EF4-FFF2-40B4-BE49-F238E27FC236}">
-                <a16:creationId xmlns:a16="http://schemas.microsoft.com/office/drawing/2014/main" id="{243700F6-6708-43EA-836E-4950DE2BB21F}"/>
+                <a16:creationId xmlns:a16="http://schemas.microsoft.com/office/drawing/2014/main" id="{E6BD60D8-CE8A-46F6-AA63-325A72CB5EA0}"/>
               </a:ext>
             </a:extLst>
           </p:cNvPr>
@@ -5200,7 +5200,7 @@
           <p:cNvPr id="11" name="s5-takeaway-rule">
             <a:extLst xmlns:a="http://schemas.openxmlformats.org/drawingml/2006/main">
               <a:ext uri="{FF2B5EF4-FFF2-40B4-BE49-F238E27FC236}">
-                <a16:creationId xmlns:a16="http://schemas.microsoft.com/office/drawing/2014/main" id="{2BA8832D-80E0-4B40-A6F3-DC3D93732631}"/>
+                <a16:creationId xmlns:a16="http://schemas.microsoft.com/office/drawing/2014/main" id="{6F62BCBA-9D2F-401A-BF3D-8E0A212C768B}"/>
               </a:ext>
             </a:extLst>
           </p:cNvPr>
@@ -5233,7 +5233,7 @@
           <p:cNvPr id="12" name="s5-takeaway">
             <a:extLst xmlns:a="http://schemas.openxmlformats.org/drawingml/2006/main">
               <a:ext uri="{FF2B5EF4-FFF2-40B4-BE49-F238E27FC236}">
-                <a16:creationId xmlns:a16="http://schemas.microsoft.com/office/drawing/2014/main" id="{522AC130-97E0-4834-A0AA-D89C4D07B8E0}"/>
+                <a16:creationId xmlns:a16="http://schemas.microsoft.com/office/drawing/2014/main" id="{6ADBF2F6-3A4E-4945-9617-82296C467944}"/>
               </a:ext>
             </a:extLst>
           </p:cNvPr>
@@ -5289,7 +5289,7 @@
     </p:spTree>
     <p:extLst>
       <p:ext uri="{BB962C8B-B14F-4D97-AF65-F5344CB8AC3E}">
-        <p14:creationId xmlns:p14="http://schemas.microsoft.com/office/powerpoint/2010/main" val="615046702"/>
+        <p14:creationId xmlns:p14="http://schemas.microsoft.com/office/powerpoint/2010/main" val="342856214"/>
       </p:ext>
     </p:extLst>
   </p:cSld>
@@ -5320,7 +5320,7 @@
           <p:cNvPr id="1" name="s6-rule">
             <a:extLst xmlns:a="http://schemas.openxmlformats.org/drawingml/2006/main">
               <a:ext uri="{FF2B5EF4-FFF2-40B4-BE49-F238E27FC236}">
-                <a16:creationId xmlns:a16="http://schemas.microsoft.com/office/drawing/2014/main" id="{E80878F7-4494-4A2D-8B1A-AB88C3DC31AD}"/>
+                <a16:creationId xmlns:a16="http://schemas.microsoft.com/office/drawing/2014/main" id="{B7B6E14F-DE6F-4F13-BFB2-0C87FF1C5405}"/>
               </a:ext>
             </a:extLst>
           </p:cNvPr>
@@ -5353,7 +5353,7 @@
           <p:cNvPr id="2" name="s6-eyebrow">
             <a:extLst xmlns:a="http://schemas.openxmlformats.org/drawingml/2006/main">
               <a:ext uri="{FF2B5EF4-FFF2-40B4-BE49-F238E27FC236}">
-                <a16:creationId xmlns:a16="http://schemas.microsoft.com/office/drawing/2014/main" id="{9406011E-69CA-402E-9ABE-F1AD3AD1D6FF}"/>
+                <a16:creationId xmlns:a16="http://schemas.microsoft.com/office/drawing/2014/main" id="{A9A8B95C-6001-43E5-B5B2-33959B67A78F}"/>
               </a:ext>
             </a:extLst>
           </p:cNvPr>
@@ -5411,7 +5411,7 @@
           <p:cNvPr id="3" name="s6-title">
             <a:extLst xmlns:a="http://schemas.openxmlformats.org/drawingml/2006/main">
               <a:ext uri="{FF2B5EF4-FFF2-40B4-BE49-F238E27FC236}">
-                <a16:creationId xmlns:a16="http://schemas.microsoft.com/office/drawing/2014/main" id="{A30809BF-5B9B-44F8-81C7-05A0E5D76331}"/>
+                <a16:creationId xmlns:a16="http://schemas.microsoft.com/office/drawing/2014/main" id="{54C47DD4-683E-41AA-A03E-40AE13DFFF2A}"/>
               </a:ext>
             </a:extLst>
           </p:cNvPr>
@@ -5469,7 +5469,7 @@
           <p:cNvPr id="4" name="s6-footer">
             <a:extLst xmlns:a="http://schemas.openxmlformats.org/drawingml/2006/main">
               <a:ext uri="{FF2B5EF4-FFF2-40B4-BE49-F238E27FC236}">
-                <a16:creationId xmlns:a16="http://schemas.microsoft.com/office/drawing/2014/main" id="{3D247B62-A605-4D7D-BC26-C008CD40D542}"/>
+                <a16:creationId xmlns:a16="http://schemas.microsoft.com/office/drawing/2014/main" id="{C1406825-ED98-4364-B796-018C2C8FA825}"/>
               </a:ext>
             </a:extLst>
           </p:cNvPr>
@@ -5500,7 +5500,7 @@
           <p:cNvPr id="5" name="s6-identity">
             <a:extLst xmlns:a="http://schemas.openxmlformats.org/drawingml/2006/main">
               <a:ext uri="{FF2B5EF4-FFF2-40B4-BE49-F238E27FC236}">
-                <a16:creationId xmlns:a16="http://schemas.microsoft.com/office/drawing/2014/main" id="{E9293088-AA28-4CA8-92D1-FCE985DB52C1}"/>
+                <a16:creationId xmlns:a16="http://schemas.microsoft.com/office/drawing/2014/main" id="{84EF35FF-A8C3-4ADD-B4D3-59B5F948723E}"/>
               </a:ext>
             </a:extLst>
           </p:cNvPr>
@@ -5558,7 +5558,7 @@
           <p:cNvPr id="6" name="core-no-0">
             <a:extLst xmlns:a="http://schemas.openxmlformats.org/drawingml/2006/main">
               <a:ext uri="{FF2B5EF4-FFF2-40B4-BE49-F238E27FC236}">
-                <a16:creationId xmlns:a16="http://schemas.microsoft.com/office/drawing/2014/main" id="{BA960CAB-2BA0-4739-9F2A-ECD224D4CFB0}"/>
+                <a16:creationId xmlns:a16="http://schemas.microsoft.com/office/drawing/2014/main" id="{8198789C-2DAC-43A2-9024-75B2D3920A08}"/>
               </a:ext>
             </a:extLst>
           </p:cNvPr>
@@ -5616,7 +5616,7 @@
           <p:cNvPr id="7" name="core-label-0">
             <a:extLst xmlns:a="http://schemas.openxmlformats.org/drawingml/2006/main">
               <a:ext uri="{FF2B5EF4-FFF2-40B4-BE49-F238E27FC236}">
-                <a16:creationId xmlns:a16="http://schemas.microsoft.com/office/drawing/2014/main" id="{7F5ACD04-4AD7-4835-8E1F-1D88158676F4}"/>
+                <a16:creationId xmlns:a16="http://schemas.microsoft.com/office/drawing/2014/main" id="{F1B61D9D-21E5-436E-844B-978B32AF6871}"/>
               </a:ext>
             </a:extLst>
           </p:cNvPr>
@@ -5674,7 +5674,7 @@
           <p:cNvPr id="8" name="core-body-0">
             <a:extLst xmlns:a="http://schemas.openxmlformats.org/drawingml/2006/main">
               <a:ext uri="{FF2B5EF4-FFF2-40B4-BE49-F238E27FC236}">
-                <a16:creationId xmlns:a16="http://schemas.microsoft.com/office/drawing/2014/main" id="{A145ADA4-C400-4BE8-BC5D-0963D5E7FC7E}"/>
+                <a16:creationId xmlns:a16="http://schemas.microsoft.com/office/drawing/2014/main" id="{4637DF5E-6E42-4AAD-8C8E-AF82886B5BFA}"/>
               </a:ext>
             </a:extLst>
           </p:cNvPr>
@@ -5738,7 +5738,7 @@
           <p:cNvPr id="9" name="core-no-1">
             <a:extLst xmlns:a="http://schemas.openxmlformats.org/drawingml/2006/main">
               <a:ext uri="{FF2B5EF4-FFF2-40B4-BE49-F238E27FC236}">
-                <a16:creationId xmlns:a16="http://schemas.microsoft.com/office/drawing/2014/main" id="{30F01555-C2E1-4ED8-A095-90E4F0B7F760}"/>
+                <a16:creationId xmlns:a16="http://schemas.microsoft.com/office/drawing/2014/main" id="{8233AE7F-2DF9-46AE-A642-FE4C3D11E73C}"/>
               </a:ext>
             </a:extLst>
           </p:cNvPr>
@@ -5796,7 +5796,7 @@
           <p:cNvPr id="10" name="core-body-1">
             <a:extLst xmlns:a="http://schemas.openxmlformats.org/drawingml/2006/main">
               <a:ext uri="{FF2B5EF4-FFF2-40B4-BE49-F238E27FC236}">
-                <a16:creationId xmlns:a16="http://schemas.microsoft.com/office/drawing/2014/main" id="{40386EE1-A2C1-4D3A-9B04-98B5F50A5753}"/>
+                <a16:creationId xmlns:a16="http://schemas.microsoft.com/office/drawing/2014/main" id="{F4DFD096-0F9C-4684-A441-F3878D3F404C}"/>
               </a:ext>
             </a:extLst>
           </p:cNvPr>
@@ -5860,7 +5860,7 @@
           <p:cNvPr id="11" name="s6-takeaway-rule">
             <a:extLst xmlns:a="http://schemas.openxmlformats.org/drawingml/2006/main">
               <a:ext uri="{FF2B5EF4-FFF2-40B4-BE49-F238E27FC236}">
-                <a16:creationId xmlns:a16="http://schemas.microsoft.com/office/drawing/2014/main" id="{FA0DB614-E025-41BD-ADA6-F723E22BCD51}"/>
+                <a16:creationId xmlns:a16="http://schemas.microsoft.com/office/drawing/2014/main" id="{5606B78D-D438-4A2C-A74A-A0F0EDA7D7CD}"/>
               </a:ext>
             </a:extLst>
           </p:cNvPr>
@@ -5893,7 +5893,7 @@
           <p:cNvPr id="12" name="s6-takeaway">
             <a:extLst xmlns:a="http://schemas.openxmlformats.org/drawingml/2006/main">
               <a:ext uri="{FF2B5EF4-FFF2-40B4-BE49-F238E27FC236}">
-                <a16:creationId xmlns:a16="http://schemas.microsoft.com/office/drawing/2014/main" id="{56A52A8A-3C58-4EE9-B74F-CCC7B484ABD0}"/>
+                <a16:creationId xmlns:a16="http://schemas.microsoft.com/office/drawing/2014/main" id="{94AA04B7-EEDF-4540-98E6-7A44E59A8459}"/>
               </a:ext>
             </a:extLst>
           </p:cNvPr>
@@ -5949,7 +5949,7 @@
     </p:spTree>
     <p:extLst>
       <p:ext uri="{BB962C8B-B14F-4D97-AF65-F5344CB8AC3E}">
-        <p14:creationId xmlns:p14="http://schemas.microsoft.com/office/powerpoint/2010/main" val="1495733274"/>
+        <p14:creationId xmlns:p14="http://schemas.microsoft.com/office/powerpoint/2010/main" val="839849986"/>
       </p:ext>
     </p:extLst>
   </p:cSld>
@@ -5980,7 +5980,7 @@
           <p:cNvPr id="1" name="s7-rule">
             <a:extLst xmlns:a="http://schemas.openxmlformats.org/drawingml/2006/main">
               <a:ext uri="{FF2B5EF4-FFF2-40B4-BE49-F238E27FC236}">
-                <a16:creationId xmlns:a16="http://schemas.microsoft.com/office/drawing/2014/main" id="{87E38799-3A87-46DC-ACD6-2299BD7B07CB}"/>
+                <a16:creationId xmlns:a16="http://schemas.microsoft.com/office/drawing/2014/main" id="{A3418B1C-2B74-44A1-A51A-D61B8A73BFCA}"/>
               </a:ext>
             </a:extLst>
           </p:cNvPr>
@@ -6013,7 +6013,7 @@
           <p:cNvPr id="2" name="s7-eyebrow">
             <a:extLst xmlns:a="http://schemas.openxmlformats.org/drawingml/2006/main">
               <a:ext uri="{FF2B5EF4-FFF2-40B4-BE49-F238E27FC236}">
-                <a16:creationId xmlns:a16="http://schemas.microsoft.com/office/drawing/2014/main" id="{D02837EE-5A1A-4BA2-9499-2A2C051C7A94}"/>
+                <a16:creationId xmlns:a16="http://schemas.microsoft.com/office/drawing/2014/main" id="{7DA026BA-8388-4E95-BE88-5E4BD25D7E99}"/>
               </a:ext>
             </a:extLst>
           </p:cNvPr>
@@ -6071,7 +6071,7 @@
           <p:cNvPr id="3" name="s7-title">
             <a:extLst xmlns:a="http://schemas.openxmlformats.org/drawingml/2006/main">
               <a:ext uri="{FF2B5EF4-FFF2-40B4-BE49-F238E27FC236}">
-                <a16:creationId xmlns:a16="http://schemas.microsoft.com/office/drawing/2014/main" id="{5A8CC1A9-B434-40EF-81B7-3B752DC64A8A}"/>
+                <a16:creationId xmlns:a16="http://schemas.microsoft.com/office/drawing/2014/main" id="{1F28B238-74C9-47D8-96B2-29B73A12D077}"/>
               </a:ext>
             </a:extLst>
           </p:cNvPr>
@@ -6129,7 +6129,7 @@
           <p:cNvPr id="4" name="s7-footer">
             <a:extLst xmlns:a="http://schemas.openxmlformats.org/drawingml/2006/main">
               <a:ext uri="{FF2B5EF4-FFF2-40B4-BE49-F238E27FC236}">
-                <a16:creationId xmlns:a16="http://schemas.microsoft.com/office/drawing/2014/main" id="{51A54B18-972A-4ADF-A35A-85B12AE679D1}"/>
+                <a16:creationId xmlns:a16="http://schemas.microsoft.com/office/drawing/2014/main" id="{736E02DA-9F31-4DF7-A4F8-C0FD7B723EB8}"/>
               </a:ext>
             </a:extLst>
           </p:cNvPr>
@@ -6160,7 +6160,7 @@
           <p:cNvPr id="5" name="s7-identity">
             <a:extLst xmlns:a="http://schemas.openxmlformats.org/drawingml/2006/main">
               <a:ext uri="{FF2B5EF4-FFF2-40B4-BE49-F238E27FC236}">
-                <a16:creationId xmlns:a16="http://schemas.microsoft.com/office/drawing/2014/main" id="{5BE1ECE8-75EE-408E-9017-6E58D6F49607}"/>
+                <a16:creationId xmlns:a16="http://schemas.microsoft.com/office/drawing/2014/main" id="{9216F64E-1F05-4DD8-A5A7-9A758FC513BD}"/>
               </a:ext>
             </a:extLst>
           </p:cNvPr>
@@ -6218,7 +6218,7 @@
           <p:cNvPr id="6" name="case-title">
             <a:extLst xmlns:a="http://schemas.openxmlformats.org/drawingml/2006/main">
               <a:ext uri="{FF2B5EF4-FFF2-40B4-BE49-F238E27FC236}">
-                <a16:creationId xmlns:a16="http://schemas.microsoft.com/office/drawing/2014/main" id="{1DF61BFA-8705-43B7-A9F4-42BC2235F96F}"/>
+                <a16:creationId xmlns:a16="http://schemas.microsoft.com/office/drawing/2014/main" id="{B447517F-49D4-40E3-83C8-EEE7CAA8DD34}"/>
               </a:ext>
             </a:extLst>
           </p:cNvPr>
@@ -6282,7 +6282,7 @@
           <p:cNvPr id="7" name="case-row-0">
             <a:extLst xmlns:a="http://schemas.openxmlformats.org/drawingml/2006/main">
               <a:ext uri="{FF2B5EF4-FFF2-40B4-BE49-F238E27FC236}">
-                <a16:creationId xmlns:a16="http://schemas.microsoft.com/office/drawing/2014/main" id="{FC105D79-0307-4DF1-B94A-D5C449B7473E}"/>
+                <a16:creationId xmlns:a16="http://schemas.microsoft.com/office/drawing/2014/main" id="{5A1F1C03-60FB-4F58-9554-A6431F4C655A}"/>
               </a:ext>
             </a:extLst>
           </p:cNvPr>
@@ -6346,7 +6346,7 @@
           <p:cNvPr id="8" name="case-row-1">
             <a:extLst xmlns:a="http://schemas.openxmlformats.org/drawingml/2006/main">
               <a:ext uri="{FF2B5EF4-FFF2-40B4-BE49-F238E27FC236}">
-                <a16:creationId xmlns:a16="http://schemas.microsoft.com/office/drawing/2014/main" id="{9213B641-5540-4538-92FA-747AD9C79547}"/>
+                <a16:creationId xmlns:a16="http://schemas.microsoft.com/office/drawing/2014/main" id="{F46FB8F2-2A4F-42C4-924B-2F0EA803A614}"/>
               </a:ext>
             </a:extLst>
           </p:cNvPr>
@@ -6410,7 +6410,7 @@
           <p:cNvPr id="9" name="case-row-2">
             <a:extLst xmlns:a="http://schemas.openxmlformats.org/drawingml/2006/main">
               <a:ext uri="{FF2B5EF4-FFF2-40B4-BE49-F238E27FC236}">
-                <a16:creationId xmlns:a16="http://schemas.microsoft.com/office/drawing/2014/main" id="{96D4BA3C-96BD-4946-A9BA-A8F697645A9D}"/>
+                <a16:creationId xmlns:a16="http://schemas.microsoft.com/office/drawing/2014/main" id="{2A672DA1-E2E1-42EE-9369-B3F30329108C}"/>
               </a:ext>
             </a:extLst>
           </p:cNvPr>
@@ -6474,7 +6474,7 @@
           <p:cNvPr id="10" name="case-row-3">
             <a:extLst xmlns:a="http://schemas.openxmlformats.org/drawingml/2006/main">
               <a:ext uri="{FF2B5EF4-FFF2-40B4-BE49-F238E27FC236}">
-                <a16:creationId xmlns:a16="http://schemas.microsoft.com/office/drawing/2014/main" id="{6DAB74BA-2386-4A6F-9BAE-618C96FD5DB2}"/>
+                <a16:creationId xmlns:a16="http://schemas.microsoft.com/office/drawing/2014/main" id="{143BE827-3856-4248-B8A8-1F7054261C83}"/>
               </a:ext>
             </a:extLst>
           </p:cNvPr>
@@ -6538,7 +6538,7 @@
           <p:cNvPr id="11" name="case-row-4">
             <a:extLst xmlns:a="http://schemas.openxmlformats.org/drawingml/2006/main">
               <a:ext uri="{FF2B5EF4-FFF2-40B4-BE49-F238E27FC236}">
-                <a16:creationId xmlns:a16="http://schemas.microsoft.com/office/drawing/2014/main" id="{88C88A4C-869F-4880-A872-147CFAF7DCCC}"/>
+                <a16:creationId xmlns:a16="http://schemas.microsoft.com/office/drawing/2014/main" id="{3FD113B0-420F-4B84-B72F-C1D32974126F}"/>
               </a:ext>
             </a:extLst>
           </p:cNvPr>
@@ -6602,7 +6602,7 @@
           <p:cNvPr id="12" name="s7-takeaway-rule">
             <a:extLst xmlns:a="http://schemas.openxmlformats.org/drawingml/2006/main">
               <a:ext uri="{FF2B5EF4-FFF2-40B4-BE49-F238E27FC236}">
-                <a16:creationId xmlns:a16="http://schemas.microsoft.com/office/drawing/2014/main" id="{E87612DA-BFD1-45BC-AAB6-27EA42EDCBCB}"/>
+                <a16:creationId xmlns:a16="http://schemas.microsoft.com/office/drawing/2014/main" id="{71F2B104-BE4B-4F5C-8498-988CA11504E9}"/>
               </a:ext>
             </a:extLst>
           </p:cNvPr>
@@ -6635,7 +6635,7 @@
           <p:cNvPr id="13" name="s7-takeaway">
             <a:extLst xmlns:a="http://schemas.openxmlformats.org/drawingml/2006/main">
               <a:ext uri="{FF2B5EF4-FFF2-40B4-BE49-F238E27FC236}">
-                <a16:creationId xmlns:a16="http://schemas.microsoft.com/office/drawing/2014/main" id="{00401140-2DC5-40D3-8901-93BB336EB6F9}"/>
+                <a16:creationId xmlns:a16="http://schemas.microsoft.com/office/drawing/2014/main" id="{A4DFA529-A65C-4468-81F7-30E766C8713C}"/>
               </a:ext>
             </a:extLst>
           </p:cNvPr>
@@ -6691,7 +6691,7 @@
     </p:spTree>
     <p:extLst>
       <p:ext uri="{BB962C8B-B14F-4D97-AF65-F5344CB8AC3E}">
-        <p14:creationId xmlns:p14="http://schemas.microsoft.com/office/powerpoint/2010/main" val="1953020542"/>
+        <p14:creationId xmlns:p14="http://schemas.microsoft.com/office/powerpoint/2010/main" val="1546590850"/>
       </p:ext>
     </p:extLst>
   </p:cSld>
@@ -6722,7 +6722,7 @@
           <p:cNvPr id="1" name="s8-rule">
             <a:extLst xmlns:a="http://schemas.openxmlformats.org/drawingml/2006/main">
               <a:ext uri="{FF2B5EF4-FFF2-40B4-BE49-F238E27FC236}">
-                <a16:creationId xmlns:a16="http://schemas.microsoft.com/office/drawing/2014/main" id="{1F19C2D9-3873-43FD-AE9C-B186937218F6}"/>
+                <a16:creationId xmlns:a16="http://schemas.microsoft.com/office/drawing/2014/main" id="{A9E52D60-5BCB-4EF1-840D-9B137225B03F}"/>
               </a:ext>
             </a:extLst>
           </p:cNvPr>
@@ -6755,7 +6755,7 @@
           <p:cNvPr id="2" name="s8-eyebrow">
             <a:extLst xmlns:a="http://schemas.openxmlformats.org/drawingml/2006/main">
               <a:ext uri="{FF2B5EF4-FFF2-40B4-BE49-F238E27FC236}">
-                <a16:creationId xmlns:a16="http://schemas.microsoft.com/office/drawing/2014/main" id="{DCFB76B1-BF39-4771-BEDB-C71826912A23}"/>
+                <a16:creationId xmlns:a16="http://schemas.microsoft.com/office/drawing/2014/main" id="{56185BC2-5117-4B4C-A7D9-D7A4C57C6BCA}"/>
               </a:ext>
             </a:extLst>
           </p:cNvPr>
@@ -6813,7 +6813,7 @@
           <p:cNvPr id="3" name="s8-title">
             <a:extLst xmlns:a="http://schemas.openxmlformats.org/drawingml/2006/main">
               <a:ext uri="{FF2B5EF4-FFF2-40B4-BE49-F238E27FC236}">
-                <a16:creationId xmlns:a16="http://schemas.microsoft.com/office/drawing/2014/main" id="{1A3187AF-8870-40C9-8270-3617E0E492D0}"/>
+                <a16:creationId xmlns:a16="http://schemas.microsoft.com/office/drawing/2014/main" id="{EF2C08CB-5407-453F-87DE-CD9F248EFCED}"/>
               </a:ext>
             </a:extLst>
           </p:cNvPr>
@@ -6871,7 +6871,7 @@
           <p:cNvPr id="4" name="s8-footer">
             <a:extLst xmlns:a="http://schemas.openxmlformats.org/drawingml/2006/main">
               <a:ext uri="{FF2B5EF4-FFF2-40B4-BE49-F238E27FC236}">
-                <a16:creationId xmlns:a16="http://schemas.microsoft.com/office/drawing/2014/main" id="{F6E77CD2-77BD-4A6B-8265-424FF736D904}"/>
+                <a16:creationId xmlns:a16="http://schemas.microsoft.com/office/drawing/2014/main" id="{78E4245E-0DD3-45B4-B43B-C36404D8EDC0}"/>
               </a:ext>
             </a:extLst>
           </p:cNvPr>
@@ -6902,7 +6902,7 @@
           <p:cNvPr id="5" name="s8-identity">
             <a:extLst xmlns:a="http://schemas.openxmlformats.org/drawingml/2006/main">
               <a:ext uri="{FF2B5EF4-FFF2-40B4-BE49-F238E27FC236}">
-                <a16:creationId xmlns:a16="http://schemas.microsoft.com/office/drawing/2014/main" id="{61F8E414-3BCD-4D0F-A263-391016CD27BC}"/>
+                <a16:creationId xmlns:a16="http://schemas.microsoft.com/office/drawing/2014/main" id="{3EB0240D-396C-4942-A246-06DACC13F140}"/>
               </a:ext>
             </a:extLst>
           </p:cNvPr>
@@ -6960,7 +6960,7 @@
           <p:cNvPr id="6" name="practice-circle-0">
             <a:extLst xmlns:a="http://schemas.openxmlformats.org/drawingml/2006/main">
               <a:ext uri="{FF2B5EF4-FFF2-40B4-BE49-F238E27FC236}">
-                <a16:creationId xmlns:a16="http://schemas.microsoft.com/office/drawing/2014/main" id="{828EE643-F63C-4C94-8451-A5C97BF17E4D}"/>
+                <a16:creationId xmlns:a16="http://schemas.microsoft.com/office/drawing/2014/main" id="{321D0672-E657-448E-BECD-2A8E9C4DEA99}"/>
               </a:ext>
             </a:extLst>
           </p:cNvPr>
@@ -6993,7 +6993,7 @@
           <p:cNvPr id="7" name="practice-number-0">
             <a:extLst xmlns:a="http://schemas.openxmlformats.org/drawingml/2006/main">
               <a:ext uri="{FF2B5EF4-FFF2-40B4-BE49-F238E27FC236}">
-                <a16:creationId xmlns:a16="http://schemas.microsoft.com/office/drawing/2014/main" id="{6D88699D-67AA-4D74-9B2C-A6F6138110D7}"/>
+                <a16:creationId xmlns:a16="http://schemas.microsoft.com/office/drawing/2014/main" id="{6DB491F5-D44B-45E9-9C60-E02D63DDA574}"/>
               </a:ext>
             </a:extLst>
           </p:cNvPr>
@@ -7051,7 +7051,7 @@
           <p:cNvPr id="8" name="practice-item-0">
             <a:extLst xmlns:a="http://schemas.openxmlformats.org/drawingml/2006/main">
               <a:ext uri="{FF2B5EF4-FFF2-40B4-BE49-F238E27FC236}">
-                <a16:creationId xmlns:a16="http://schemas.microsoft.com/office/drawing/2014/main" id="{C0F3CE74-DE85-4120-89B5-FCF218AEC763}"/>
+                <a16:creationId xmlns:a16="http://schemas.microsoft.com/office/drawing/2014/main" id="{7C5739D8-95FA-4A34-8BF3-8305F71A2948}"/>
               </a:ext>
             </a:extLst>
           </p:cNvPr>
@@ -7115,7 +7115,7 @@
           <p:cNvPr id="9" name="practice-connector-0">
             <a:extLst xmlns:a="http://schemas.openxmlformats.org/drawingml/2006/main">
               <a:ext uri="{FF2B5EF4-FFF2-40B4-BE49-F238E27FC236}">
-                <a16:creationId xmlns:a16="http://schemas.microsoft.com/office/drawing/2014/main" id="{DCF0C082-04D6-43C2-BF64-FF478ADA2563}"/>
+                <a16:creationId xmlns:a16="http://schemas.microsoft.com/office/drawing/2014/main" id="{C88A995A-CC39-4BB3-B372-E9645FBBA19E}"/>
               </a:ext>
             </a:extLst>
           </p:cNvPr>
@@ -7146,7 +7146,7 @@
           <p:cNvPr id="10" name="practice-circle-1">
             <a:extLst xmlns:a="http://schemas.openxmlformats.org/drawingml/2006/main">
               <a:ext uri="{FF2B5EF4-FFF2-40B4-BE49-F238E27FC236}">
-                <a16:creationId xmlns:a16="http://schemas.microsoft.com/office/drawing/2014/main" id="{E77778EE-614C-49D8-9CC9-B3F03E8DA16A}"/>
+                <a16:creationId xmlns:a16="http://schemas.microsoft.com/office/drawing/2014/main" id="{F8D375E5-93EF-400E-A34D-8C2B5CCC0774}"/>
               </a:ext>
             </a:extLst>
           </p:cNvPr>
@@ -7179,7 +7179,7 @@
           <p:cNvPr id="11" name="practice-number-1">
             <a:extLst xmlns:a="http://schemas.openxmlformats.org/drawingml/2006/main">
               <a:ext uri="{FF2B5EF4-FFF2-40B4-BE49-F238E27FC236}">
-                <a16:creationId xmlns:a16="http://schemas.microsoft.com/office/drawing/2014/main" id="{F956B02E-37B0-485C-BC4E-B7119D20CF8E}"/>
+                <a16:creationId xmlns:a16="http://schemas.microsoft.com/office/drawing/2014/main" id="{0C240876-13A1-4067-9CEF-B1B7470D94C6}"/>
               </a:ext>
             </a:extLst>
           </p:cNvPr>
@@ -7237,7 +7237,7 @@
           <p:cNvPr id="12" name="practice-item-1">
             <a:extLst xmlns:a="http://schemas.openxmlformats.org/drawingml/2006/main">
               <a:ext uri="{FF2B5EF4-FFF2-40B4-BE49-F238E27FC236}">
-                <a16:creationId xmlns:a16="http://schemas.microsoft.com/office/drawing/2014/main" id="{253621A3-B84D-4AA0-AEF3-D486EA2B58CF}"/>
+                <a16:creationId xmlns:a16="http://schemas.microsoft.com/office/drawing/2014/main" id="{B3A91EDA-BBE5-409A-80D0-62A78A72961C}"/>
               </a:ext>
             </a:extLst>
           </p:cNvPr>
@@ -7301,7 +7301,7 @@
           <p:cNvPr id="13" name="practice-connector-1">
             <a:extLst xmlns:a="http://schemas.openxmlformats.org/drawingml/2006/main">
               <a:ext uri="{FF2B5EF4-FFF2-40B4-BE49-F238E27FC236}">
-                <a16:creationId xmlns:a16="http://schemas.microsoft.com/office/drawing/2014/main" id="{66564A83-F7D2-4FE0-BBA0-935FCFFDE8CD}"/>
+                <a16:creationId xmlns:a16="http://schemas.microsoft.com/office/drawing/2014/main" id="{D896DDEF-1FEF-420F-A32E-2EB7711EB356}"/>
               </a:ext>
             </a:extLst>
           </p:cNvPr>
@@ -7332,7 +7332,7 @@
           <p:cNvPr id="14" name="practice-circle-2">
             <a:extLst xmlns:a="http://schemas.openxmlformats.org/drawingml/2006/main">
               <a:ext uri="{FF2B5EF4-FFF2-40B4-BE49-F238E27FC236}">
-                <a16:creationId xmlns:a16="http://schemas.microsoft.com/office/drawing/2014/main" id="{57DCEA82-365F-409A-B45E-6AACF5B29136}"/>
+                <a16:creationId xmlns:a16="http://schemas.microsoft.com/office/drawing/2014/main" id="{B3CEFDCE-12DD-486E-9E92-AE5E620C8FF7}"/>
               </a:ext>
             </a:extLst>
           </p:cNvPr>
@@ -7365,7 +7365,7 @@
           <p:cNvPr id="15" name="practice-number-2">
             <a:extLst xmlns:a="http://schemas.openxmlformats.org/drawingml/2006/main">
               <a:ext uri="{FF2B5EF4-FFF2-40B4-BE49-F238E27FC236}">
-                <a16:creationId xmlns:a16="http://schemas.microsoft.com/office/drawing/2014/main" id="{58715AFA-9CC3-45F8-A00A-FECD80D0268B}"/>
+                <a16:creationId xmlns:a16="http://schemas.microsoft.com/office/drawing/2014/main" id="{4436F68B-9F48-4268-9826-454C9A2073A3}"/>
               </a:ext>
             </a:extLst>
           </p:cNvPr>
@@ -7423,7 +7423,7 @@
           <p:cNvPr id="16" name="practice-item-2">
             <a:extLst xmlns:a="http://schemas.openxmlformats.org/drawingml/2006/main">
               <a:ext uri="{FF2B5EF4-FFF2-40B4-BE49-F238E27FC236}">
-                <a16:creationId xmlns:a16="http://schemas.microsoft.com/office/drawing/2014/main" id="{BEC2DFB0-D76E-40C3-A516-F43399F0DF84}"/>
+                <a16:creationId xmlns:a16="http://schemas.microsoft.com/office/drawing/2014/main" id="{1DB13863-D8AE-4DB8-9E53-57207BCFF4F2}"/>
               </a:ext>
             </a:extLst>
           </p:cNvPr>
@@ -7485,7 +7485,7 @@
     </p:spTree>
     <p:extLst>
       <p:ext uri="{BB962C8B-B14F-4D97-AF65-F5344CB8AC3E}">
-        <p14:creationId xmlns:p14="http://schemas.microsoft.com/office/powerpoint/2010/main" val="494647819"/>
+        <p14:creationId xmlns:p14="http://schemas.microsoft.com/office/powerpoint/2010/main" val="1376658127"/>
       </p:ext>
     </p:extLst>
   </p:cSld>
@@ -7516,7 +7516,7 @@
           <p:cNvPr id="1" name="s9-rule">
             <a:extLst xmlns:a="http://schemas.openxmlformats.org/drawingml/2006/main">
               <a:ext uri="{FF2B5EF4-FFF2-40B4-BE49-F238E27FC236}">
-                <a16:creationId xmlns:a16="http://schemas.microsoft.com/office/drawing/2014/main" id="{A4476B15-C4D2-431D-AD15-4FCA5E2F6162}"/>
+                <a16:creationId xmlns:a16="http://schemas.microsoft.com/office/drawing/2014/main" id="{2FEFBFE9-BAF0-4BFC-97E0-DAE911623C7C}"/>
               </a:ext>
             </a:extLst>
           </p:cNvPr>
@@ -7549,7 +7549,7 @@
           <p:cNvPr id="2" name="s9-eyebrow">
             <a:extLst xmlns:a="http://schemas.openxmlformats.org/drawingml/2006/main">
               <a:ext uri="{FF2B5EF4-FFF2-40B4-BE49-F238E27FC236}">
-                <a16:creationId xmlns:a16="http://schemas.microsoft.com/office/drawing/2014/main" id="{71B4B8FA-DE1A-4060-8989-4D37E64714D4}"/>
+                <a16:creationId xmlns:a16="http://schemas.microsoft.com/office/drawing/2014/main" id="{907336DF-11CF-41B3-B783-0476686A514A}"/>
               </a:ext>
             </a:extLst>
           </p:cNvPr>
@@ -7607,7 +7607,7 @@
           <p:cNvPr id="3" name="s9-title">
             <a:extLst xmlns:a="http://schemas.openxmlformats.org/drawingml/2006/main">
               <a:ext uri="{FF2B5EF4-FFF2-40B4-BE49-F238E27FC236}">
-                <a16:creationId xmlns:a16="http://schemas.microsoft.com/office/drawing/2014/main" id="{9CC1A77F-BB89-4AFF-BBD4-28F38E0AD18F}"/>
+                <a16:creationId xmlns:a16="http://schemas.microsoft.com/office/drawing/2014/main" id="{FA8C4718-5A22-4D03-A743-A5510204BF4B}"/>
               </a:ext>
             </a:extLst>
           </p:cNvPr>
@@ -7665,7 +7665,7 @@
           <p:cNvPr id="4" name="s9-footer">
             <a:extLst xmlns:a="http://schemas.openxmlformats.org/drawingml/2006/main">
               <a:ext uri="{FF2B5EF4-FFF2-40B4-BE49-F238E27FC236}">
-                <a16:creationId xmlns:a16="http://schemas.microsoft.com/office/drawing/2014/main" id="{2C0C1BCA-C5F0-4812-8CF8-8F57B8137D21}"/>
+                <a16:creationId xmlns:a16="http://schemas.microsoft.com/office/drawing/2014/main" id="{8119017F-0E82-4ADA-8264-9EEFC9FC0F51}"/>
               </a:ext>
             </a:extLst>
           </p:cNvPr>
@@ -7696,7 +7696,7 @@
           <p:cNvPr id="5" name="s9-identity">
             <a:extLst xmlns:a="http://schemas.openxmlformats.org/drawingml/2006/main">
               <a:ext uri="{FF2B5EF4-FFF2-40B4-BE49-F238E27FC236}">
-                <a16:creationId xmlns:a16="http://schemas.microsoft.com/office/drawing/2014/main" id="{F4B479DD-72BA-4D0E-AD36-A42B1EDD3F54}"/>
+                <a16:creationId xmlns:a16="http://schemas.microsoft.com/office/drawing/2014/main" id="{53577C03-BAA4-4FFE-9B43-C5F579907A1D}"/>
               </a:ext>
             </a:extLst>
           </p:cNvPr>
@@ -7754,7 +7754,7 @@
           <p:cNvPr id="6" name="recap-circle-0">
             <a:extLst xmlns:a="http://schemas.openxmlformats.org/drawingml/2006/main">
               <a:ext uri="{FF2B5EF4-FFF2-40B4-BE49-F238E27FC236}">
-                <a16:creationId xmlns:a16="http://schemas.microsoft.com/office/drawing/2014/main" id="{D6C294E1-AEE0-4915-A44D-5FCCFA7E1E6D}"/>
+                <a16:creationId xmlns:a16="http://schemas.microsoft.com/office/drawing/2014/main" id="{C6357A2C-7BB2-4C7E-8E98-61B07A682EEA}"/>
               </a:ext>
             </a:extLst>
           </p:cNvPr>
@@ -7787,7 +7787,7 @@
           <p:cNvPr id="7" name="recap-number-0">
             <a:extLst xmlns:a="http://schemas.openxmlformats.org/drawingml/2006/main">
               <a:ext uri="{FF2B5EF4-FFF2-40B4-BE49-F238E27FC236}">
-                <a16:creationId xmlns:a16="http://schemas.microsoft.com/office/drawing/2014/main" id="{4CEB8F23-3731-4CB6-B7BF-E3BE196B8C19}"/>
+                <a16:creationId xmlns:a16="http://schemas.microsoft.com/office/drawing/2014/main" id="{0E474C26-82A2-4B97-9D7A-0BE18BCB03D4}"/>
               </a:ext>
             </a:extLst>
           </p:cNvPr>
@@ -7845,7 +7845,7 @@
           <p:cNvPr id="8" name="recap-item-0">
             <a:extLst xmlns:a="http://schemas.openxmlformats.org/drawingml/2006/main">
               <a:ext uri="{FF2B5EF4-FFF2-40B4-BE49-F238E27FC236}">
-                <a16:creationId xmlns:a16="http://schemas.microsoft.com/office/drawing/2014/main" id="{4F7384C3-D961-4C53-BAB6-5513FC76C186}"/>
+                <a16:creationId xmlns:a16="http://schemas.microsoft.com/office/drawing/2014/main" id="{88307E49-684E-41C3-8706-4FACFCD9EF16}"/>
               </a:ext>
             </a:extLst>
           </p:cNvPr>
@@ -7909,7 +7909,7 @@
           <p:cNvPr id="9" name="recap-connector-0">
             <a:extLst xmlns:a="http://schemas.openxmlformats.org/drawingml/2006/main">
               <a:ext uri="{FF2B5EF4-FFF2-40B4-BE49-F238E27FC236}">
-                <a16:creationId xmlns:a16="http://schemas.microsoft.com/office/drawing/2014/main" id="{2B0DE6FE-72A0-4525-92BB-A2D35CD854E2}"/>
+                <a16:creationId xmlns:a16="http://schemas.microsoft.com/office/drawing/2014/main" id="{26E7FE40-5074-407B-B0BC-6B63C4BF8AF8}"/>
               </a:ext>
             </a:extLst>
           </p:cNvPr>
@@ -7940,7 +7940,7 @@
           <p:cNvPr id="10" name="recap-circle-1">
             <a:extLst xmlns:a="http://schemas.openxmlformats.org/drawingml/2006/main">
               <a:ext uri="{FF2B5EF4-FFF2-40B4-BE49-F238E27FC236}">
-                <a16:creationId xmlns:a16="http://schemas.microsoft.com/office/drawing/2014/main" id="{ADA0DCAB-A81C-4201-978D-1BFA3BE62A3A}"/>
+                <a16:creationId xmlns:a16="http://schemas.microsoft.com/office/drawing/2014/main" id="{A3F843B1-984D-4C73-A769-73684334D146}"/>
               </a:ext>
             </a:extLst>
           </p:cNvPr>
@@ -7973,7 +7973,7 @@
           <p:cNvPr id="11" name="recap-number-1">
             <a:extLst xmlns:a="http://schemas.openxmlformats.org/drawingml/2006/main">
               <a:ext uri="{FF2B5EF4-FFF2-40B4-BE49-F238E27FC236}">
-                <a16:creationId xmlns:a16="http://schemas.microsoft.com/office/drawing/2014/main" id="{4E6025FF-6433-42F6-BD29-F578B75642F3}"/>
+                <a16:creationId xmlns:a16="http://schemas.microsoft.com/office/drawing/2014/main" id="{298DE2C6-7FDF-4180-BD20-DDAFA28B0513}"/>
               </a:ext>
             </a:extLst>
           </p:cNvPr>
@@ -8031,7 +8031,7 @@
           <p:cNvPr id="12" name="recap-item-1">
             <a:extLst xmlns:a="http://schemas.openxmlformats.org/drawingml/2006/main">
               <a:ext uri="{FF2B5EF4-FFF2-40B4-BE49-F238E27FC236}">
-                <a16:creationId xmlns:a16="http://schemas.microsoft.com/office/drawing/2014/main" id="{0D5F3804-75C6-427D-9556-5AE738125C88}"/>
+                <a16:creationId xmlns:a16="http://schemas.microsoft.com/office/drawing/2014/main" id="{C5E870E8-7584-41D3-8D8F-00C41ACFA7B5}"/>
               </a:ext>
             </a:extLst>
           </p:cNvPr>
@@ -8095,7 +8095,7 @@
           <p:cNvPr id="13" name="recap-connector-1">
             <a:extLst xmlns:a="http://schemas.openxmlformats.org/drawingml/2006/main">
               <a:ext uri="{FF2B5EF4-FFF2-40B4-BE49-F238E27FC236}">
-                <a16:creationId xmlns:a16="http://schemas.microsoft.com/office/drawing/2014/main" id="{F766FF13-5532-48C0-BB45-E71A8331E955}"/>
+                <a16:creationId xmlns:a16="http://schemas.microsoft.com/office/drawing/2014/main" id="{DB2C6AD5-F4BC-481B-BF25-62D37647E41E}"/>
               </a:ext>
             </a:extLst>
           </p:cNvPr>
@@ -8126,7 +8126,7 @@
           <p:cNvPr id="14" name="recap-circle-2">
             <a:extLst xmlns:a="http://schemas.openxmlformats.org/drawingml/2006/main">
               <a:ext uri="{FF2B5EF4-FFF2-40B4-BE49-F238E27FC236}">
-                <a16:creationId xmlns:a16="http://schemas.microsoft.com/office/drawing/2014/main" id="{6EC75447-256B-4C44-9883-BA51BDE06D0F}"/>
+                <a16:creationId xmlns:a16="http://schemas.microsoft.com/office/drawing/2014/main" id="{EFC14D52-F1DA-4165-BE0D-8B304E16288D}"/>
               </a:ext>
             </a:extLst>
           </p:cNvPr>
@@ -8159,7 +8159,7 @@
           <p:cNvPr id="15" name="recap-number-2">
             <a:extLst xmlns:a="http://schemas.openxmlformats.org/drawingml/2006/main">
               <a:ext uri="{FF2B5EF4-FFF2-40B4-BE49-F238E27FC236}">
-                <a16:creationId xmlns:a16="http://schemas.microsoft.com/office/drawing/2014/main" id="{8E12DFEF-1DC1-439B-8000-629057F76407}"/>
+                <a16:creationId xmlns:a16="http://schemas.microsoft.com/office/drawing/2014/main" id="{1358790C-799A-4DEF-A7AB-C5CF65218E5B}"/>
               </a:ext>
             </a:extLst>
           </p:cNvPr>
@@ -8217,7 +8217,7 @@
           <p:cNvPr id="16" name="recap-item-2">
             <a:extLst xmlns:a="http://schemas.openxmlformats.org/drawingml/2006/main">
               <a:ext uri="{FF2B5EF4-FFF2-40B4-BE49-F238E27FC236}">
-                <a16:creationId xmlns:a16="http://schemas.microsoft.com/office/drawing/2014/main" id="{CA135A92-B9DB-492A-B628-D97E67332EB3}"/>
+                <a16:creationId xmlns:a16="http://schemas.microsoft.com/office/drawing/2014/main" id="{EDD349E0-48B5-422F-A1BE-E863476E3940}"/>
               </a:ext>
             </a:extLst>
           </p:cNvPr>
@@ -8279,7 +8279,7 @@
     </p:spTree>
     <p:extLst>
       <p:ext uri="{BB962C8B-B14F-4D97-AF65-F5344CB8AC3E}">
-        <p14:creationId xmlns:p14="http://schemas.microsoft.com/office/powerpoint/2010/main" val="724413451"/>
+        <p14:creationId xmlns:p14="http://schemas.microsoft.com/office/powerpoint/2010/main" val="249997077"/>
       </p:ext>
     </p:extLst>
   </p:cSld>
